--- a/Emotion Detector Deck.pptx
+++ b/Emotion Detector Deck.pptx
@@ -26,24 +26,31 @@
     <p:embeddedFont>
       <p:font typeface="IBM Plex Mono" panose="020B0509050203000203" pitchFamily="49" charset="0"/>
       <p:regular r:id="rId14"/>
+      <p:bold r:id="rId15"/>
+      <p:italic r:id="rId16"/>
+      <p:boldItalic r:id="rId17"/>
     </p:embeddedFont>
     <p:embeddedFont>
-      <p:font typeface="IBM Plex Mono Medium" panose="020F0502020204030204" pitchFamily="34" charset="0"/>
-      <p:regular r:id="rId15"/>
+      <p:font typeface="IBM Plex Mono Medium" panose="020B0609050203000203" pitchFamily="49" charset="0"/>
+      <p:regular r:id="rId18"/>
+      <p:italic r:id="rId19"/>
     </p:embeddedFont>
     <p:embeddedFont>
       <p:font typeface="IBM Plex Sans" panose="020B0503050203000203" pitchFamily="34" charset="0"/>
-      <p:regular r:id="rId16"/>
-      <p:bold r:id="rId17"/>
+      <p:regular r:id="rId20"/>
+      <p:bold r:id="rId21"/>
+      <p:italic r:id="rId22"/>
+      <p:boldItalic r:id="rId23"/>
     </p:embeddedFont>
     <p:embeddedFont>
-      <p:font typeface="IBM Plex Sans Bold" panose="020B0803050203000203" pitchFamily="34" charset="0"/>
-      <p:regular r:id="rId18"/>
-      <p:bold r:id="rId19"/>
+      <p:font typeface="IBM Plex Sans Bold" panose="020B0803050203000203" charset="0"/>
+      <p:regular r:id="rId24"/>
+      <p:bold r:id="rId25"/>
     </p:embeddedFont>
     <p:embeddedFont>
-      <p:font typeface="IBM Plex Sans Medium" panose="020F0502020204030204" pitchFamily="34" charset="0"/>
-      <p:regular r:id="rId20"/>
+      <p:font typeface="IBM Plex Sans Medium" panose="020B0603050203000203" pitchFamily="34" charset="0"/>
+      <p:regular r:id="rId26"/>
+      <p:italic r:id="rId27"/>
     </p:embeddedFont>
   </p:embeddedFontLst>
   <p:defaultTextStyle>
@@ -158,6 +165,1942 @@
     </p:ext>
   </p:extLst>
 </p:presentation>
+</file>
+
+<file path=ppt/charts/chart1.xml><?xml version="1.0" encoding="utf-8"?>
+<c:chartSpace xmlns:c="http://schemas.openxmlformats.org/drawingml/2006/chart" xmlns:a="http://schemas.openxmlformats.org/drawingml/2006/main" xmlns:r="http://schemas.openxmlformats.org/officeDocument/2006/relationships" xmlns:c16r2="http://schemas.microsoft.com/office/drawing/2015/06/chart">
+  <c:date1904 val="0"/>
+  <c:lang val="en-US"/>
+  <c:roundedCorners val="0"/>
+  <mc:AlternateContent xmlns:mc="http://schemas.openxmlformats.org/markup-compatibility/2006">
+    <mc:Choice xmlns:c14="http://schemas.microsoft.com/office/drawing/2007/8/2/chart" Requires="c14">
+      <c14:style val="102"/>
+    </mc:Choice>
+    <mc:Fallback>
+      <c:style val="2"/>
+    </mc:Fallback>
+  </mc:AlternateContent>
+  <c:chart>
+    <c:title>
+      <c:tx>
+        <c:rich>
+          <a:bodyPr rot="0" spcFirstLastPara="1" vertOverflow="ellipsis" vert="horz" wrap="square" anchor="ctr" anchorCtr="1"/>
+          <a:lstStyle/>
+          <a:p>
+            <a:pPr>
+              <a:defRPr sz="1862" b="0" i="0" u="none" strike="noStrike" kern="1200" spc="0" baseline="0">
+                <a:solidFill>
+                  <a:schemeClr val="tx1">
+                    <a:lumMod val="65000"/>
+                    <a:lumOff val="35000"/>
+                  </a:schemeClr>
+                </a:solidFill>
+                <a:latin typeface="+mn-lt"/>
+                <a:ea typeface="+mn-ea"/>
+                <a:cs typeface="+mn-cs"/>
+              </a:defRPr>
+            </a:pPr>
+            <a:r>
+              <a:rPr lang="en-US" altLang="ko-KR"/>
+              <a:t>Model</a:t>
+            </a:r>
+            <a:r>
+              <a:rPr lang="en-US" altLang="ko-KR" baseline="0"/>
+              <a:t> size</a:t>
+            </a:r>
+          </a:p>
+        </c:rich>
+      </c:tx>
+      <c:overlay val="0"/>
+      <c:spPr>
+        <a:noFill/>
+        <a:ln>
+          <a:noFill/>
+        </a:ln>
+        <a:effectLst/>
+      </c:spPr>
+      <c:txPr>
+        <a:bodyPr rot="0" spcFirstLastPara="1" vertOverflow="ellipsis" vert="horz" wrap="square" anchor="ctr" anchorCtr="1"/>
+        <a:lstStyle/>
+        <a:p>
+          <a:pPr>
+            <a:defRPr sz="1862" b="0" i="0" u="none" strike="noStrike" kern="1200" spc="0" baseline="0">
+              <a:solidFill>
+                <a:schemeClr val="tx1">
+                  <a:lumMod val="65000"/>
+                  <a:lumOff val="35000"/>
+                </a:schemeClr>
+              </a:solidFill>
+              <a:latin typeface="+mn-lt"/>
+              <a:ea typeface="+mn-ea"/>
+              <a:cs typeface="+mn-cs"/>
+            </a:defRPr>
+          </a:pPr>
+          <a:endParaRPr lang="ko-KR"/>
+        </a:p>
+      </c:txPr>
+    </c:title>
+    <c:autoTitleDeleted val="0"/>
+    <c:plotArea>
+      <c:layout/>
+      <c:barChart>
+        <c:barDir val="col"/>
+        <c:grouping val="clustered"/>
+        <c:varyColors val="0"/>
+        <c:ser>
+          <c:idx val="0"/>
+          <c:order val="0"/>
+          <c:tx>
+            <c:strRef>
+              <c:f>Sheet1!$B$1</c:f>
+              <c:strCache>
+                <c:ptCount val="1"/>
+                <c:pt idx="0">
+                  <c:v>Before</c:v>
+                </c:pt>
+              </c:strCache>
+            </c:strRef>
+          </c:tx>
+          <c:spPr>
+            <a:solidFill>
+              <a:schemeClr val="accent1"/>
+            </a:solidFill>
+            <a:ln>
+              <a:noFill/>
+            </a:ln>
+            <a:effectLst/>
+          </c:spPr>
+          <c:invertIfNegative val="0"/>
+          <c:cat>
+            <c:strRef>
+              <c:f>Sheet1!$A$2:$A$6</c:f>
+              <c:strCache>
+                <c:ptCount val="5"/>
+                <c:pt idx="0">
+                  <c:v>Face Model</c:v>
+                </c:pt>
+                <c:pt idx="1">
+                  <c:v>Voice Emotion Modle</c:v>
+                </c:pt>
+                <c:pt idx="2">
+                  <c:v>Voice Veracity Model</c:v>
+                </c:pt>
+                <c:pt idx="3">
+                  <c:v>Voice+PPG Emotion Model</c:v>
+                </c:pt>
+                <c:pt idx="4">
+                  <c:v>Voice+PPG Veracity Model</c:v>
+                </c:pt>
+              </c:strCache>
+            </c:strRef>
+          </c:cat>
+          <c:val>
+            <c:numRef>
+              <c:f>Sheet1!$B$2:$B$6</c:f>
+              <c:numCache>
+                <c:formatCode>General</c:formatCode>
+                <c:ptCount val="5"/>
+                <c:pt idx="0">
+                  <c:v>2.92</c:v>
+                </c:pt>
+                <c:pt idx="1">
+                  <c:v>3.88</c:v>
+                </c:pt>
+                <c:pt idx="2">
+                  <c:v>3.7</c:v>
+                </c:pt>
+                <c:pt idx="3">
+                  <c:v>4.76</c:v>
+                </c:pt>
+                <c:pt idx="4">
+                  <c:v>4.76</c:v>
+                </c:pt>
+              </c:numCache>
+            </c:numRef>
+          </c:val>
+          <c:extLst>
+            <c:ext xmlns:c16="http://schemas.microsoft.com/office/drawing/2014/chart" uri="{C3380CC4-5D6E-409C-BE32-E72D297353CC}">
+              <c16:uniqueId val="{00000000-1B29-4108-B900-86EE05439895}"/>
+            </c:ext>
+          </c:extLst>
+        </c:ser>
+        <c:ser>
+          <c:idx val="1"/>
+          <c:order val="1"/>
+          <c:tx>
+            <c:strRef>
+              <c:f>Sheet1!$C$1</c:f>
+              <c:strCache>
+                <c:ptCount val="1"/>
+                <c:pt idx="0">
+                  <c:v>After</c:v>
+                </c:pt>
+              </c:strCache>
+            </c:strRef>
+          </c:tx>
+          <c:spPr>
+            <a:solidFill>
+              <a:schemeClr val="accent2"/>
+            </a:solidFill>
+            <a:ln>
+              <a:noFill/>
+            </a:ln>
+            <a:effectLst/>
+          </c:spPr>
+          <c:invertIfNegative val="0"/>
+          <c:cat>
+            <c:strRef>
+              <c:f>Sheet1!$A$2:$A$6</c:f>
+              <c:strCache>
+                <c:ptCount val="5"/>
+                <c:pt idx="0">
+                  <c:v>Face Model</c:v>
+                </c:pt>
+                <c:pt idx="1">
+                  <c:v>Voice Emotion Modle</c:v>
+                </c:pt>
+                <c:pt idx="2">
+                  <c:v>Voice Veracity Model</c:v>
+                </c:pt>
+                <c:pt idx="3">
+                  <c:v>Voice+PPG Emotion Model</c:v>
+                </c:pt>
+                <c:pt idx="4">
+                  <c:v>Voice+PPG Veracity Model</c:v>
+                </c:pt>
+              </c:strCache>
+            </c:strRef>
+          </c:cat>
+          <c:val>
+            <c:numRef>
+              <c:f>Sheet1!$C$2:$C$6</c:f>
+              <c:numCache>
+                <c:formatCode>General</c:formatCode>
+                <c:ptCount val="5"/>
+                <c:pt idx="0">
+                  <c:v>1.32</c:v>
+                </c:pt>
+                <c:pt idx="1">
+                  <c:v>1.21</c:v>
+                </c:pt>
+                <c:pt idx="2">
+                  <c:v>1.1000000000000001</c:v>
+                </c:pt>
+                <c:pt idx="3">
+                  <c:v>1.31</c:v>
+                </c:pt>
+                <c:pt idx="4">
+                  <c:v>1.46</c:v>
+                </c:pt>
+              </c:numCache>
+            </c:numRef>
+          </c:val>
+          <c:extLst>
+            <c:ext xmlns:c16="http://schemas.microsoft.com/office/drawing/2014/chart" uri="{C3380CC4-5D6E-409C-BE32-E72D297353CC}">
+              <c16:uniqueId val="{00000001-1B29-4108-B900-86EE05439895}"/>
+            </c:ext>
+          </c:extLst>
+        </c:ser>
+        <c:dLbls>
+          <c:showLegendKey val="0"/>
+          <c:showVal val="0"/>
+          <c:showCatName val="0"/>
+          <c:showSerName val="0"/>
+          <c:showPercent val="0"/>
+          <c:showBubbleSize val="0"/>
+        </c:dLbls>
+        <c:gapWidth val="219"/>
+        <c:overlap val="-27"/>
+        <c:axId val="534928960"/>
+        <c:axId val="534923560"/>
+      </c:barChart>
+      <c:catAx>
+        <c:axId val="534928960"/>
+        <c:scaling>
+          <c:orientation val="minMax"/>
+        </c:scaling>
+        <c:delete val="0"/>
+        <c:axPos val="b"/>
+        <c:numFmt formatCode="General" sourceLinked="1"/>
+        <c:majorTickMark val="none"/>
+        <c:minorTickMark val="none"/>
+        <c:tickLblPos val="nextTo"/>
+        <c:spPr>
+          <a:noFill/>
+          <a:ln w="9525" cap="flat" cmpd="sng" algn="ctr">
+            <a:solidFill>
+              <a:schemeClr val="tx1">
+                <a:lumMod val="15000"/>
+                <a:lumOff val="85000"/>
+              </a:schemeClr>
+            </a:solidFill>
+            <a:round/>
+          </a:ln>
+          <a:effectLst/>
+        </c:spPr>
+        <c:txPr>
+          <a:bodyPr rot="-60000000" spcFirstLastPara="1" vertOverflow="ellipsis" vert="horz" wrap="square" anchor="ctr" anchorCtr="1"/>
+          <a:lstStyle/>
+          <a:p>
+            <a:pPr>
+              <a:defRPr sz="1197" b="0" i="0" u="none" strike="noStrike" kern="1200" baseline="0">
+                <a:solidFill>
+                  <a:schemeClr val="tx1">
+                    <a:lumMod val="65000"/>
+                    <a:lumOff val="35000"/>
+                  </a:schemeClr>
+                </a:solidFill>
+                <a:latin typeface="+mn-lt"/>
+                <a:ea typeface="+mn-ea"/>
+                <a:cs typeface="+mn-cs"/>
+              </a:defRPr>
+            </a:pPr>
+            <a:endParaRPr lang="ko-KR"/>
+          </a:p>
+        </c:txPr>
+        <c:crossAx val="534923560"/>
+        <c:crosses val="autoZero"/>
+        <c:auto val="1"/>
+        <c:lblAlgn val="ctr"/>
+        <c:lblOffset val="100"/>
+        <c:noMultiLvlLbl val="0"/>
+      </c:catAx>
+      <c:valAx>
+        <c:axId val="534923560"/>
+        <c:scaling>
+          <c:orientation val="minMax"/>
+        </c:scaling>
+        <c:delete val="0"/>
+        <c:axPos val="l"/>
+        <c:majorGridlines>
+          <c:spPr>
+            <a:ln w="9525" cap="flat" cmpd="sng" algn="ctr">
+              <a:solidFill>
+                <a:schemeClr val="tx1">
+                  <a:lumMod val="15000"/>
+                  <a:lumOff val="85000"/>
+                </a:schemeClr>
+              </a:solidFill>
+              <a:round/>
+            </a:ln>
+            <a:effectLst/>
+          </c:spPr>
+        </c:majorGridlines>
+        <c:numFmt formatCode="General" sourceLinked="1"/>
+        <c:majorTickMark val="none"/>
+        <c:minorTickMark val="none"/>
+        <c:tickLblPos val="nextTo"/>
+        <c:spPr>
+          <a:noFill/>
+          <a:ln>
+            <a:noFill/>
+          </a:ln>
+          <a:effectLst/>
+        </c:spPr>
+        <c:txPr>
+          <a:bodyPr rot="-60000000" spcFirstLastPara="1" vertOverflow="ellipsis" vert="horz" wrap="square" anchor="ctr" anchorCtr="1"/>
+          <a:lstStyle/>
+          <a:p>
+            <a:pPr>
+              <a:defRPr sz="1197" b="0" i="0" u="none" strike="noStrike" kern="1200" baseline="0">
+                <a:solidFill>
+                  <a:schemeClr val="tx1">
+                    <a:lumMod val="65000"/>
+                    <a:lumOff val="35000"/>
+                  </a:schemeClr>
+                </a:solidFill>
+                <a:latin typeface="+mn-lt"/>
+                <a:ea typeface="+mn-ea"/>
+                <a:cs typeface="+mn-cs"/>
+              </a:defRPr>
+            </a:pPr>
+            <a:endParaRPr lang="ko-KR"/>
+          </a:p>
+        </c:txPr>
+        <c:crossAx val="534928960"/>
+        <c:crosses val="autoZero"/>
+        <c:crossBetween val="between"/>
+      </c:valAx>
+      <c:spPr>
+        <a:noFill/>
+        <a:ln>
+          <a:noFill/>
+        </a:ln>
+        <a:effectLst/>
+      </c:spPr>
+    </c:plotArea>
+    <c:legend>
+      <c:legendPos val="b"/>
+      <c:overlay val="0"/>
+      <c:spPr>
+        <a:noFill/>
+        <a:ln>
+          <a:noFill/>
+        </a:ln>
+        <a:effectLst/>
+      </c:spPr>
+      <c:txPr>
+        <a:bodyPr rot="0" spcFirstLastPara="1" vertOverflow="ellipsis" vert="horz" wrap="square" anchor="ctr" anchorCtr="1"/>
+        <a:lstStyle/>
+        <a:p>
+          <a:pPr>
+            <a:defRPr sz="1197" b="0" i="0" u="none" strike="noStrike" kern="1200" baseline="0">
+              <a:solidFill>
+                <a:schemeClr val="tx1">
+                  <a:lumMod val="65000"/>
+                  <a:lumOff val="35000"/>
+                </a:schemeClr>
+              </a:solidFill>
+              <a:latin typeface="+mn-lt"/>
+              <a:ea typeface="+mn-ea"/>
+              <a:cs typeface="+mn-cs"/>
+            </a:defRPr>
+          </a:pPr>
+          <a:endParaRPr lang="ko-KR"/>
+        </a:p>
+      </c:txPr>
+    </c:legend>
+    <c:plotVisOnly val="1"/>
+    <c:dispBlanksAs val="gap"/>
+    <c:showDLblsOverMax val="0"/>
+    <c:extLst>
+      <c:ext xmlns:c16r3="http://schemas.microsoft.com/office/drawing/2017/03/chart" uri="{56B9EC1D-385E-4148-901F-78D8002777C0}">
+        <c16r3:dataDisplayOptions16>
+          <c16r3:dispNaAsBlank val="1"/>
+        </c16r3:dataDisplayOptions16>
+      </c:ext>
+    </c:extLst>
+  </c:chart>
+  <c:spPr>
+    <a:noFill/>
+    <a:ln>
+      <a:noFill/>
+    </a:ln>
+    <a:effectLst/>
+  </c:spPr>
+  <c:txPr>
+    <a:bodyPr/>
+    <a:lstStyle/>
+    <a:p>
+      <a:pPr>
+        <a:defRPr/>
+      </a:pPr>
+      <a:endParaRPr lang="ko-KR"/>
+    </a:p>
+  </c:txPr>
+  <c:externalData r:id="rId3">
+    <c:autoUpdate val="0"/>
+  </c:externalData>
+</c:chartSpace>
+</file>
+
+<file path=ppt/charts/chart2.xml><?xml version="1.0" encoding="utf-8"?>
+<c:chartSpace xmlns:c="http://schemas.openxmlformats.org/drawingml/2006/chart" xmlns:a="http://schemas.openxmlformats.org/drawingml/2006/main" xmlns:r="http://schemas.openxmlformats.org/officeDocument/2006/relationships" xmlns:c16r2="http://schemas.microsoft.com/office/drawing/2015/06/chart">
+  <c:date1904 val="0"/>
+  <c:lang val="en-US"/>
+  <c:roundedCorners val="0"/>
+  <mc:AlternateContent xmlns:mc="http://schemas.openxmlformats.org/markup-compatibility/2006">
+    <mc:Choice xmlns:c14="http://schemas.microsoft.com/office/drawing/2007/8/2/chart" Requires="c14">
+      <c14:style val="102"/>
+    </mc:Choice>
+    <mc:Fallback>
+      <c:style val="2"/>
+    </mc:Fallback>
+  </mc:AlternateContent>
+  <c:chart>
+    <c:title>
+      <c:tx>
+        <c:rich>
+          <a:bodyPr rot="0" spcFirstLastPara="1" vertOverflow="ellipsis" vert="horz" wrap="square" anchor="ctr" anchorCtr="1"/>
+          <a:lstStyle/>
+          <a:p>
+            <a:pPr>
+              <a:defRPr sz="1862" b="0" i="0" u="none" strike="noStrike" kern="1200" spc="0" baseline="0">
+                <a:solidFill>
+                  <a:schemeClr val="tx1">
+                    <a:lumMod val="65000"/>
+                    <a:lumOff val="35000"/>
+                  </a:schemeClr>
+                </a:solidFill>
+                <a:latin typeface="+mn-lt"/>
+                <a:ea typeface="+mn-ea"/>
+                <a:cs typeface="+mn-cs"/>
+              </a:defRPr>
+            </a:pPr>
+            <a:r>
+              <a:rPr lang="en-US" altLang="ko-KR"/>
+              <a:t>Accuracy</a:t>
+            </a:r>
+          </a:p>
+        </c:rich>
+      </c:tx>
+      <c:overlay val="0"/>
+      <c:spPr>
+        <a:noFill/>
+        <a:ln>
+          <a:noFill/>
+        </a:ln>
+        <a:effectLst/>
+      </c:spPr>
+      <c:txPr>
+        <a:bodyPr rot="0" spcFirstLastPara="1" vertOverflow="ellipsis" vert="horz" wrap="square" anchor="ctr" anchorCtr="1"/>
+        <a:lstStyle/>
+        <a:p>
+          <a:pPr>
+            <a:defRPr sz="1862" b="0" i="0" u="none" strike="noStrike" kern="1200" spc="0" baseline="0">
+              <a:solidFill>
+                <a:schemeClr val="tx1">
+                  <a:lumMod val="65000"/>
+                  <a:lumOff val="35000"/>
+                </a:schemeClr>
+              </a:solidFill>
+              <a:latin typeface="+mn-lt"/>
+              <a:ea typeface="+mn-ea"/>
+              <a:cs typeface="+mn-cs"/>
+            </a:defRPr>
+          </a:pPr>
+          <a:endParaRPr lang="ko-KR"/>
+        </a:p>
+      </c:txPr>
+    </c:title>
+    <c:autoTitleDeleted val="0"/>
+    <c:plotArea>
+      <c:layout/>
+      <c:barChart>
+        <c:barDir val="col"/>
+        <c:grouping val="clustered"/>
+        <c:varyColors val="0"/>
+        <c:ser>
+          <c:idx val="0"/>
+          <c:order val="0"/>
+          <c:tx>
+            <c:strRef>
+              <c:f>Sheet1!$B$1</c:f>
+              <c:strCache>
+                <c:ptCount val="1"/>
+                <c:pt idx="0">
+                  <c:v>Before</c:v>
+                </c:pt>
+              </c:strCache>
+            </c:strRef>
+          </c:tx>
+          <c:spPr>
+            <a:solidFill>
+              <a:schemeClr val="accent1"/>
+            </a:solidFill>
+            <a:ln>
+              <a:noFill/>
+            </a:ln>
+            <a:effectLst/>
+          </c:spPr>
+          <c:invertIfNegative val="0"/>
+          <c:cat>
+            <c:strRef>
+              <c:f>Sheet1!$A$2:$A$6</c:f>
+              <c:strCache>
+                <c:ptCount val="5"/>
+                <c:pt idx="0">
+                  <c:v>Face Model</c:v>
+                </c:pt>
+                <c:pt idx="1">
+                  <c:v>Voice Emotion Modle</c:v>
+                </c:pt>
+                <c:pt idx="2">
+                  <c:v>Voice Veracity Model</c:v>
+                </c:pt>
+                <c:pt idx="3">
+                  <c:v>Voice+PPG Emotion Model</c:v>
+                </c:pt>
+                <c:pt idx="4">
+                  <c:v>Voice+PPG Veracity Model</c:v>
+                </c:pt>
+              </c:strCache>
+            </c:strRef>
+          </c:cat>
+          <c:val>
+            <c:numRef>
+              <c:f>Sheet1!$B$2:$B$6</c:f>
+              <c:numCache>
+                <c:formatCode>General</c:formatCode>
+                <c:ptCount val="5"/>
+                <c:pt idx="0">
+                  <c:v>68</c:v>
+                </c:pt>
+                <c:pt idx="1">
+                  <c:v>13</c:v>
+                </c:pt>
+                <c:pt idx="2">
+                  <c:v>50</c:v>
+                </c:pt>
+                <c:pt idx="3">
+                  <c:v>33</c:v>
+                </c:pt>
+                <c:pt idx="4">
+                  <c:v>49</c:v>
+                </c:pt>
+              </c:numCache>
+            </c:numRef>
+          </c:val>
+          <c:extLst>
+            <c:ext xmlns:c16="http://schemas.microsoft.com/office/drawing/2014/chart" uri="{C3380CC4-5D6E-409C-BE32-E72D297353CC}">
+              <c16:uniqueId val="{00000000-1E2F-4DF9-8FA9-6616F2197E3A}"/>
+            </c:ext>
+          </c:extLst>
+        </c:ser>
+        <c:ser>
+          <c:idx val="1"/>
+          <c:order val="1"/>
+          <c:tx>
+            <c:strRef>
+              <c:f>Sheet1!$C$1</c:f>
+              <c:strCache>
+                <c:ptCount val="1"/>
+                <c:pt idx="0">
+                  <c:v>After</c:v>
+                </c:pt>
+              </c:strCache>
+            </c:strRef>
+          </c:tx>
+          <c:spPr>
+            <a:solidFill>
+              <a:schemeClr val="accent2"/>
+            </a:solidFill>
+            <a:ln>
+              <a:noFill/>
+            </a:ln>
+            <a:effectLst/>
+          </c:spPr>
+          <c:invertIfNegative val="0"/>
+          <c:cat>
+            <c:strRef>
+              <c:f>Sheet1!$A$2:$A$6</c:f>
+              <c:strCache>
+                <c:ptCount val="5"/>
+                <c:pt idx="0">
+                  <c:v>Face Model</c:v>
+                </c:pt>
+                <c:pt idx="1">
+                  <c:v>Voice Emotion Modle</c:v>
+                </c:pt>
+                <c:pt idx="2">
+                  <c:v>Voice Veracity Model</c:v>
+                </c:pt>
+                <c:pt idx="3">
+                  <c:v>Voice+PPG Emotion Model</c:v>
+                </c:pt>
+                <c:pt idx="4">
+                  <c:v>Voice+PPG Veracity Model</c:v>
+                </c:pt>
+              </c:strCache>
+            </c:strRef>
+          </c:cat>
+          <c:val>
+            <c:numRef>
+              <c:f>Sheet1!$C$2:$C$6</c:f>
+              <c:numCache>
+                <c:formatCode>General</c:formatCode>
+                <c:ptCount val="5"/>
+                <c:pt idx="0">
+                  <c:v>40</c:v>
+                </c:pt>
+                <c:pt idx="1">
+                  <c:v>13</c:v>
+                </c:pt>
+                <c:pt idx="2">
+                  <c:v>50</c:v>
+                </c:pt>
+                <c:pt idx="3">
+                  <c:v>14</c:v>
+                </c:pt>
+                <c:pt idx="4">
+                  <c:v>47</c:v>
+                </c:pt>
+              </c:numCache>
+            </c:numRef>
+          </c:val>
+          <c:extLst>
+            <c:ext xmlns:c16="http://schemas.microsoft.com/office/drawing/2014/chart" uri="{C3380CC4-5D6E-409C-BE32-E72D297353CC}">
+              <c16:uniqueId val="{00000001-1E2F-4DF9-8FA9-6616F2197E3A}"/>
+            </c:ext>
+          </c:extLst>
+        </c:ser>
+        <c:dLbls>
+          <c:showLegendKey val="0"/>
+          <c:showVal val="0"/>
+          <c:showCatName val="0"/>
+          <c:showSerName val="0"/>
+          <c:showPercent val="0"/>
+          <c:showBubbleSize val="0"/>
+        </c:dLbls>
+        <c:gapWidth val="219"/>
+        <c:overlap val="-27"/>
+        <c:axId val="534928960"/>
+        <c:axId val="534923560"/>
+      </c:barChart>
+      <c:catAx>
+        <c:axId val="534928960"/>
+        <c:scaling>
+          <c:orientation val="minMax"/>
+        </c:scaling>
+        <c:delete val="0"/>
+        <c:axPos val="b"/>
+        <c:numFmt formatCode="General" sourceLinked="1"/>
+        <c:majorTickMark val="none"/>
+        <c:minorTickMark val="none"/>
+        <c:tickLblPos val="nextTo"/>
+        <c:spPr>
+          <a:noFill/>
+          <a:ln w="9525" cap="flat" cmpd="sng" algn="ctr">
+            <a:solidFill>
+              <a:schemeClr val="tx1">
+                <a:lumMod val="15000"/>
+                <a:lumOff val="85000"/>
+              </a:schemeClr>
+            </a:solidFill>
+            <a:round/>
+          </a:ln>
+          <a:effectLst/>
+        </c:spPr>
+        <c:txPr>
+          <a:bodyPr rot="-60000000" spcFirstLastPara="1" vertOverflow="ellipsis" vert="horz" wrap="square" anchor="ctr" anchorCtr="1"/>
+          <a:lstStyle/>
+          <a:p>
+            <a:pPr>
+              <a:defRPr sz="1197" b="0" i="0" u="none" strike="noStrike" kern="1200" baseline="0">
+                <a:solidFill>
+                  <a:schemeClr val="tx1">
+                    <a:lumMod val="65000"/>
+                    <a:lumOff val="35000"/>
+                  </a:schemeClr>
+                </a:solidFill>
+                <a:latin typeface="+mn-lt"/>
+                <a:ea typeface="+mn-ea"/>
+                <a:cs typeface="+mn-cs"/>
+              </a:defRPr>
+            </a:pPr>
+            <a:endParaRPr lang="ko-KR"/>
+          </a:p>
+        </c:txPr>
+        <c:crossAx val="534923560"/>
+        <c:crosses val="autoZero"/>
+        <c:auto val="1"/>
+        <c:lblAlgn val="ctr"/>
+        <c:lblOffset val="100"/>
+        <c:noMultiLvlLbl val="0"/>
+      </c:catAx>
+      <c:valAx>
+        <c:axId val="534923560"/>
+        <c:scaling>
+          <c:orientation val="minMax"/>
+        </c:scaling>
+        <c:delete val="0"/>
+        <c:axPos val="l"/>
+        <c:majorGridlines>
+          <c:spPr>
+            <a:ln w="9525" cap="flat" cmpd="sng" algn="ctr">
+              <a:solidFill>
+                <a:schemeClr val="tx1">
+                  <a:lumMod val="15000"/>
+                  <a:lumOff val="85000"/>
+                </a:schemeClr>
+              </a:solidFill>
+              <a:round/>
+            </a:ln>
+            <a:effectLst/>
+          </c:spPr>
+        </c:majorGridlines>
+        <c:numFmt formatCode="General" sourceLinked="1"/>
+        <c:majorTickMark val="none"/>
+        <c:minorTickMark val="none"/>
+        <c:tickLblPos val="nextTo"/>
+        <c:spPr>
+          <a:noFill/>
+          <a:ln>
+            <a:noFill/>
+          </a:ln>
+          <a:effectLst/>
+        </c:spPr>
+        <c:txPr>
+          <a:bodyPr rot="-60000000" spcFirstLastPara="1" vertOverflow="ellipsis" vert="horz" wrap="square" anchor="ctr" anchorCtr="1"/>
+          <a:lstStyle/>
+          <a:p>
+            <a:pPr>
+              <a:defRPr sz="1197" b="0" i="0" u="none" strike="noStrike" kern="1200" baseline="0">
+                <a:solidFill>
+                  <a:schemeClr val="tx1">
+                    <a:lumMod val="65000"/>
+                    <a:lumOff val="35000"/>
+                  </a:schemeClr>
+                </a:solidFill>
+                <a:latin typeface="+mn-lt"/>
+                <a:ea typeface="+mn-ea"/>
+                <a:cs typeface="+mn-cs"/>
+              </a:defRPr>
+            </a:pPr>
+            <a:endParaRPr lang="ko-KR"/>
+          </a:p>
+        </c:txPr>
+        <c:crossAx val="534928960"/>
+        <c:crosses val="autoZero"/>
+        <c:crossBetween val="between"/>
+      </c:valAx>
+      <c:spPr>
+        <a:noFill/>
+        <a:ln>
+          <a:noFill/>
+        </a:ln>
+        <a:effectLst/>
+      </c:spPr>
+    </c:plotArea>
+    <c:legend>
+      <c:legendPos val="b"/>
+      <c:overlay val="0"/>
+      <c:spPr>
+        <a:noFill/>
+        <a:ln>
+          <a:noFill/>
+        </a:ln>
+        <a:effectLst/>
+      </c:spPr>
+      <c:txPr>
+        <a:bodyPr rot="0" spcFirstLastPara="1" vertOverflow="ellipsis" vert="horz" wrap="square" anchor="ctr" anchorCtr="1"/>
+        <a:lstStyle/>
+        <a:p>
+          <a:pPr>
+            <a:defRPr sz="1197" b="0" i="0" u="none" strike="noStrike" kern="1200" baseline="0">
+              <a:solidFill>
+                <a:schemeClr val="tx1">
+                  <a:lumMod val="65000"/>
+                  <a:lumOff val="35000"/>
+                </a:schemeClr>
+              </a:solidFill>
+              <a:latin typeface="+mn-lt"/>
+              <a:ea typeface="+mn-ea"/>
+              <a:cs typeface="+mn-cs"/>
+            </a:defRPr>
+          </a:pPr>
+          <a:endParaRPr lang="ko-KR"/>
+        </a:p>
+      </c:txPr>
+    </c:legend>
+    <c:plotVisOnly val="1"/>
+    <c:dispBlanksAs val="gap"/>
+    <c:showDLblsOverMax val="0"/>
+    <c:extLst>
+      <c:ext xmlns:c16r3="http://schemas.microsoft.com/office/drawing/2017/03/chart" uri="{56B9EC1D-385E-4148-901F-78D8002777C0}">
+        <c16r3:dataDisplayOptions16>
+          <c16r3:dispNaAsBlank val="1"/>
+        </c16r3:dataDisplayOptions16>
+      </c:ext>
+    </c:extLst>
+  </c:chart>
+  <c:spPr>
+    <a:noFill/>
+    <a:ln>
+      <a:noFill/>
+    </a:ln>
+    <a:effectLst/>
+  </c:spPr>
+  <c:txPr>
+    <a:bodyPr/>
+    <a:lstStyle/>
+    <a:p>
+      <a:pPr>
+        <a:defRPr/>
+      </a:pPr>
+      <a:endParaRPr lang="ko-KR"/>
+    </a:p>
+  </c:txPr>
+  <c:externalData r:id="rId3">
+    <c:autoUpdate val="0"/>
+  </c:externalData>
+</c:chartSpace>
+</file>
+
+<file path=ppt/charts/colors1.xml><?xml version="1.0" encoding="utf-8"?>
+<cs:colorStyle xmlns:cs="http://schemas.microsoft.com/office/drawing/2012/chartStyle" xmlns:a="http://schemas.openxmlformats.org/drawingml/2006/main" meth="cycle" id="10">
+  <a:schemeClr val="accent1"/>
+  <a:schemeClr val="accent2"/>
+  <a:schemeClr val="accent3"/>
+  <a:schemeClr val="accent4"/>
+  <a:schemeClr val="accent5"/>
+  <a:schemeClr val="accent6"/>
+  <cs:variation/>
+  <cs:variation>
+    <a:lumMod val="60000"/>
+  </cs:variation>
+  <cs:variation>
+    <a:lumMod val="80000"/>
+    <a:lumOff val="20000"/>
+  </cs:variation>
+  <cs:variation>
+    <a:lumMod val="80000"/>
+  </cs:variation>
+  <cs:variation>
+    <a:lumMod val="60000"/>
+    <a:lumOff val="40000"/>
+  </cs:variation>
+  <cs:variation>
+    <a:lumMod val="50000"/>
+  </cs:variation>
+  <cs:variation>
+    <a:lumMod val="70000"/>
+    <a:lumOff val="30000"/>
+  </cs:variation>
+  <cs:variation>
+    <a:lumMod val="70000"/>
+  </cs:variation>
+  <cs:variation>
+    <a:lumMod val="50000"/>
+    <a:lumOff val="50000"/>
+  </cs:variation>
+</cs:colorStyle>
+</file>
+
+<file path=ppt/charts/colors2.xml><?xml version="1.0" encoding="utf-8"?>
+<cs:colorStyle xmlns:cs="http://schemas.microsoft.com/office/drawing/2012/chartStyle" xmlns:a="http://schemas.openxmlformats.org/drawingml/2006/main" meth="cycle" id="10">
+  <a:schemeClr val="accent1"/>
+  <a:schemeClr val="accent2"/>
+  <a:schemeClr val="accent3"/>
+  <a:schemeClr val="accent4"/>
+  <a:schemeClr val="accent5"/>
+  <a:schemeClr val="accent6"/>
+  <cs:variation/>
+  <cs:variation>
+    <a:lumMod val="60000"/>
+  </cs:variation>
+  <cs:variation>
+    <a:lumMod val="80000"/>
+    <a:lumOff val="20000"/>
+  </cs:variation>
+  <cs:variation>
+    <a:lumMod val="80000"/>
+  </cs:variation>
+  <cs:variation>
+    <a:lumMod val="60000"/>
+    <a:lumOff val="40000"/>
+  </cs:variation>
+  <cs:variation>
+    <a:lumMod val="50000"/>
+  </cs:variation>
+  <cs:variation>
+    <a:lumMod val="70000"/>
+    <a:lumOff val="30000"/>
+  </cs:variation>
+  <cs:variation>
+    <a:lumMod val="70000"/>
+  </cs:variation>
+  <cs:variation>
+    <a:lumMod val="50000"/>
+    <a:lumOff val="50000"/>
+  </cs:variation>
+</cs:colorStyle>
+</file>
+
+<file path=ppt/charts/style1.xml><?xml version="1.0" encoding="utf-8"?>
+<cs:chartStyle xmlns:cs="http://schemas.microsoft.com/office/drawing/2012/chartStyle" xmlns:a="http://schemas.openxmlformats.org/drawingml/2006/main" id="201">
+  <cs:axisTitle>
+    <cs:lnRef idx="0"/>
+    <cs:fillRef idx="0"/>
+    <cs:effectRef idx="0"/>
+    <cs:fontRef idx="minor">
+      <a:schemeClr val="tx1">
+        <a:lumMod val="65000"/>
+        <a:lumOff val="35000"/>
+      </a:schemeClr>
+    </cs:fontRef>
+    <cs:defRPr sz="1330" kern="1200"/>
+  </cs:axisTitle>
+  <cs:categoryAxis>
+    <cs:lnRef idx="0"/>
+    <cs:fillRef idx="0"/>
+    <cs:effectRef idx="0"/>
+    <cs:fontRef idx="minor">
+      <a:schemeClr val="tx1">
+        <a:lumMod val="65000"/>
+        <a:lumOff val="35000"/>
+      </a:schemeClr>
+    </cs:fontRef>
+    <cs:spPr>
+      <a:ln w="9525" cap="flat" cmpd="sng" algn="ctr">
+        <a:solidFill>
+          <a:schemeClr val="tx1">
+            <a:lumMod val="15000"/>
+            <a:lumOff val="85000"/>
+          </a:schemeClr>
+        </a:solidFill>
+        <a:round/>
+      </a:ln>
+    </cs:spPr>
+    <cs:defRPr sz="1197" kern="1200"/>
+  </cs:categoryAxis>
+  <cs:chartArea mods="allowNoFillOverride allowNoLineOverride">
+    <cs:lnRef idx="0"/>
+    <cs:fillRef idx="0"/>
+    <cs:effectRef idx="0"/>
+    <cs:fontRef idx="minor">
+      <a:schemeClr val="tx1"/>
+    </cs:fontRef>
+    <cs:spPr>
+      <a:solidFill>
+        <a:schemeClr val="bg1"/>
+      </a:solidFill>
+      <a:ln w="9525" cap="flat" cmpd="sng" algn="ctr">
+        <a:solidFill>
+          <a:schemeClr val="tx1">
+            <a:lumMod val="15000"/>
+            <a:lumOff val="85000"/>
+          </a:schemeClr>
+        </a:solidFill>
+        <a:round/>
+      </a:ln>
+    </cs:spPr>
+    <cs:defRPr sz="1330" kern="1200"/>
+  </cs:chartArea>
+  <cs:dataLabel>
+    <cs:lnRef idx="0"/>
+    <cs:fillRef idx="0"/>
+    <cs:effectRef idx="0"/>
+    <cs:fontRef idx="minor">
+      <a:schemeClr val="tx1">
+        <a:lumMod val="75000"/>
+        <a:lumOff val="25000"/>
+      </a:schemeClr>
+    </cs:fontRef>
+    <cs:defRPr sz="1197" kern="1200"/>
+  </cs:dataLabel>
+  <cs:dataLabelCallout>
+    <cs:lnRef idx="0"/>
+    <cs:fillRef idx="0"/>
+    <cs:effectRef idx="0"/>
+    <cs:fontRef idx="minor">
+      <a:schemeClr val="dk1">
+        <a:lumMod val="65000"/>
+        <a:lumOff val="35000"/>
+      </a:schemeClr>
+    </cs:fontRef>
+    <cs:spPr>
+      <a:solidFill>
+        <a:schemeClr val="lt1"/>
+      </a:solidFill>
+      <a:ln>
+        <a:solidFill>
+          <a:schemeClr val="dk1">
+            <a:lumMod val="25000"/>
+            <a:lumOff val="75000"/>
+          </a:schemeClr>
+        </a:solidFill>
+      </a:ln>
+    </cs:spPr>
+    <cs:defRPr sz="1197" kern="1200"/>
+    <cs:bodyPr rot="0" spcFirstLastPara="1" vertOverflow="clip" horzOverflow="clip" vert="horz" wrap="square" lIns="36576" tIns="18288" rIns="36576" bIns="18288" anchor="ctr" anchorCtr="1">
+      <a:spAutoFit/>
+    </cs:bodyPr>
+  </cs:dataLabelCallout>
+  <cs:dataPoint>
+    <cs:lnRef idx="0"/>
+    <cs:fillRef idx="1">
+      <cs:styleClr val="auto"/>
+    </cs:fillRef>
+    <cs:effectRef idx="0"/>
+    <cs:fontRef idx="minor">
+      <a:schemeClr val="tx1"/>
+    </cs:fontRef>
+  </cs:dataPoint>
+  <cs:dataPoint3D>
+    <cs:lnRef idx="0"/>
+    <cs:fillRef idx="1">
+      <cs:styleClr val="auto"/>
+    </cs:fillRef>
+    <cs:effectRef idx="0"/>
+    <cs:fontRef idx="minor">
+      <a:schemeClr val="tx1"/>
+    </cs:fontRef>
+  </cs:dataPoint3D>
+  <cs:dataPointLine>
+    <cs:lnRef idx="0">
+      <cs:styleClr val="auto"/>
+    </cs:lnRef>
+    <cs:fillRef idx="1"/>
+    <cs:effectRef idx="0"/>
+    <cs:fontRef idx="minor">
+      <a:schemeClr val="tx1"/>
+    </cs:fontRef>
+    <cs:spPr>
+      <a:ln w="28575" cap="rnd">
+        <a:solidFill>
+          <a:schemeClr val="phClr"/>
+        </a:solidFill>
+        <a:round/>
+      </a:ln>
+    </cs:spPr>
+  </cs:dataPointLine>
+  <cs:dataPointMarker>
+    <cs:lnRef idx="0">
+      <cs:styleClr val="auto"/>
+    </cs:lnRef>
+    <cs:fillRef idx="1">
+      <cs:styleClr val="auto"/>
+    </cs:fillRef>
+    <cs:effectRef idx="0"/>
+    <cs:fontRef idx="minor">
+      <a:schemeClr val="tx1"/>
+    </cs:fontRef>
+    <cs:spPr>
+      <a:ln w="9525">
+        <a:solidFill>
+          <a:schemeClr val="phClr"/>
+        </a:solidFill>
+      </a:ln>
+    </cs:spPr>
+  </cs:dataPointMarker>
+  <cs:dataPointMarkerLayout symbol="circle" size="5"/>
+  <cs:dataPointWireframe>
+    <cs:lnRef idx="0">
+      <cs:styleClr val="auto"/>
+    </cs:lnRef>
+    <cs:fillRef idx="1"/>
+    <cs:effectRef idx="0"/>
+    <cs:fontRef idx="minor">
+      <a:schemeClr val="tx1"/>
+    </cs:fontRef>
+    <cs:spPr>
+      <a:ln w="9525" cap="rnd">
+        <a:solidFill>
+          <a:schemeClr val="phClr"/>
+        </a:solidFill>
+        <a:round/>
+      </a:ln>
+    </cs:spPr>
+  </cs:dataPointWireframe>
+  <cs:dataTable>
+    <cs:lnRef idx="0"/>
+    <cs:fillRef idx="0"/>
+    <cs:effectRef idx="0"/>
+    <cs:fontRef idx="minor">
+      <a:schemeClr val="tx1">
+        <a:lumMod val="65000"/>
+        <a:lumOff val="35000"/>
+      </a:schemeClr>
+    </cs:fontRef>
+    <cs:spPr>
+      <a:noFill/>
+      <a:ln w="9525" cap="flat" cmpd="sng" algn="ctr">
+        <a:solidFill>
+          <a:schemeClr val="tx1">
+            <a:lumMod val="15000"/>
+            <a:lumOff val="85000"/>
+          </a:schemeClr>
+        </a:solidFill>
+        <a:round/>
+      </a:ln>
+    </cs:spPr>
+    <cs:defRPr sz="1197" kern="1200"/>
+  </cs:dataTable>
+  <cs:downBar>
+    <cs:lnRef idx="0"/>
+    <cs:fillRef idx="0"/>
+    <cs:effectRef idx="0"/>
+    <cs:fontRef idx="minor">
+      <a:schemeClr val="dk1"/>
+    </cs:fontRef>
+    <cs:spPr>
+      <a:solidFill>
+        <a:schemeClr val="dk1">
+          <a:lumMod val="65000"/>
+          <a:lumOff val="35000"/>
+        </a:schemeClr>
+      </a:solidFill>
+      <a:ln w="9525">
+        <a:solidFill>
+          <a:schemeClr val="tx1">
+            <a:lumMod val="65000"/>
+            <a:lumOff val="35000"/>
+          </a:schemeClr>
+        </a:solidFill>
+      </a:ln>
+    </cs:spPr>
+  </cs:downBar>
+  <cs:dropLine>
+    <cs:lnRef idx="0"/>
+    <cs:fillRef idx="0"/>
+    <cs:effectRef idx="0"/>
+    <cs:fontRef idx="minor">
+      <a:schemeClr val="tx1"/>
+    </cs:fontRef>
+    <cs:spPr>
+      <a:ln w="9525" cap="flat" cmpd="sng" algn="ctr">
+        <a:solidFill>
+          <a:schemeClr val="tx1">
+            <a:lumMod val="35000"/>
+            <a:lumOff val="65000"/>
+          </a:schemeClr>
+        </a:solidFill>
+        <a:round/>
+      </a:ln>
+    </cs:spPr>
+  </cs:dropLine>
+  <cs:errorBar>
+    <cs:lnRef idx="0"/>
+    <cs:fillRef idx="0"/>
+    <cs:effectRef idx="0"/>
+    <cs:fontRef idx="minor">
+      <a:schemeClr val="tx1"/>
+    </cs:fontRef>
+    <cs:spPr>
+      <a:ln w="9525" cap="flat" cmpd="sng" algn="ctr">
+        <a:solidFill>
+          <a:schemeClr val="tx1">
+            <a:lumMod val="65000"/>
+            <a:lumOff val="35000"/>
+          </a:schemeClr>
+        </a:solidFill>
+        <a:round/>
+      </a:ln>
+    </cs:spPr>
+  </cs:errorBar>
+  <cs:floor>
+    <cs:lnRef idx="0"/>
+    <cs:fillRef idx="0"/>
+    <cs:effectRef idx="0"/>
+    <cs:fontRef idx="minor">
+      <a:schemeClr val="tx1"/>
+    </cs:fontRef>
+    <cs:spPr>
+      <a:noFill/>
+      <a:ln>
+        <a:noFill/>
+      </a:ln>
+    </cs:spPr>
+  </cs:floor>
+  <cs:gridlineMajor>
+    <cs:lnRef idx="0"/>
+    <cs:fillRef idx="0"/>
+    <cs:effectRef idx="0"/>
+    <cs:fontRef idx="minor">
+      <a:schemeClr val="tx1"/>
+    </cs:fontRef>
+    <cs:spPr>
+      <a:ln w="9525" cap="flat" cmpd="sng" algn="ctr">
+        <a:solidFill>
+          <a:schemeClr val="tx1">
+            <a:lumMod val="15000"/>
+            <a:lumOff val="85000"/>
+          </a:schemeClr>
+        </a:solidFill>
+        <a:round/>
+      </a:ln>
+    </cs:spPr>
+  </cs:gridlineMajor>
+  <cs:gridlineMinor>
+    <cs:lnRef idx="0"/>
+    <cs:fillRef idx="0"/>
+    <cs:effectRef idx="0"/>
+    <cs:fontRef idx="minor">
+      <a:schemeClr val="tx1"/>
+    </cs:fontRef>
+    <cs:spPr>
+      <a:ln w="9525" cap="flat" cmpd="sng" algn="ctr">
+        <a:solidFill>
+          <a:schemeClr val="tx1">
+            <a:lumMod val="5000"/>
+            <a:lumOff val="95000"/>
+          </a:schemeClr>
+        </a:solidFill>
+        <a:round/>
+      </a:ln>
+    </cs:spPr>
+  </cs:gridlineMinor>
+  <cs:hiLoLine>
+    <cs:lnRef idx="0"/>
+    <cs:fillRef idx="0"/>
+    <cs:effectRef idx="0"/>
+    <cs:fontRef idx="minor">
+      <a:schemeClr val="tx1"/>
+    </cs:fontRef>
+    <cs:spPr>
+      <a:ln w="9525" cap="flat" cmpd="sng" algn="ctr">
+        <a:solidFill>
+          <a:schemeClr val="tx1">
+            <a:lumMod val="75000"/>
+            <a:lumOff val="25000"/>
+          </a:schemeClr>
+        </a:solidFill>
+        <a:round/>
+      </a:ln>
+    </cs:spPr>
+  </cs:hiLoLine>
+  <cs:leaderLine>
+    <cs:lnRef idx="0"/>
+    <cs:fillRef idx="0"/>
+    <cs:effectRef idx="0"/>
+    <cs:fontRef idx="minor">
+      <a:schemeClr val="tx1"/>
+    </cs:fontRef>
+    <cs:spPr>
+      <a:ln w="9525" cap="flat" cmpd="sng" algn="ctr">
+        <a:solidFill>
+          <a:schemeClr val="tx1">
+            <a:lumMod val="35000"/>
+            <a:lumOff val="65000"/>
+          </a:schemeClr>
+        </a:solidFill>
+        <a:round/>
+      </a:ln>
+    </cs:spPr>
+  </cs:leaderLine>
+  <cs:legend>
+    <cs:lnRef idx="0"/>
+    <cs:fillRef idx="0"/>
+    <cs:effectRef idx="0"/>
+    <cs:fontRef idx="minor">
+      <a:schemeClr val="tx1">
+        <a:lumMod val="65000"/>
+        <a:lumOff val="35000"/>
+      </a:schemeClr>
+    </cs:fontRef>
+    <cs:defRPr sz="1197" kern="1200"/>
+  </cs:legend>
+  <cs:plotArea mods="allowNoFillOverride allowNoLineOverride">
+    <cs:lnRef idx="0"/>
+    <cs:fillRef idx="0"/>
+    <cs:effectRef idx="0"/>
+    <cs:fontRef idx="minor">
+      <a:schemeClr val="tx1"/>
+    </cs:fontRef>
+  </cs:plotArea>
+  <cs:plotArea3D mods="allowNoFillOverride allowNoLineOverride">
+    <cs:lnRef idx="0"/>
+    <cs:fillRef idx="0"/>
+    <cs:effectRef idx="0"/>
+    <cs:fontRef idx="minor">
+      <a:schemeClr val="tx1"/>
+    </cs:fontRef>
+  </cs:plotArea3D>
+  <cs:seriesAxis>
+    <cs:lnRef idx="0"/>
+    <cs:fillRef idx="0"/>
+    <cs:effectRef idx="0"/>
+    <cs:fontRef idx="minor">
+      <a:schemeClr val="tx1">
+        <a:lumMod val="65000"/>
+        <a:lumOff val="35000"/>
+      </a:schemeClr>
+    </cs:fontRef>
+    <cs:defRPr sz="1197" kern="1200"/>
+  </cs:seriesAxis>
+  <cs:seriesLine>
+    <cs:lnRef idx="0"/>
+    <cs:fillRef idx="0"/>
+    <cs:effectRef idx="0"/>
+    <cs:fontRef idx="minor">
+      <a:schemeClr val="tx1"/>
+    </cs:fontRef>
+    <cs:spPr>
+      <a:ln w="9525" cap="flat" cmpd="sng" algn="ctr">
+        <a:solidFill>
+          <a:schemeClr val="tx1">
+            <a:lumMod val="35000"/>
+            <a:lumOff val="65000"/>
+          </a:schemeClr>
+        </a:solidFill>
+        <a:round/>
+      </a:ln>
+    </cs:spPr>
+  </cs:seriesLine>
+  <cs:title>
+    <cs:lnRef idx="0"/>
+    <cs:fillRef idx="0"/>
+    <cs:effectRef idx="0"/>
+    <cs:fontRef idx="minor">
+      <a:schemeClr val="tx1">
+        <a:lumMod val="65000"/>
+        <a:lumOff val="35000"/>
+      </a:schemeClr>
+    </cs:fontRef>
+    <cs:defRPr sz="1862" b="0" kern="1200" spc="0" baseline="0"/>
+  </cs:title>
+  <cs:trendline>
+    <cs:lnRef idx="0">
+      <cs:styleClr val="auto"/>
+    </cs:lnRef>
+    <cs:fillRef idx="0"/>
+    <cs:effectRef idx="0"/>
+    <cs:fontRef idx="minor">
+      <a:schemeClr val="tx1"/>
+    </cs:fontRef>
+    <cs:spPr>
+      <a:ln w="19050" cap="rnd">
+        <a:solidFill>
+          <a:schemeClr val="phClr"/>
+        </a:solidFill>
+        <a:prstDash val="sysDot"/>
+      </a:ln>
+    </cs:spPr>
+  </cs:trendline>
+  <cs:trendlineLabel>
+    <cs:lnRef idx="0"/>
+    <cs:fillRef idx="0"/>
+    <cs:effectRef idx="0"/>
+    <cs:fontRef idx="minor">
+      <a:schemeClr val="tx1">
+        <a:lumMod val="65000"/>
+        <a:lumOff val="35000"/>
+      </a:schemeClr>
+    </cs:fontRef>
+    <cs:defRPr sz="1197" kern="1200"/>
+  </cs:trendlineLabel>
+  <cs:upBar>
+    <cs:lnRef idx="0"/>
+    <cs:fillRef idx="0"/>
+    <cs:effectRef idx="0"/>
+    <cs:fontRef idx="minor">
+      <a:schemeClr val="dk1"/>
+    </cs:fontRef>
+    <cs:spPr>
+      <a:solidFill>
+        <a:schemeClr val="lt1"/>
+      </a:solidFill>
+      <a:ln w="9525">
+        <a:solidFill>
+          <a:schemeClr val="tx1">
+            <a:lumMod val="15000"/>
+            <a:lumOff val="85000"/>
+          </a:schemeClr>
+        </a:solidFill>
+      </a:ln>
+    </cs:spPr>
+  </cs:upBar>
+  <cs:valueAxis>
+    <cs:lnRef idx="0"/>
+    <cs:fillRef idx="0"/>
+    <cs:effectRef idx="0"/>
+    <cs:fontRef idx="minor">
+      <a:schemeClr val="tx1">
+        <a:lumMod val="65000"/>
+        <a:lumOff val="35000"/>
+      </a:schemeClr>
+    </cs:fontRef>
+    <cs:defRPr sz="1197" kern="1200"/>
+  </cs:valueAxis>
+  <cs:wall>
+    <cs:lnRef idx="0"/>
+    <cs:fillRef idx="0"/>
+    <cs:effectRef idx="0"/>
+    <cs:fontRef idx="minor">
+      <a:schemeClr val="tx1"/>
+    </cs:fontRef>
+    <cs:spPr>
+      <a:noFill/>
+      <a:ln>
+        <a:noFill/>
+      </a:ln>
+    </cs:spPr>
+  </cs:wall>
+</cs:chartStyle>
+</file>
+
+<file path=ppt/charts/style2.xml><?xml version="1.0" encoding="utf-8"?>
+<cs:chartStyle xmlns:cs="http://schemas.microsoft.com/office/drawing/2012/chartStyle" xmlns:a="http://schemas.openxmlformats.org/drawingml/2006/main" id="201">
+  <cs:axisTitle>
+    <cs:lnRef idx="0"/>
+    <cs:fillRef idx="0"/>
+    <cs:effectRef idx="0"/>
+    <cs:fontRef idx="minor">
+      <a:schemeClr val="tx1">
+        <a:lumMod val="65000"/>
+        <a:lumOff val="35000"/>
+      </a:schemeClr>
+    </cs:fontRef>
+    <cs:defRPr sz="1330" kern="1200"/>
+  </cs:axisTitle>
+  <cs:categoryAxis>
+    <cs:lnRef idx="0"/>
+    <cs:fillRef idx="0"/>
+    <cs:effectRef idx="0"/>
+    <cs:fontRef idx="minor">
+      <a:schemeClr val="tx1">
+        <a:lumMod val="65000"/>
+        <a:lumOff val="35000"/>
+      </a:schemeClr>
+    </cs:fontRef>
+    <cs:spPr>
+      <a:ln w="9525" cap="flat" cmpd="sng" algn="ctr">
+        <a:solidFill>
+          <a:schemeClr val="tx1">
+            <a:lumMod val="15000"/>
+            <a:lumOff val="85000"/>
+          </a:schemeClr>
+        </a:solidFill>
+        <a:round/>
+      </a:ln>
+    </cs:spPr>
+    <cs:defRPr sz="1197" kern="1200"/>
+  </cs:categoryAxis>
+  <cs:chartArea mods="allowNoFillOverride allowNoLineOverride">
+    <cs:lnRef idx="0"/>
+    <cs:fillRef idx="0"/>
+    <cs:effectRef idx="0"/>
+    <cs:fontRef idx="minor">
+      <a:schemeClr val="tx1"/>
+    </cs:fontRef>
+    <cs:spPr>
+      <a:solidFill>
+        <a:schemeClr val="bg1"/>
+      </a:solidFill>
+      <a:ln w="9525" cap="flat" cmpd="sng" algn="ctr">
+        <a:solidFill>
+          <a:schemeClr val="tx1">
+            <a:lumMod val="15000"/>
+            <a:lumOff val="85000"/>
+          </a:schemeClr>
+        </a:solidFill>
+        <a:round/>
+      </a:ln>
+    </cs:spPr>
+    <cs:defRPr sz="1330" kern="1200"/>
+  </cs:chartArea>
+  <cs:dataLabel>
+    <cs:lnRef idx="0"/>
+    <cs:fillRef idx="0"/>
+    <cs:effectRef idx="0"/>
+    <cs:fontRef idx="minor">
+      <a:schemeClr val="tx1">
+        <a:lumMod val="75000"/>
+        <a:lumOff val="25000"/>
+      </a:schemeClr>
+    </cs:fontRef>
+    <cs:defRPr sz="1197" kern="1200"/>
+  </cs:dataLabel>
+  <cs:dataLabelCallout>
+    <cs:lnRef idx="0"/>
+    <cs:fillRef idx="0"/>
+    <cs:effectRef idx="0"/>
+    <cs:fontRef idx="minor">
+      <a:schemeClr val="dk1">
+        <a:lumMod val="65000"/>
+        <a:lumOff val="35000"/>
+      </a:schemeClr>
+    </cs:fontRef>
+    <cs:spPr>
+      <a:solidFill>
+        <a:schemeClr val="lt1"/>
+      </a:solidFill>
+      <a:ln>
+        <a:solidFill>
+          <a:schemeClr val="dk1">
+            <a:lumMod val="25000"/>
+            <a:lumOff val="75000"/>
+          </a:schemeClr>
+        </a:solidFill>
+      </a:ln>
+    </cs:spPr>
+    <cs:defRPr sz="1197" kern="1200"/>
+    <cs:bodyPr rot="0" spcFirstLastPara="1" vertOverflow="clip" horzOverflow="clip" vert="horz" wrap="square" lIns="36576" tIns="18288" rIns="36576" bIns="18288" anchor="ctr" anchorCtr="1">
+      <a:spAutoFit/>
+    </cs:bodyPr>
+  </cs:dataLabelCallout>
+  <cs:dataPoint>
+    <cs:lnRef idx="0"/>
+    <cs:fillRef idx="1">
+      <cs:styleClr val="auto"/>
+    </cs:fillRef>
+    <cs:effectRef idx="0"/>
+    <cs:fontRef idx="minor">
+      <a:schemeClr val="tx1"/>
+    </cs:fontRef>
+  </cs:dataPoint>
+  <cs:dataPoint3D>
+    <cs:lnRef idx="0"/>
+    <cs:fillRef idx="1">
+      <cs:styleClr val="auto"/>
+    </cs:fillRef>
+    <cs:effectRef idx="0"/>
+    <cs:fontRef idx="minor">
+      <a:schemeClr val="tx1"/>
+    </cs:fontRef>
+  </cs:dataPoint3D>
+  <cs:dataPointLine>
+    <cs:lnRef idx="0">
+      <cs:styleClr val="auto"/>
+    </cs:lnRef>
+    <cs:fillRef idx="1"/>
+    <cs:effectRef idx="0"/>
+    <cs:fontRef idx="minor">
+      <a:schemeClr val="tx1"/>
+    </cs:fontRef>
+    <cs:spPr>
+      <a:ln w="28575" cap="rnd">
+        <a:solidFill>
+          <a:schemeClr val="phClr"/>
+        </a:solidFill>
+        <a:round/>
+      </a:ln>
+    </cs:spPr>
+  </cs:dataPointLine>
+  <cs:dataPointMarker>
+    <cs:lnRef idx="0">
+      <cs:styleClr val="auto"/>
+    </cs:lnRef>
+    <cs:fillRef idx="1">
+      <cs:styleClr val="auto"/>
+    </cs:fillRef>
+    <cs:effectRef idx="0"/>
+    <cs:fontRef idx="minor">
+      <a:schemeClr val="tx1"/>
+    </cs:fontRef>
+    <cs:spPr>
+      <a:ln w="9525">
+        <a:solidFill>
+          <a:schemeClr val="phClr"/>
+        </a:solidFill>
+      </a:ln>
+    </cs:spPr>
+  </cs:dataPointMarker>
+  <cs:dataPointMarkerLayout symbol="circle" size="5"/>
+  <cs:dataPointWireframe>
+    <cs:lnRef idx="0">
+      <cs:styleClr val="auto"/>
+    </cs:lnRef>
+    <cs:fillRef idx="1"/>
+    <cs:effectRef idx="0"/>
+    <cs:fontRef idx="minor">
+      <a:schemeClr val="tx1"/>
+    </cs:fontRef>
+    <cs:spPr>
+      <a:ln w="9525" cap="rnd">
+        <a:solidFill>
+          <a:schemeClr val="phClr"/>
+        </a:solidFill>
+        <a:round/>
+      </a:ln>
+    </cs:spPr>
+  </cs:dataPointWireframe>
+  <cs:dataTable>
+    <cs:lnRef idx="0"/>
+    <cs:fillRef idx="0"/>
+    <cs:effectRef idx="0"/>
+    <cs:fontRef idx="minor">
+      <a:schemeClr val="tx1">
+        <a:lumMod val="65000"/>
+        <a:lumOff val="35000"/>
+      </a:schemeClr>
+    </cs:fontRef>
+    <cs:spPr>
+      <a:noFill/>
+      <a:ln w="9525" cap="flat" cmpd="sng" algn="ctr">
+        <a:solidFill>
+          <a:schemeClr val="tx1">
+            <a:lumMod val="15000"/>
+            <a:lumOff val="85000"/>
+          </a:schemeClr>
+        </a:solidFill>
+        <a:round/>
+      </a:ln>
+    </cs:spPr>
+    <cs:defRPr sz="1197" kern="1200"/>
+  </cs:dataTable>
+  <cs:downBar>
+    <cs:lnRef idx="0"/>
+    <cs:fillRef idx="0"/>
+    <cs:effectRef idx="0"/>
+    <cs:fontRef idx="minor">
+      <a:schemeClr val="dk1"/>
+    </cs:fontRef>
+    <cs:spPr>
+      <a:solidFill>
+        <a:schemeClr val="dk1">
+          <a:lumMod val="65000"/>
+          <a:lumOff val="35000"/>
+        </a:schemeClr>
+      </a:solidFill>
+      <a:ln w="9525">
+        <a:solidFill>
+          <a:schemeClr val="tx1">
+            <a:lumMod val="65000"/>
+            <a:lumOff val="35000"/>
+          </a:schemeClr>
+        </a:solidFill>
+      </a:ln>
+    </cs:spPr>
+  </cs:downBar>
+  <cs:dropLine>
+    <cs:lnRef idx="0"/>
+    <cs:fillRef idx="0"/>
+    <cs:effectRef idx="0"/>
+    <cs:fontRef idx="minor">
+      <a:schemeClr val="tx1"/>
+    </cs:fontRef>
+    <cs:spPr>
+      <a:ln w="9525" cap="flat" cmpd="sng" algn="ctr">
+        <a:solidFill>
+          <a:schemeClr val="tx1">
+            <a:lumMod val="35000"/>
+            <a:lumOff val="65000"/>
+          </a:schemeClr>
+        </a:solidFill>
+        <a:round/>
+      </a:ln>
+    </cs:spPr>
+  </cs:dropLine>
+  <cs:errorBar>
+    <cs:lnRef idx="0"/>
+    <cs:fillRef idx="0"/>
+    <cs:effectRef idx="0"/>
+    <cs:fontRef idx="minor">
+      <a:schemeClr val="tx1"/>
+    </cs:fontRef>
+    <cs:spPr>
+      <a:ln w="9525" cap="flat" cmpd="sng" algn="ctr">
+        <a:solidFill>
+          <a:schemeClr val="tx1">
+            <a:lumMod val="65000"/>
+            <a:lumOff val="35000"/>
+          </a:schemeClr>
+        </a:solidFill>
+        <a:round/>
+      </a:ln>
+    </cs:spPr>
+  </cs:errorBar>
+  <cs:floor>
+    <cs:lnRef idx="0"/>
+    <cs:fillRef idx="0"/>
+    <cs:effectRef idx="0"/>
+    <cs:fontRef idx="minor">
+      <a:schemeClr val="tx1"/>
+    </cs:fontRef>
+    <cs:spPr>
+      <a:noFill/>
+      <a:ln>
+        <a:noFill/>
+      </a:ln>
+    </cs:spPr>
+  </cs:floor>
+  <cs:gridlineMajor>
+    <cs:lnRef idx="0"/>
+    <cs:fillRef idx="0"/>
+    <cs:effectRef idx="0"/>
+    <cs:fontRef idx="minor">
+      <a:schemeClr val="tx1"/>
+    </cs:fontRef>
+    <cs:spPr>
+      <a:ln w="9525" cap="flat" cmpd="sng" algn="ctr">
+        <a:solidFill>
+          <a:schemeClr val="tx1">
+            <a:lumMod val="15000"/>
+            <a:lumOff val="85000"/>
+          </a:schemeClr>
+        </a:solidFill>
+        <a:round/>
+      </a:ln>
+    </cs:spPr>
+  </cs:gridlineMajor>
+  <cs:gridlineMinor>
+    <cs:lnRef idx="0"/>
+    <cs:fillRef idx="0"/>
+    <cs:effectRef idx="0"/>
+    <cs:fontRef idx="minor">
+      <a:schemeClr val="tx1"/>
+    </cs:fontRef>
+    <cs:spPr>
+      <a:ln w="9525" cap="flat" cmpd="sng" algn="ctr">
+        <a:solidFill>
+          <a:schemeClr val="tx1">
+            <a:lumMod val="5000"/>
+            <a:lumOff val="95000"/>
+          </a:schemeClr>
+        </a:solidFill>
+        <a:round/>
+      </a:ln>
+    </cs:spPr>
+  </cs:gridlineMinor>
+  <cs:hiLoLine>
+    <cs:lnRef idx="0"/>
+    <cs:fillRef idx="0"/>
+    <cs:effectRef idx="0"/>
+    <cs:fontRef idx="minor">
+      <a:schemeClr val="tx1"/>
+    </cs:fontRef>
+    <cs:spPr>
+      <a:ln w="9525" cap="flat" cmpd="sng" algn="ctr">
+        <a:solidFill>
+          <a:schemeClr val="tx1">
+            <a:lumMod val="75000"/>
+            <a:lumOff val="25000"/>
+          </a:schemeClr>
+        </a:solidFill>
+        <a:round/>
+      </a:ln>
+    </cs:spPr>
+  </cs:hiLoLine>
+  <cs:leaderLine>
+    <cs:lnRef idx="0"/>
+    <cs:fillRef idx="0"/>
+    <cs:effectRef idx="0"/>
+    <cs:fontRef idx="minor">
+      <a:schemeClr val="tx1"/>
+    </cs:fontRef>
+    <cs:spPr>
+      <a:ln w="9525" cap="flat" cmpd="sng" algn="ctr">
+        <a:solidFill>
+          <a:schemeClr val="tx1">
+            <a:lumMod val="35000"/>
+            <a:lumOff val="65000"/>
+          </a:schemeClr>
+        </a:solidFill>
+        <a:round/>
+      </a:ln>
+    </cs:spPr>
+  </cs:leaderLine>
+  <cs:legend>
+    <cs:lnRef idx="0"/>
+    <cs:fillRef idx="0"/>
+    <cs:effectRef idx="0"/>
+    <cs:fontRef idx="minor">
+      <a:schemeClr val="tx1">
+        <a:lumMod val="65000"/>
+        <a:lumOff val="35000"/>
+      </a:schemeClr>
+    </cs:fontRef>
+    <cs:defRPr sz="1197" kern="1200"/>
+  </cs:legend>
+  <cs:plotArea mods="allowNoFillOverride allowNoLineOverride">
+    <cs:lnRef idx="0"/>
+    <cs:fillRef idx="0"/>
+    <cs:effectRef idx="0"/>
+    <cs:fontRef idx="minor">
+      <a:schemeClr val="tx1"/>
+    </cs:fontRef>
+  </cs:plotArea>
+  <cs:plotArea3D mods="allowNoFillOverride allowNoLineOverride">
+    <cs:lnRef idx="0"/>
+    <cs:fillRef idx="0"/>
+    <cs:effectRef idx="0"/>
+    <cs:fontRef idx="minor">
+      <a:schemeClr val="tx1"/>
+    </cs:fontRef>
+  </cs:plotArea3D>
+  <cs:seriesAxis>
+    <cs:lnRef idx="0"/>
+    <cs:fillRef idx="0"/>
+    <cs:effectRef idx="0"/>
+    <cs:fontRef idx="minor">
+      <a:schemeClr val="tx1">
+        <a:lumMod val="65000"/>
+        <a:lumOff val="35000"/>
+      </a:schemeClr>
+    </cs:fontRef>
+    <cs:defRPr sz="1197" kern="1200"/>
+  </cs:seriesAxis>
+  <cs:seriesLine>
+    <cs:lnRef idx="0"/>
+    <cs:fillRef idx="0"/>
+    <cs:effectRef idx="0"/>
+    <cs:fontRef idx="minor">
+      <a:schemeClr val="tx1"/>
+    </cs:fontRef>
+    <cs:spPr>
+      <a:ln w="9525" cap="flat" cmpd="sng" algn="ctr">
+        <a:solidFill>
+          <a:schemeClr val="tx1">
+            <a:lumMod val="35000"/>
+            <a:lumOff val="65000"/>
+          </a:schemeClr>
+        </a:solidFill>
+        <a:round/>
+      </a:ln>
+    </cs:spPr>
+  </cs:seriesLine>
+  <cs:title>
+    <cs:lnRef idx="0"/>
+    <cs:fillRef idx="0"/>
+    <cs:effectRef idx="0"/>
+    <cs:fontRef idx="minor">
+      <a:schemeClr val="tx1">
+        <a:lumMod val="65000"/>
+        <a:lumOff val="35000"/>
+      </a:schemeClr>
+    </cs:fontRef>
+    <cs:defRPr sz="1862" b="0" kern="1200" spc="0" baseline="0"/>
+  </cs:title>
+  <cs:trendline>
+    <cs:lnRef idx="0">
+      <cs:styleClr val="auto"/>
+    </cs:lnRef>
+    <cs:fillRef idx="0"/>
+    <cs:effectRef idx="0"/>
+    <cs:fontRef idx="minor">
+      <a:schemeClr val="tx1"/>
+    </cs:fontRef>
+    <cs:spPr>
+      <a:ln w="19050" cap="rnd">
+        <a:solidFill>
+          <a:schemeClr val="phClr"/>
+        </a:solidFill>
+        <a:prstDash val="sysDot"/>
+      </a:ln>
+    </cs:spPr>
+  </cs:trendline>
+  <cs:trendlineLabel>
+    <cs:lnRef idx="0"/>
+    <cs:fillRef idx="0"/>
+    <cs:effectRef idx="0"/>
+    <cs:fontRef idx="minor">
+      <a:schemeClr val="tx1">
+        <a:lumMod val="65000"/>
+        <a:lumOff val="35000"/>
+      </a:schemeClr>
+    </cs:fontRef>
+    <cs:defRPr sz="1197" kern="1200"/>
+  </cs:trendlineLabel>
+  <cs:upBar>
+    <cs:lnRef idx="0"/>
+    <cs:fillRef idx="0"/>
+    <cs:effectRef idx="0"/>
+    <cs:fontRef idx="minor">
+      <a:schemeClr val="dk1"/>
+    </cs:fontRef>
+    <cs:spPr>
+      <a:solidFill>
+        <a:schemeClr val="lt1"/>
+      </a:solidFill>
+      <a:ln w="9525">
+        <a:solidFill>
+          <a:schemeClr val="tx1">
+            <a:lumMod val="15000"/>
+            <a:lumOff val="85000"/>
+          </a:schemeClr>
+        </a:solidFill>
+      </a:ln>
+    </cs:spPr>
+  </cs:upBar>
+  <cs:valueAxis>
+    <cs:lnRef idx="0"/>
+    <cs:fillRef idx="0"/>
+    <cs:effectRef idx="0"/>
+    <cs:fontRef idx="minor">
+      <a:schemeClr val="tx1">
+        <a:lumMod val="65000"/>
+        <a:lumOff val="35000"/>
+      </a:schemeClr>
+    </cs:fontRef>
+    <cs:defRPr sz="1197" kern="1200"/>
+  </cs:valueAxis>
+  <cs:wall>
+    <cs:lnRef idx="0"/>
+    <cs:fillRef idx="0"/>
+    <cs:effectRef idx="0"/>
+    <cs:fontRef idx="minor">
+      <a:schemeClr val="tx1"/>
+    </cs:fontRef>
+    <cs:spPr>
+      <a:noFill/>
+      <a:ln>
+        <a:noFill/>
+      </a:ln>
+    </cs:spPr>
+  </cs:wall>
+</cs:chartStyle>
 </file>
 
 <file path=ppt/notesMasters/notesMaster1.xml><?xml version="1.0" encoding="utf-8"?>
@@ -3286,7 +5229,7 @@
             <a:fld id="{1D8BD707-D9CF-40AE-B4C6-C98DA3205C09}" type="datetimeFigureOut">
               <a:rPr lang="en-US" smtClean="0"/>
               <a:pPr/>
-              <a:t>6/1/26</a:t>
+              <a:t>6/1/2026</a:t>
             </a:fld>
             <a:endParaRPr lang="en-US"/>
           </a:p>
@@ -3451,7 +5394,7 @@
             <a:fld id="{1D8BD707-D9CF-40AE-B4C6-C98DA3205C09}" type="datetimeFigureOut">
               <a:rPr lang="en-US" smtClean="0"/>
               <a:pPr/>
-              <a:t>6/1/26</a:t>
+              <a:t>6/1/2026</a:t>
             </a:fld>
             <a:endParaRPr lang="en-US"/>
           </a:p>
@@ -3626,7 +5569,7 @@
             <a:fld id="{1D8BD707-D9CF-40AE-B4C6-C98DA3205C09}" type="datetimeFigureOut">
               <a:rPr lang="en-US" smtClean="0"/>
               <a:pPr/>
-              <a:t>6/1/26</a:t>
+              <a:t>6/1/2026</a:t>
             </a:fld>
             <a:endParaRPr lang="en-US"/>
           </a:p>
@@ -3791,7 +5734,7 @@
             <a:fld id="{1D8BD707-D9CF-40AE-B4C6-C98DA3205C09}" type="datetimeFigureOut">
               <a:rPr lang="en-US" smtClean="0"/>
               <a:pPr/>
-              <a:t>6/1/26</a:t>
+              <a:t>6/1/2026</a:t>
             </a:fld>
             <a:endParaRPr lang="en-US"/>
           </a:p>
@@ -4033,7 +5976,7 @@
             <a:fld id="{1D8BD707-D9CF-40AE-B4C6-C98DA3205C09}" type="datetimeFigureOut">
               <a:rPr lang="en-US" smtClean="0"/>
               <a:pPr/>
-              <a:t>6/1/26</a:t>
+              <a:t>6/1/2026</a:t>
             </a:fld>
             <a:endParaRPr lang="en-US"/>
           </a:p>
@@ -4315,7 +6258,7 @@
             <a:fld id="{1D8BD707-D9CF-40AE-B4C6-C98DA3205C09}" type="datetimeFigureOut">
               <a:rPr lang="en-US" smtClean="0"/>
               <a:pPr/>
-              <a:t>6/1/26</a:t>
+              <a:t>6/1/2026</a:t>
             </a:fld>
             <a:endParaRPr lang="en-US"/>
           </a:p>
@@ -4731,7 +6674,7 @@
             <a:fld id="{1D8BD707-D9CF-40AE-B4C6-C98DA3205C09}" type="datetimeFigureOut">
               <a:rPr lang="en-US" smtClean="0"/>
               <a:pPr/>
-              <a:t>6/1/26</a:t>
+              <a:t>6/1/2026</a:t>
             </a:fld>
             <a:endParaRPr lang="en-US"/>
           </a:p>
@@ -4845,7 +6788,7 @@
             <a:fld id="{1D8BD707-D9CF-40AE-B4C6-C98DA3205C09}" type="datetimeFigureOut">
               <a:rPr lang="en-US" smtClean="0"/>
               <a:pPr/>
-              <a:t>6/1/26</a:t>
+              <a:t>6/1/2026</a:t>
             </a:fld>
             <a:endParaRPr lang="en-US"/>
           </a:p>
@@ -4937,7 +6880,7 @@
             <a:fld id="{1D8BD707-D9CF-40AE-B4C6-C98DA3205C09}" type="datetimeFigureOut">
               <a:rPr lang="en-US" smtClean="0"/>
               <a:pPr/>
-              <a:t>6/1/26</a:t>
+              <a:t>6/1/2026</a:t>
             </a:fld>
             <a:endParaRPr lang="en-US"/>
           </a:p>
@@ -5209,7 +7152,7 @@
             <a:fld id="{1D8BD707-D9CF-40AE-B4C6-C98DA3205C09}" type="datetimeFigureOut">
               <a:rPr lang="en-US" smtClean="0"/>
               <a:pPr/>
-              <a:t>6/1/26</a:t>
+              <a:t>6/1/2026</a:t>
             </a:fld>
             <a:endParaRPr lang="en-US"/>
           </a:p>
@@ -5458,7 +7401,7 @@
             <a:fld id="{1D8BD707-D9CF-40AE-B4C6-C98DA3205C09}" type="datetimeFigureOut">
               <a:rPr lang="en-US" smtClean="0"/>
               <a:pPr/>
-              <a:t>6/1/26</a:t>
+              <a:t>6/1/2026</a:t>
             </a:fld>
             <a:endParaRPr lang="en-US"/>
           </a:p>
@@ -5666,7 +7609,7 @@
             <a:fld id="{1D8BD707-D9CF-40AE-B4C6-C98DA3205C09}" type="datetimeFigureOut">
               <a:rPr lang="en-US" smtClean="0"/>
               <a:pPr/>
-              <a:t>6/1/26</a:t>
+              <a:t>6/1/2026</a:t>
             </a:fld>
             <a:endParaRPr lang="en-US"/>
           </a:p>
@@ -10342,7 +12285,7 @@
         <p:spPr>
           <a:xfrm>
             <a:off x="1476375" y="5378958"/>
-            <a:ext cx="7181850" cy="568643"/>
+            <a:ext cx="7181850" cy="597215"/>
           </a:xfrm>
           <a:prstGeom prst="rect">
             <a:avLst/>
@@ -10360,7 +12303,7 @@
               </a:lnSpc>
             </a:pPr>
             <a:r>
-              <a:rPr lang="en-US" sz="1575">
+              <a:rPr lang="en-US">
                 <a:solidFill>
                   <a:srgbClr val="A6ABCE"/>
                 </a:solidFill>
@@ -10379,7 +12322,7 @@
               </a:lnSpc>
             </a:pPr>
             <a:r>
-              <a:rPr lang="en-US" sz="1575">
+              <a:rPr lang="en-US">
                 <a:solidFill>
                   <a:srgbClr val="A6ABCE"/>
                 </a:solidFill>
@@ -10391,7 +12334,7 @@
               <a:t>Voice and facial expression are read </a:t>
             </a:r>
             <a:r>
-              <a:rPr lang="en-US" sz="1575">
+              <a:rPr lang="en-US">
                 <a:solidFill>
                   <a:srgbClr val="9AA0FF"/>
                 </a:solidFill>
@@ -10403,7 +12346,7 @@
               <a:t>continuously</a:t>
             </a:r>
             <a:r>
-              <a:rPr lang="en-US" sz="1575">
+              <a:rPr lang="en-US">
                 <a:solidFill>
                   <a:srgbClr val="A6ABCE"/>
                 </a:solidFill>
@@ -10991,7 +12934,7 @@
         <p:spPr>
           <a:xfrm>
             <a:off x="9629775" y="5378958"/>
-            <a:ext cx="7181850" cy="568643"/>
+            <a:ext cx="7181850" cy="590675"/>
           </a:xfrm>
           <a:prstGeom prst="rect">
             <a:avLst/>
@@ -11009,7 +12952,7 @@
               </a:lnSpc>
             </a:pPr>
             <a:r>
-              <a:rPr lang="en-US" sz="1575">
+              <a:rPr lang="en-US" sz="1600">
                 <a:solidFill>
                   <a:srgbClr val="A6ABCE"/>
                 </a:solidFill>
@@ -11021,7 +12964,7 @@
               <a:t>The other person rests a fingertip over the rear camera and flash. We pair that </a:t>
             </a:r>
             <a:r>
-              <a:rPr lang="en-US" sz="1575">
+              <a:rPr lang="en-US" sz="1600">
                 <a:solidFill>
                   <a:srgbClr val="9AA0FF"/>
                 </a:solidFill>
@@ -11033,7 +12976,7 @@
               <a:t>fingertip pulse</a:t>
             </a:r>
             <a:r>
-              <a:rPr lang="en-US" sz="1575">
+              <a:rPr lang="en-US" sz="1600">
                 <a:solidFill>
                   <a:srgbClr val="A6ABCE"/>
                 </a:solidFill>
@@ -11982,7 +13925,7 @@
         <p:spPr>
           <a:xfrm>
             <a:off x="1476375" y="3483483"/>
-            <a:ext cx="7181850" cy="568643"/>
+            <a:ext cx="7181850" cy="597215"/>
           </a:xfrm>
           <a:prstGeom prst="rect">
             <a:avLst/>
@@ -12000,7 +13943,7 @@
               </a:lnSpc>
             </a:pPr>
             <a:r>
-              <a:rPr lang="en-US" sz="1575">
+              <a:rPr lang="en-US">
                 <a:solidFill>
                   <a:srgbClr val="A6ABCE"/>
                 </a:solidFill>
@@ -12012,7 +13955,7 @@
               <a:t>Per-signal models, </a:t>
             </a:r>
             <a:r>
-              <a:rPr lang="en-US" sz="1575" b="1">
+              <a:rPr lang="en-US" b="1">
                 <a:solidFill>
                   <a:srgbClr val="EEF0FF"/>
                 </a:solidFill>
@@ -12024,7 +13967,7 @@
               <a:t>combined per scenario</a:t>
             </a:r>
             <a:r>
-              <a:rPr lang="en-US" sz="1575">
+              <a:rPr lang="en-US">
                 <a:solidFill>
                   <a:srgbClr val="A6ABCE"/>
                 </a:solidFill>
@@ -12047,7 +13990,7 @@
         <p:spPr>
           <a:xfrm>
             <a:off x="1476375" y="4312158"/>
-            <a:ext cx="7181850" cy="853440"/>
+            <a:ext cx="7181850" cy="1754583"/>
           </a:xfrm>
           <a:prstGeom prst="rect">
             <a:avLst/>
@@ -12064,8 +14007,24 @@
                 <a:spcPts val="2310"/>
               </a:lnSpc>
             </a:pPr>
-            <a:r>
-              <a:rPr lang="en-US" sz="1650" b="1">
+            <a:endParaRPr lang="en-US" b="1">
+              <a:solidFill>
+                <a:srgbClr val="EEF0FF"/>
+              </a:solidFill>
+              <a:latin typeface="IBM Plex Sans Medium"/>
+              <a:ea typeface="IBM Plex Sans Medium"/>
+              <a:cs typeface="IBM Plex Sans Medium"/>
+              <a:sym typeface="IBM Plex Sans Medium"/>
+            </a:endParaRPr>
+          </a:p>
+          <a:p>
+            <a:pPr algn="l">
+              <a:lnSpc>
+                <a:spcPts val="2310"/>
+              </a:lnSpc>
+            </a:pPr>
+            <a:r>
+              <a:rPr lang="en-US" b="1">
                 <a:solidFill>
                   <a:srgbClr val="EEF0FF"/>
                 </a:solidFill>
@@ -12077,7 +14036,7 @@
               <a:t>How it is trained</a:t>
             </a:r>
             <a:r>
-              <a:rPr lang="en-US" sz="1650">
+              <a:rPr lang="en-US">
                 <a:solidFill>
                   <a:srgbClr val="A6ABCE"/>
                 </a:solidFill>
@@ -12095,8 +14054,40 @@
                 <a:spcPts val="2310"/>
               </a:lnSpc>
             </a:pPr>
-            <a:r>
-              <a:rPr lang="en-US" sz="1650" b="1">
+            <a:endParaRPr lang="en-US">
+              <a:solidFill>
+                <a:srgbClr val="A6ABCE"/>
+              </a:solidFill>
+              <a:latin typeface="IBM Plex Sans"/>
+              <a:ea typeface="IBM Plex Sans"/>
+              <a:cs typeface="IBM Plex Sans"/>
+              <a:sym typeface="IBM Plex Sans"/>
+            </a:endParaRPr>
+          </a:p>
+          <a:p>
+            <a:pPr algn="l">
+              <a:lnSpc>
+                <a:spcPts val="2310"/>
+              </a:lnSpc>
+            </a:pPr>
+            <a:endParaRPr lang="en-US">
+              <a:solidFill>
+                <a:srgbClr val="A6ABCE"/>
+              </a:solidFill>
+              <a:latin typeface="IBM Plex Sans"/>
+              <a:ea typeface="IBM Plex Sans"/>
+              <a:cs typeface="IBM Plex Sans"/>
+              <a:sym typeface="IBM Plex Sans"/>
+            </a:endParaRPr>
+          </a:p>
+          <a:p>
+            <a:pPr algn="l">
+              <a:lnSpc>
+                <a:spcPts val="2310"/>
+              </a:lnSpc>
+            </a:pPr>
+            <a:r>
+              <a:rPr lang="en-US" b="1">
                 <a:solidFill>
                   <a:srgbClr val="EEF0FF"/>
                 </a:solidFill>
@@ -12108,7 +14099,7 @@
               <a:t>How it is combined</a:t>
             </a:r>
             <a:r>
-              <a:rPr lang="en-US" sz="1650">
+              <a:rPr lang="en-US">
                 <a:solidFill>
                   <a:srgbClr val="A6ABCE"/>
                 </a:solidFill>
@@ -12456,7 +14447,7 @@
         <p:spPr>
           <a:xfrm>
             <a:off x="9629775" y="3483483"/>
-            <a:ext cx="7181850" cy="273367"/>
+            <a:ext cx="7181850" cy="597215"/>
           </a:xfrm>
           <a:prstGeom prst="rect">
             <a:avLst/>
@@ -12474,7 +14465,7 @@
               </a:lnSpc>
             </a:pPr>
             <a:r>
-              <a:rPr lang="en-US" sz="1575" dirty="0">
+              <a:rPr lang="en-US" dirty="0">
                 <a:solidFill>
                   <a:srgbClr val="A6ABCE"/>
                 </a:solidFill>
@@ -12486,7 +14477,7 @@
               <a:t>An Android app that </a:t>
             </a:r>
             <a:r>
-              <a:rPr lang="en-US" sz="1575" b="1" dirty="0">
+              <a:rPr lang="en-US" b="1" dirty="0">
                 <a:solidFill>
                   <a:srgbClr val="EEF0FF"/>
                 </a:solidFill>
@@ -12498,7 +14489,7 @@
               <a:t>senses</a:t>
             </a:r>
             <a:r>
-              <a:rPr lang="en-US" sz="1575" dirty="0">
+              <a:rPr lang="en-US" dirty="0">
                 <a:solidFill>
                   <a:srgbClr val="A6ABCE"/>
                 </a:solidFill>
@@ -12521,7 +14512,7 @@
         <p:spPr>
           <a:xfrm>
             <a:off x="9629775" y="4012121"/>
-            <a:ext cx="7181850" cy="567690"/>
+            <a:ext cx="7181850" cy="1754583"/>
           </a:xfrm>
           <a:prstGeom prst="rect">
             <a:avLst/>
@@ -12538,8 +14529,40 @@
                 <a:spcPts val="2310"/>
               </a:lnSpc>
             </a:pPr>
-            <a:r>
-              <a:rPr lang="en-US" sz="1650" b="1">
+            <a:endParaRPr lang="en-US" b="1">
+              <a:solidFill>
+                <a:srgbClr val="EEF0FF"/>
+              </a:solidFill>
+              <a:latin typeface="IBM Plex Sans Medium"/>
+              <a:ea typeface="IBM Plex Sans Medium"/>
+              <a:cs typeface="IBM Plex Sans Medium"/>
+              <a:sym typeface="IBM Plex Sans Medium"/>
+            </a:endParaRPr>
+          </a:p>
+          <a:p>
+            <a:pPr algn="l">
+              <a:lnSpc>
+                <a:spcPts val="2310"/>
+              </a:lnSpc>
+            </a:pPr>
+            <a:endParaRPr lang="en-US" b="1">
+              <a:solidFill>
+                <a:srgbClr val="EEF0FF"/>
+              </a:solidFill>
+              <a:latin typeface="IBM Plex Sans Medium"/>
+              <a:ea typeface="IBM Plex Sans Medium"/>
+              <a:cs typeface="IBM Plex Sans Medium"/>
+              <a:sym typeface="IBM Plex Sans Medium"/>
+            </a:endParaRPr>
+          </a:p>
+          <a:p>
+            <a:pPr algn="l">
+              <a:lnSpc>
+                <a:spcPts val="2310"/>
+              </a:lnSpc>
+            </a:pPr>
+            <a:r>
+              <a:rPr lang="en-US" b="1">
                 <a:solidFill>
                   <a:srgbClr val="EEF0FF"/>
                 </a:solidFill>
@@ -12551,7 +14574,7 @@
               <a:t>What it senses</a:t>
             </a:r>
             <a:r>
-              <a:rPr lang="en-US" sz="1650">
+              <a:rPr lang="en-US">
                 <a:solidFill>
                   <a:srgbClr val="A6ABCE"/>
                 </a:solidFill>
@@ -12569,8 +14592,40 @@
                 <a:spcPts val="2310"/>
               </a:lnSpc>
             </a:pPr>
-            <a:r>
-              <a:rPr lang="en-US" sz="1650" b="1">
+            <a:endParaRPr lang="en-US">
+              <a:solidFill>
+                <a:srgbClr val="A6ABCE"/>
+              </a:solidFill>
+              <a:latin typeface="IBM Plex Sans"/>
+              <a:ea typeface="IBM Plex Sans"/>
+              <a:cs typeface="IBM Plex Sans"/>
+              <a:sym typeface="IBM Plex Sans"/>
+            </a:endParaRPr>
+          </a:p>
+          <a:p>
+            <a:pPr algn="l">
+              <a:lnSpc>
+                <a:spcPts val="2310"/>
+              </a:lnSpc>
+            </a:pPr>
+            <a:endParaRPr lang="en-US">
+              <a:solidFill>
+                <a:srgbClr val="A6ABCE"/>
+              </a:solidFill>
+              <a:latin typeface="IBM Plex Sans"/>
+              <a:ea typeface="IBM Plex Sans"/>
+              <a:cs typeface="IBM Plex Sans"/>
+              <a:sym typeface="IBM Plex Sans"/>
+            </a:endParaRPr>
+          </a:p>
+          <a:p>
+            <a:pPr algn="l">
+              <a:lnSpc>
+                <a:spcPts val="2310"/>
+              </a:lnSpc>
+            </a:pPr>
+            <a:r>
+              <a:rPr lang="en-US" b="1">
                 <a:solidFill>
                   <a:srgbClr val="EEF0FF"/>
                 </a:solidFill>
@@ -12582,7 +14637,7 @@
               <a:t>How it serves</a:t>
             </a:r>
             <a:r>
-              <a:rPr lang="en-US" sz="1650">
+              <a:rPr lang="en-US">
                 <a:solidFill>
                   <a:srgbClr val="A6ABCE"/>
                 </a:solidFill>
@@ -12925,7 +14980,7 @@
         <p:spPr>
           <a:xfrm>
             <a:off x="1047750" y="1295400"/>
-            <a:ext cx="16192500" cy="477774"/>
+            <a:ext cx="16192500" cy="569964"/>
           </a:xfrm>
           <a:prstGeom prst="rect">
             <a:avLst/>
@@ -12943,7 +14998,7 @@
               </a:lnSpc>
             </a:pPr>
             <a:r>
-              <a:rPr lang="en-US" sz="4050" b="1" spc="-121">
+              <a:rPr lang="en-US" sz="5100" b="1" spc="-121">
                 <a:solidFill>
                   <a:srgbClr val="EEF0FF"/>
                 </a:solidFill>
@@ -13560,7 +15615,7 @@
         <p:spPr>
           <a:xfrm>
             <a:off x="1485900" y="4812697"/>
-            <a:ext cx="4724400" cy="215170"/>
+            <a:ext cx="4724400" cy="205184"/>
           </a:xfrm>
           <a:prstGeom prst="rect">
             <a:avLst/>
@@ -13587,7 +15642,7 @@
                 <a:cs typeface="IBM Plex Sans Medium"/>
                 <a:sym typeface="IBM Plex Sans Medium"/>
               </a:rPr>
-              <a:t>Log-mel → CNN</a:t>
+              <a:t>Mel spectrogram → CNN</a:t>
             </a:r>
           </a:p>
         </p:txBody>
@@ -14085,7 +16140,7 @@
         <p:spPr>
           <a:xfrm>
             <a:off x="1485900" y="5570791"/>
-            <a:ext cx="4724400" cy="215170"/>
+            <a:ext cx="4724400" cy="205184"/>
           </a:xfrm>
           <a:prstGeom prst="rect">
             <a:avLst/>
@@ -14112,7 +16167,7 @@
                 <a:cs typeface="IBM Plex Sans Medium"/>
                 <a:sym typeface="IBM Plex Sans Medium"/>
               </a:rPr>
-              <a:t>Log-mel → CNN</a:t>
+              <a:t>Mel spectrogram → CNN</a:t>
             </a:r>
           </a:p>
         </p:txBody>
@@ -15549,7 +17604,7 @@
         <p:spPr>
           <a:xfrm>
             <a:off x="9734550" y="4812697"/>
-            <a:ext cx="4724400" cy="215170"/>
+            <a:ext cx="4724400" cy="205184"/>
           </a:xfrm>
           <a:prstGeom prst="rect">
             <a:avLst/>
@@ -15561,11 +17616,23 @@
           </a:bodyPr>
           <a:lstStyle/>
           <a:p>
-            <a:pPr algn="l">
+            <a:pPr>
               <a:lnSpc>
                 <a:spcPts val="1620"/>
               </a:lnSpc>
             </a:pPr>
+            <a:r>
+              <a:rPr lang="en-US" altLang="ko-KR" sz="1350" b="1">
+                <a:solidFill>
+                  <a:srgbClr val="EEF0FF"/>
+                </a:solidFill>
+                <a:latin typeface="IBM Plex Sans Medium"/>
+                <a:ea typeface="IBM Plex Sans Medium"/>
+                <a:cs typeface="IBM Plex Sans Medium"/>
+                <a:sym typeface="IBM Plex Sans Medium"/>
+              </a:rPr>
+              <a:t>Voice Mel spectrogram</a:t>
+            </a:r>
             <a:r>
               <a:rPr lang="en-US" sz="1350" b="1">
                 <a:solidFill>
@@ -15576,7 +17643,7 @@
                 <a:cs typeface="IBM Plex Sans Medium"/>
                 <a:sym typeface="IBM Plex Sans Medium"/>
               </a:rPr>
-              <a:t>Log-mel + pulse → CNN / 1-D</a:t>
+              <a:t> + PPG pulse → CNN / 1-D</a:t>
             </a:r>
           </a:p>
         </p:txBody>
@@ -16074,7 +18141,7 @@
         <p:spPr>
           <a:xfrm>
             <a:off x="9734550" y="5570791"/>
-            <a:ext cx="4724400" cy="215170"/>
+            <a:ext cx="4724400" cy="205184"/>
           </a:xfrm>
           <a:prstGeom prst="rect">
             <a:avLst/>
@@ -16086,11 +18153,23 @@
           </a:bodyPr>
           <a:lstStyle/>
           <a:p>
-            <a:pPr algn="l">
+            <a:pPr>
               <a:lnSpc>
                 <a:spcPts val="1620"/>
               </a:lnSpc>
             </a:pPr>
+            <a:r>
+              <a:rPr lang="en-US" altLang="ko-KR" sz="1350" b="1">
+                <a:solidFill>
+                  <a:srgbClr val="EEF0FF"/>
+                </a:solidFill>
+                <a:latin typeface="IBM Plex Sans Medium"/>
+                <a:ea typeface="IBM Plex Sans Medium"/>
+                <a:cs typeface="IBM Plex Sans Medium"/>
+                <a:sym typeface="IBM Plex Sans Medium"/>
+              </a:rPr>
+              <a:t>Voice Mel spectrogram </a:t>
+            </a:r>
             <a:r>
               <a:rPr lang="en-US" sz="1350" b="1">
                 <a:solidFill>
@@ -16101,7 +18180,7 @@
                 <a:cs typeface="IBM Plex Sans Medium"/>
                 <a:sym typeface="IBM Plex Sans Medium"/>
               </a:rPr>
-              <a:t>Log-mel + pulse → CNN / 1-D</a:t>
+              <a:t>+ PPG pulse → CNN / 1-D</a:t>
             </a:r>
           </a:p>
         </p:txBody>
@@ -21784,15 +23863,15 @@
         </p:nvSpPr>
         <p:spPr>
           <a:xfrm>
-            <a:off x="6248210" y="9020175"/>
-            <a:ext cx="2371916" cy="200025"/>
-          </a:xfrm>
-          <a:prstGeom prst="rect">
-            <a:avLst/>
-          </a:prstGeom>
-        </p:spPr>
-        <p:txBody>
-          <a:bodyPr lIns="0" tIns="0" rIns="0" bIns="0" rtlCol="0" anchor="t">
+            <a:off x="3782606" y="4673814"/>
+            <a:ext cx="1322640" cy="205184"/>
+          </a:xfrm>
+          <a:prstGeom prst="rect">
+            <a:avLst/>
+          </a:prstGeom>
+        </p:spPr>
+        <p:txBody>
+          <a:bodyPr wrap="square" lIns="0" tIns="0" rIns="0" bIns="0" rtlCol="0" anchor="t">
             <a:spAutoFit/>
           </a:bodyPr>
           <a:lstStyle/>
@@ -21803,7 +23882,7 @@
               </a:lnSpc>
             </a:pPr>
             <a:r>
-              <a:rPr lang="en-US" sz="1125">
+              <a:rPr lang="en-US" sz="1400">
                 <a:solidFill>
                   <a:srgbClr val="6B7099"/>
                 </a:solidFill>
@@ -21812,7 +23891,7 @@
                 <a:cs typeface="IBM Plex Mono"/>
                 <a:sym typeface="IBM Plex Mono"/>
               </a:rPr>
-              <a:t>5 s window · 2.5 s stride →</a:t>
+              <a:t>2.5 s stride </a:t>
             </a:r>
           </a:p>
         </p:txBody>
@@ -21904,8 +23983,8 @@
         </p:nvGrpSpPr>
         <p:grpSpPr>
           <a:xfrm>
-            <a:off x="1476375" y="7610475"/>
-            <a:ext cx="1714500" cy="438150"/>
+            <a:off x="2057400" y="4152900"/>
+            <a:ext cx="1476379" cy="1537336"/>
             <a:chOff x="0" y="0"/>
             <a:chExt cx="2286000" cy="584200"/>
           </a:xfrm>
@@ -22070,8 +24149,8 @@
         </p:nvGrpSpPr>
         <p:grpSpPr>
           <a:xfrm>
-            <a:off x="3286125" y="7896225"/>
-            <a:ext cx="1714500" cy="438150"/>
+            <a:off x="3733800" y="4991100"/>
+            <a:ext cx="1476379" cy="1537336"/>
             <a:chOff x="0" y="0"/>
             <a:chExt cx="2286000" cy="584200"/>
           </a:xfrm>
@@ -22236,8 +24315,8 @@
         </p:nvGrpSpPr>
         <p:grpSpPr>
           <a:xfrm>
-            <a:off x="5095875" y="8181975"/>
-            <a:ext cx="1714500" cy="438150"/>
+            <a:off x="5334000" y="5905500"/>
+            <a:ext cx="1476379" cy="1537336"/>
             <a:chOff x="0" y="0"/>
             <a:chExt cx="2286000" cy="584200"/>
           </a:xfrm>
@@ -22443,8 +24522,8 @@
         </p:nvGrpSpPr>
         <p:grpSpPr>
           <a:xfrm>
-            <a:off x="6810375" y="8458200"/>
-            <a:ext cx="1714500" cy="438150"/>
+            <a:off x="7010400" y="6743700"/>
+            <a:ext cx="1476379" cy="1537336"/>
             <a:chOff x="0" y="0"/>
             <a:chExt cx="2286000" cy="584200"/>
           </a:xfrm>
@@ -22601,6 +24680,135 @@
           </p:txBody>
         </p:sp>
       </p:grpSp>
+      <p:cxnSp>
+        <p:nvCxnSpPr>
+          <p:cNvPr id="48" name="Straight Arrow Connector 47">
+            <a:extLst>
+              <a:ext uri="{FF2B5EF4-FFF2-40B4-BE49-F238E27FC236}">
+                <a16:creationId xmlns:a16="http://schemas.microsoft.com/office/drawing/2014/main" id="{140BB72B-5A4D-E387-792C-E81031FC957F}"/>
+              </a:ext>
+            </a:extLst>
+          </p:cNvPr>
+          <p:cNvCxnSpPr/>
+          <p:nvPr/>
+        </p:nvCxnSpPr>
+        <p:spPr>
+          <a:xfrm>
+            <a:off x="1905000" y="4152900"/>
+            <a:ext cx="0" cy="1537336"/>
+          </a:xfrm>
+          <a:prstGeom prst="straightConnector1">
+            <a:avLst/>
+          </a:prstGeom>
+          <a:ln>
+            <a:headEnd type="triangle"/>
+            <a:tailEnd type="triangle"/>
+          </a:ln>
+        </p:spPr>
+        <p:style>
+          <a:lnRef idx="1">
+            <a:schemeClr val="accent1"/>
+          </a:lnRef>
+          <a:fillRef idx="0">
+            <a:schemeClr val="accent1"/>
+          </a:fillRef>
+          <a:effectRef idx="0">
+            <a:schemeClr val="accent1"/>
+          </a:effectRef>
+          <a:fontRef idx="minor">
+            <a:schemeClr val="tx1"/>
+          </a:fontRef>
+        </p:style>
+      </p:cxnSp>
+      <p:sp>
+        <p:nvSpPr>
+          <p:cNvPr id="49" name="TextBox 31">
+            <a:extLst>
+              <a:ext uri="{FF2B5EF4-FFF2-40B4-BE49-F238E27FC236}">
+                <a16:creationId xmlns:a16="http://schemas.microsoft.com/office/drawing/2014/main" id="{C91B3D70-5104-44C1-0ABB-72E5127F0DD8}"/>
+              </a:ext>
+            </a:extLst>
+          </p:cNvPr>
+          <p:cNvSpPr txBox="1"/>
+          <p:nvPr/>
+        </p:nvSpPr>
+        <p:spPr>
+          <a:xfrm>
+            <a:off x="1447800" y="4762500"/>
+            <a:ext cx="404622" cy="205184"/>
+          </a:xfrm>
+          <a:prstGeom prst="rect">
+            <a:avLst/>
+          </a:prstGeom>
+        </p:spPr>
+        <p:txBody>
+          <a:bodyPr wrap="square" lIns="0" tIns="0" rIns="0" bIns="0" rtlCol="0" anchor="t">
+            <a:spAutoFit/>
+          </a:bodyPr>
+          <a:lstStyle/>
+          <a:p>
+            <a:pPr algn="l">
+              <a:lnSpc>
+                <a:spcPts val="1574"/>
+              </a:lnSpc>
+            </a:pPr>
+            <a:r>
+              <a:rPr lang="en-US" sz="1400">
+                <a:solidFill>
+                  <a:srgbClr val="6B7099"/>
+                </a:solidFill>
+                <a:latin typeface="IBM Plex Mono"/>
+                <a:ea typeface="IBM Plex Mono"/>
+                <a:cs typeface="IBM Plex Mono"/>
+                <a:sym typeface="IBM Plex Mono"/>
+              </a:rPr>
+              <a:t>5 s</a:t>
+            </a:r>
+          </a:p>
+        </p:txBody>
+      </p:sp>
+      <p:cxnSp>
+        <p:nvCxnSpPr>
+          <p:cNvPr id="50" name="Straight Arrow Connector 49">
+            <a:extLst>
+              <a:ext uri="{FF2B5EF4-FFF2-40B4-BE49-F238E27FC236}">
+                <a16:creationId xmlns:a16="http://schemas.microsoft.com/office/drawing/2014/main" id="{FD4E9B92-5695-C6C9-FC9B-9B845E3C5AD5}"/>
+              </a:ext>
+            </a:extLst>
+          </p:cNvPr>
+          <p:cNvCxnSpPr>
+            <a:cxnSpLocks/>
+          </p:cNvCxnSpPr>
+          <p:nvPr/>
+        </p:nvCxnSpPr>
+        <p:spPr>
+          <a:xfrm>
+            <a:off x="3636000" y="4991100"/>
+            <a:ext cx="0" cy="699136"/>
+          </a:xfrm>
+          <a:prstGeom prst="straightConnector1">
+            <a:avLst/>
+          </a:prstGeom>
+          <a:ln>
+            <a:headEnd type="triangle"/>
+            <a:tailEnd type="triangle"/>
+          </a:ln>
+        </p:spPr>
+        <p:style>
+          <a:lnRef idx="1">
+            <a:schemeClr val="accent1"/>
+          </a:lnRef>
+          <a:fillRef idx="0">
+            <a:schemeClr val="accent1"/>
+          </a:fillRef>
+          <a:effectRef idx="0">
+            <a:schemeClr val="accent1"/>
+          </a:effectRef>
+          <a:fontRef idx="minor">
+            <a:schemeClr val="tx1"/>
+          </a:fontRef>
+        </p:style>
+      </p:cxnSp>
     </p:spTree>
   </p:cSld>
   <p:clrMapOvr>
@@ -22777,276 +24985,126 @@
       </p:sp>
       <p:grpSp>
         <p:nvGrpSpPr>
-          <p:cNvPr id="6" name="Group 6"/>
+          <p:cNvPr id="76" name="Group 75">
+            <a:extLst>
+              <a:ext uri="{FF2B5EF4-FFF2-40B4-BE49-F238E27FC236}">
+                <a16:creationId xmlns:a16="http://schemas.microsoft.com/office/drawing/2014/main" id="{8FC23A52-A733-BBFB-17AF-2C8513496E70}"/>
+              </a:ext>
+            </a:extLst>
+          </p:cNvPr>
           <p:cNvGrpSpPr/>
           <p:nvPr/>
         </p:nvGrpSpPr>
         <p:grpSpPr>
           <a:xfrm>
-            <a:off x="1143000" y="3834574"/>
+            <a:off x="9753600" y="607171"/>
             <a:ext cx="3429000" cy="1919288"/>
-            <a:chOff x="0" y="0"/>
-            <a:chExt cx="4572000" cy="2559050"/>
+            <a:chOff x="1143000" y="3834574"/>
+            <a:chExt cx="3429000" cy="1919288"/>
           </a:xfrm>
         </p:grpSpPr>
+        <p:grpSp>
+          <p:nvGrpSpPr>
+            <p:cNvPr id="6" name="Group 6"/>
+            <p:cNvGrpSpPr/>
+            <p:nvPr/>
+          </p:nvGrpSpPr>
+          <p:grpSpPr>
+            <a:xfrm>
+              <a:off x="1143000" y="3834574"/>
+              <a:ext cx="3429000" cy="1919288"/>
+              <a:chOff x="0" y="0"/>
+              <a:chExt cx="4572000" cy="2559050"/>
+            </a:xfrm>
+          </p:grpSpPr>
+          <p:sp>
+            <p:nvSpPr>
+              <p:cNvPr id="7" name="Freeform 7"/>
+              <p:cNvSpPr/>
+              <p:nvPr/>
+            </p:nvSpPr>
+            <p:spPr>
+              <a:xfrm>
+                <a:off x="0" y="0"/>
+                <a:ext cx="4572000" cy="2559050"/>
+              </a:xfrm>
+              <a:custGeom>
+                <a:avLst/>
+                <a:gdLst/>
+                <a:ahLst/>
+                <a:cxnLst/>
+                <a:rect l="l" t="t" r="r" b="b"/>
+                <a:pathLst>
+                  <a:path w="4572000" h="2559050">
+                    <a:moveTo>
+                      <a:pt x="279400" y="0"/>
+                    </a:moveTo>
+                    <a:lnTo>
+                      <a:pt x="4292600" y="0"/>
+                    </a:lnTo>
+                    <a:cubicBezTo>
+                      <a:pt x="4446905" y="0"/>
+                      <a:pt x="4572000" y="125095"/>
+                      <a:pt x="4572000" y="279400"/>
+                    </a:cubicBezTo>
+                    <a:lnTo>
+                      <a:pt x="4572000" y="2279650"/>
+                    </a:lnTo>
+                    <a:cubicBezTo>
+                      <a:pt x="4572000" y="2433955"/>
+                      <a:pt x="4446905" y="2559050"/>
+                      <a:pt x="4292600" y="2559050"/>
+                    </a:cubicBezTo>
+                    <a:lnTo>
+                      <a:pt x="279400" y="2559050"/>
+                    </a:lnTo>
+                    <a:cubicBezTo>
+                      <a:pt x="125095" y="2559050"/>
+                      <a:pt x="0" y="2433955"/>
+                      <a:pt x="0" y="2279650"/>
+                    </a:cubicBezTo>
+                    <a:lnTo>
+                      <a:pt x="0" y="279400"/>
+                    </a:lnTo>
+                    <a:cubicBezTo>
+                      <a:pt x="0" y="125095"/>
+                      <a:pt x="125095" y="0"/>
+                      <a:pt x="279400" y="0"/>
+                    </a:cubicBezTo>
+                    <a:close/>
+                  </a:path>
+                </a:pathLst>
+              </a:custGeom>
+              <a:solidFill>
+                <a:srgbClr val="161A32"/>
+              </a:solidFill>
+            </p:spPr>
+            <p:txBody>
+              <a:bodyPr/>
+              <a:lstStyle/>
+              <a:p>
+                <a:endParaRPr lang="ko-KR" altLang="en-US"/>
+              </a:p>
+            </p:txBody>
+          </p:sp>
+        </p:grpSp>
         <p:sp>
           <p:nvSpPr>
-            <p:cNvPr id="7" name="Freeform 7"/>
+            <p:cNvPr id="8" name="AutoShape 8"/>
             <p:cNvSpPr/>
             <p:nvPr/>
           </p:nvSpPr>
           <p:spPr>
             <a:xfrm>
-              <a:off x="0" y="0"/>
-              <a:ext cx="4572000" cy="2559050"/>
+              <a:off x="1143000" y="3834574"/>
+              <a:ext cx="3429000" cy="9525"/>
             </a:xfrm>
-            <a:custGeom>
+            <a:prstGeom prst="rect">
               <a:avLst/>
-              <a:gdLst/>
-              <a:ahLst/>
-              <a:cxnLst/>
-              <a:rect l="l" t="t" r="r" b="b"/>
-              <a:pathLst>
-                <a:path w="4572000" h="2559050">
-                  <a:moveTo>
-                    <a:pt x="279400" y="0"/>
-                  </a:moveTo>
-                  <a:lnTo>
-                    <a:pt x="4292600" y="0"/>
-                  </a:lnTo>
-                  <a:cubicBezTo>
-                    <a:pt x="4446905" y="0"/>
-                    <a:pt x="4572000" y="125095"/>
-                    <a:pt x="4572000" y="279400"/>
-                  </a:cubicBezTo>
-                  <a:lnTo>
-                    <a:pt x="4572000" y="2279650"/>
-                  </a:lnTo>
-                  <a:cubicBezTo>
-                    <a:pt x="4572000" y="2433955"/>
-                    <a:pt x="4446905" y="2559050"/>
-                    <a:pt x="4292600" y="2559050"/>
-                  </a:cubicBezTo>
-                  <a:lnTo>
-                    <a:pt x="279400" y="2559050"/>
-                  </a:lnTo>
-                  <a:cubicBezTo>
-                    <a:pt x="125095" y="2559050"/>
-                    <a:pt x="0" y="2433955"/>
-                    <a:pt x="0" y="2279650"/>
-                  </a:cubicBezTo>
-                  <a:lnTo>
-                    <a:pt x="0" y="279400"/>
-                  </a:lnTo>
-                  <a:cubicBezTo>
-                    <a:pt x="0" y="125095"/>
-                    <a:pt x="125095" y="0"/>
-                    <a:pt x="279400" y="0"/>
-                  </a:cubicBezTo>
-                  <a:close/>
-                </a:path>
-              </a:pathLst>
-            </a:custGeom>
+            </a:prstGeom>
             <a:solidFill>
-              <a:srgbClr val="161A32"/>
-            </a:solidFill>
-          </p:spPr>
-          <p:txBody>
-            <a:bodyPr/>
-            <a:lstStyle/>
-            <a:p>
-              <a:endParaRPr lang="ko-KR" altLang="en-US"/>
-            </a:p>
-          </p:txBody>
-        </p:sp>
-      </p:grpSp>
-      <p:sp>
-        <p:nvSpPr>
-          <p:cNvPr id="8" name="AutoShape 8"/>
-          <p:cNvSpPr/>
-          <p:nvPr/>
-        </p:nvSpPr>
-        <p:spPr>
-          <a:xfrm>
-            <a:off x="1143000" y="3834574"/>
-            <a:ext cx="3429000" cy="9525"/>
-          </a:xfrm>
-          <a:prstGeom prst="rect">
-            <a:avLst/>
-          </a:prstGeom>
-          <a:solidFill>
-            <a:srgbClr val="FFFFFF">
-              <a:alpha val="7843"/>
-            </a:srgbClr>
-          </a:solidFill>
-        </p:spPr>
-        <p:txBody>
-          <a:bodyPr/>
-          <a:lstStyle/>
-          <a:p>
-            <a:endParaRPr lang="ko-KR" altLang="en-US"/>
-          </a:p>
-        </p:txBody>
-      </p:sp>
-      <p:sp>
-        <p:nvSpPr>
-          <p:cNvPr id="9" name="AutoShape 9"/>
-          <p:cNvSpPr/>
-          <p:nvPr/>
-        </p:nvSpPr>
-        <p:spPr>
-          <a:xfrm>
-            <a:off x="4562475" y="3844100"/>
-            <a:ext cx="9525" cy="1900238"/>
-          </a:xfrm>
-          <a:prstGeom prst="rect">
-            <a:avLst/>
-          </a:prstGeom>
-          <a:solidFill>
-            <a:srgbClr val="FFFFFF">
-              <a:alpha val="7843"/>
-            </a:srgbClr>
-          </a:solidFill>
-        </p:spPr>
-        <p:txBody>
-          <a:bodyPr/>
-          <a:lstStyle/>
-          <a:p>
-            <a:endParaRPr lang="ko-KR" altLang="en-US"/>
-          </a:p>
-        </p:txBody>
-      </p:sp>
-      <p:sp>
-        <p:nvSpPr>
-          <p:cNvPr id="10" name="AutoShape 10"/>
-          <p:cNvSpPr/>
-          <p:nvPr/>
-        </p:nvSpPr>
-        <p:spPr>
-          <a:xfrm>
-            <a:off x="1143000" y="5744337"/>
-            <a:ext cx="3429000" cy="9525"/>
-          </a:xfrm>
-          <a:prstGeom prst="rect">
-            <a:avLst/>
-          </a:prstGeom>
-          <a:solidFill>
-            <a:srgbClr val="FFFFFF">
-              <a:alpha val="7843"/>
-            </a:srgbClr>
-          </a:solidFill>
-        </p:spPr>
-        <p:txBody>
-          <a:bodyPr/>
-          <a:lstStyle/>
-          <a:p>
-            <a:endParaRPr lang="ko-KR" altLang="en-US"/>
-          </a:p>
-        </p:txBody>
-      </p:sp>
-      <p:sp>
-        <p:nvSpPr>
-          <p:cNvPr id="11" name="AutoShape 11"/>
-          <p:cNvSpPr/>
-          <p:nvPr/>
-        </p:nvSpPr>
-        <p:spPr>
-          <a:xfrm>
-            <a:off x="1143000" y="3844100"/>
-            <a:ext cx="9525" cy="1900238"/>
-          </a:xfrm>
-          <a:prstGeom prst="rect">
-            <a:avLst/>
-          </a:prstGeom>
-          <a:solidFill>
-            <a:srgbClr val="FFFFFF">
-              <a:alpha val="7843"/>
-            </a:srgbClr>
-          </a:solidFill>
-        </p:spPr>
-        <p:txBody>
-          <a:bodyPr/>
-          <a:lstStyle/>
-          <a:p>
-            <a:endParaRPr lang="ko-KR" altLang="en-US"/>
-          </a:p>
-        </p:txBody>
-      </p:sp>
-      <p:grpSp>
-        <p:nvGrpSpPr>
-          <p:cNvPr id="12" name="Group 12"/>
-          <p:cNvGrpSpPr/>
-          <p:nvPr/>
-        </p:nvGrpSpPr>
-        <p:grpSpPr>
-          <a:xfrm>
-            <a:off x="1438275" y="4110800"/>
-            <a:ext cx="457200" cy="457200"/>
-            <a:chOff x="0" y="0"/>
-            <a:chExt cx="609600" cy="609600"/>
-          </a:xfrm>
-        </p:grpSpPr>
-        <p:sp>
-          <p:nvSpPr>
-            <p:cNvPr id="13" name="Freeform 13"/>
-            <p:cNvSpPr/>
-            <p:nvPr/>
-          </p:nvSpPr>
-          <p:spPr>
-            <a:xfrm>
-              <a:off x="0" y="0"/>
-              <a:ext cx="609600" cy="609600"/>
-            </a:xfrm>
-            <a:custGeom>
-              <a:avLst/>
-              <a:gdLst/>
-              <a:ahLst/>
-              <a:cxnLst/>
-              <a:rect l="l" t="t" r="r" b="b"/>
-              <a:pathLst>
-                <a:path w="609600" h="609600">
-                  <a:moveTo>
-                    <a:pt x="165100" y="0"/>
-                  </a:moveTo>
-                  <a:lnTo>
-                    <a:pt x="444500" y="0"/>
-                  </a:lnTo>
-                  <a:cubicBezTo>
-                    <a:pt x="535686" y="0"/>
-                    <a:pt x="609600" y="73914"/>
-                    <a:pt x="609600" y="165100"/>
-                  </a:cubicBezTo>
-                  <a:lnTo>
-                    <a:pt x="609600" y="444500"/>
-                  </a:lnTo>
-                  <a:cubicBezTo>
-                    <a:pt x="609600" y="535686"/>
-                    <a:pt x="535686" y="609600"/>
-                    <a:pt x="444500" y="609600"/>
-                  </a:cubicBezTo>
-                  <a:lnTo>
-                    <a:pt x="165100" y="609600"/>
-                  </a:lnTo>
-                  <a:cubicBezTo>
-                    <a:pt x="73914" y="609600"/>
-                    <a:pt x="0" y="535686"/>
-                    <a:pt x="0" y="444500"/>
-                  </a:cubicBezTo>
-                  <a:lnTo>
-                    <a:pt x="0" y="165100"/>
-                  </a:lnTo>
-                  <a:cubicBezTo>
-                    <a:pt x="0" y="73914"/>
-                    <a:pt x="73914" y="0"/>
-                    <a:pt x="165100" y="0"/>
-                  </a:cubicBezTo>
-                  <a:close/>
-                </a:path>
-              </a:pathLst>
-            </a:custGeom>
-            <a:solidFill>
-              <a:srgbClr val="7C83FF">
-                <a:alpha val="1569"/>
+              <a:srgbClr val="FFFFFF">
+                <a:alpha val="7843"/>
               </a:srgbClr>
             </a:solidFill>
           </p:spPr>
@@ -23058,361 +25116,23 @@
             </a:p>
           </p:txBody>
         </p:sp>
-      </p:grpSp>
-      <p:sp>
-        <p:nvSpPr>
-          <p:cNvPr id="14" name="TextBox 14"/>
-          <p:cNvSpPr txBox="1"/>
-          <p:nvPr/>
-        </p:nvSpPr>
-        <p:spPr>
-          <a:xfrm>
-            <a:off x="2028824" y="4139374"/>
-            <a:ext cx="1142997" cy="323165"/>
-          </a:xfrm>
-          <a:prstGeom prst="rect">
-            <a:avLst/>
-          </a:prstGeom>
-        </p:spPr>
-        <p:txBody>
-          <a:bodyPr wrap="square" lIns="0" tIns="0" rIns="0" bIns="0" rtlCol="0" anchor="t">
-            <a:spAutoFit/>
-          </a:bodyPr>
-          <a:lstStyle/>
-          <a:p>
-            <a:pPr algn="l">
-              <a:lnSpc>
-                <a:spcPts val="2729"/>
-              </a:lnSpc>
-            </a:pPr>
-            <a:r>
-              <a:rPr lang="en-US" sz="1950" b="1" spc="-29" dirty="0">
-                <a:solidFill>
-                  <a:srgbClr val="EEF0FF"/>
-                </a:solidFill>
-                <a:latin typeface="IBM Plex Sans Bold"/>
-                <a:ea typeface="IBM Plex Sans Bold"/>
-                <a:cs typeface="IBM Plex Sans Bold"/>
-                <a:sym typeface="IBM Plex Sans Bold"/>
-              </a:rPr>
-              <a:t>Pruning</a:t>
-            </a:r>
-          </a:p>
-        </p:txBody>
-      </p:sp>
-      <p:sp>
-        <p:nvSpPr>
-          <p:cNvPr id="15" name="TextBox 15"/>
-          <p:cNvSpPr txBox="1"/>
-          <p:nvPr/>
-        </p:nvSpPr>
-        <p:spPr>
-          <a:xfrm>
-            <a:off x="1438275" y="4615625"/>
-            <a:ext cx="2838450" cy="862013"/>
-          </a:xfrm>
-          <a:prstGeom prst="rect">
-            <a:avLst/>
-          </a:prstGeom>
-        </p:spPr>
-        <p:txBody>
-          <a:bodyPr lIns="0" tIns="0" rIns="0" bIns="0" rtlCol="0" anchor="t">
-            <a:spAutoFit/>
-          </a:bodyPr>
-          <a:lstStyle/>
-          <a:p>
-            <a:pPr algn="l">
-              <a:lnSpc>
-                <a:spcPts val="2137"/>
-              </a:lnSpc>
-            </a:pPr>
-            <a:r>
-              <a:rPr lang="en-US" sz="1425">
-                <a:solidFill>
-                  <a:srgbClr val="A6ABCE"/>
-                </a:solidFill>
-                <a:latin typeface="IBM Plex Sans"/>
-                <a:ea typeface="IBM Plex Sans"/>
-                <a:cs typeface="IBM Plex Sans"/>
-                <a:sym typeface="IBM Plex Sans"/>
-              </a:rPr>
-              <a:t>Remove low-importance weights / channels to cut compute with minimal accuracy loss.</a:t>
-            </a:r>
-          </a:p>
-        </p:txBody>
-      </p:sp>
-      <p:grpSp>
-        <p:nvGrpSpPr>
-          <p:cNvPr id="16" name="Group 16"/>
-          <p:cNvGrpSpPr/>
-          <p:nvPr/>
-        </p:nvGrpSpPr>
-        <p:grpSpPr>
-          <a:xfrm>
-            <a:off x="1143000" y="5963412"/>
-            <a:ext cx="3429000" cy="1919288"/>
-            <a:chOff x="0" y="0"/>
-            <a:chExt cx="4572000" cy="2559050"/>
-          </a:xfrm>
-        </p:grpSpPr>
         <p:sp>
           <p:nvSpPr>
-            <p:cNvPr id="17" name="Freeform 17"/>
+            <p:cNvPr id="9" name="AutoShape 9"/>
             <p:cNvSpPr/>
             <p:nvPr/>
           </p:nvSpPr>
           <p:spPr>
             <a:xfrm>
-              <a:off x="0" y="0"/>
-              <a:ext cx="4572000" cy="2559050"/>
+              <a:off x="4562475" y="3844100"/>
+              <a:ext cx="9525" cy="1900238"/>
             </a:xfrm>
-            <a:custGeom>
+            <a:prstGeom prst="rect">
               <a:avLst/>
-              <a:gdLst/>
-              <a:ahLst/>
-              <a:cxnLst/>
-              <a:rect l="l" t="t" r="r" b="b"/>
-              <a:pathLst>
-                <a:path w="4572000" h="2559050">
-                  <a:moveTo>
-                    <a:pt x="279400" y="0"/>
-                  </a:moveTo>
-                  <a:lnTo>
-                    <a:pt x="4292600" y="0"/>
-                  </a:lnTo>
-                  <a:cubicBezTo>
-                    <a:pt x="4446905" y="0"/>
-                    <a:pt x="4572000" y="125095"/>
-                    <a:pt x="4572000" y="279400"/>
-                  </a:cubicBezTo>
-                  <a:lnTo>
-                    <a:pt x="4572000" y="2279650"/>
-                  </a:lnTo>
-                  <a:cubicBezTo>
-                    <a:pt x="4572000" y="2433955"/>
-                    <a:pt x="4446905" y="2559050"/>
-                    <a:pt x="4292600" y="2559050"/>
-                  </a:cubicBezTo>
-                  <a:lnTo>
-                    <a:pt x="279400" y="2559050"/>
-                  </a:lnTo>
-                  <a:cubicBezTo>
-                    <a:pt x="125095" y="2559050"/>
-                    <a:pt x="0" y="2433955"/>
-                    <a:pt x="0" y="2279650"/>
-                  </a:cubicBezTo>
-                  <a:lnTo>
-                    <a:pt x="0" y="279400"/>
-                  </a:lnTo>
-                  <a:cubicBezTo>
-                    <a:pt x="0" y="125095"/>
-                    <a:pt x="125095" y="0"/>
-                    <a:pt x="279400" y="0"/>
-                  </a:cubicBezTo>
-                  <a:close/>
-                </a:path>
-              </a:pathLst>
-            </a:custGeom>
+            </a:prstGeom>
             <a:solidFill>
-              <a:srgbClr val="161A32"/>
-            </a:solidFill>
-          </p:spPr>
-          <p:txBody>
-            <a:bodyPr/>
-            <a:lstStyle/>
-            <a:p>
-              <a:endParaRPr lang="ko-KR" altLang="en-US"/>
-            </a:p>
-          </p:txBody>
-        </p:sp>
-      </p:grpSp>
-      <p:sp>
-        <p:nvSpPr>
-          <p:cNvPr id="18" name="AutoShape 18"/>
-          <p:cNvSpPr/>
-          <p:nvPr/>
-        </p:nvSpPr>
-        <p:spPr>
-          <a:xfrm>
-            <a:off x="1143000" y="5963412"/>
-            <a:ext cx="3429000" cy="9525"/>
-          </a:xfrm>
-          <a:prstGeom prst="rect">
-            <a:avLst/>
-          </a:prstGeom>
-          <a:solidFill>
-            <a:srgbClr val="FFFFFF">
-              <a:alpha val="7843"/>
-            </a:srgbClr>
-          </a:solidFill>
-        </p:spPr>
-        <p:txBody>
-          <a:bodyPr/>
-          <a:lstStyle/>
-          <a:p>
-            <a:endParaRPr lang="ko-KR" altLang="en-US"/>
-          </a:p>
-        </p:txBody>
-      </p:sp>
-      <p:sp>
-        <p:nvSpPr>
-          <p:cNvPr id="19" name="AutoShape 19"/>
-          <p:cNvSpPr/>
-          <p:nvPr/>
-        </p:nvSpPr>
-        <p:spPr>
-          <a:xfrm>
-            <a:off x="4562475" y="5972937"/>
-            <a:ext cx="9525" cy="1900238"/>
-          </a:xfrm>
-          <a:prstGeom prst="rect">
-            <a:avLst/>
-          </a:prstGeom>
-          <a:solidFill>
-            <a:srgbClr val="FFFFFF">
-              <a:alpha val="7843"/>
-            </a:srgbClr>
-          </a:solidFill>
-        </p:spPr>
-        <p:txBody>
-          <a:bodyPr/>
-          <a:lstStyle/>
-          <a:p>
-            <a:endParaRPr lang="ko-KR" altLang="en-US"/>
-          </a:p>
-        </p:txBody>
-      </p:sp>
-      <p:sp>
-        <p:nvSpPr>
-          <p:cNvPr id="20" name="AutoShape 20"/>
-          <p:cNvSpPr/>
-          <p:nvPr/>
-        </p:nvSpPr>
-        <p:spPr>
-          <a:xfrm>
-            <a:off x="1143000" y="7873175"/>
-            <a:ext cx="3429000" cy="9525"/>
-          </a:xfrm>
-          <a:prstGeom prst="rect">
-            <a:avLst/>
-          </a:prstGeom>
-          <a:solidFill>
-            <a:srgbClr val="FFFFFF">
-              <a:alpha val="7843"/>
-            </a:srgbClr>
-          </a:solidFill>
-        </p:spPr>
-        <p:txBody>
-          <a:bodyPr/>
-          <a:lstStyle/>
-          <a:p>
-            <a:endParaRPr lang="ko-KR" altLang="en-US"/>
-          </a:p>
-        </p:txBody>
-      </p:sp>
-      <p:sp>
-        <p:nvSpPr>
-          <p:cNvPr id="21" name="AutoShape 21"/>
-          <p:cNvSpPr/>
-          <p:nvPr/>
-        </p:nvSpPr>
-        <p:spPr>
-          <a:xfrm>
-            <a:off x="1143000" y="5972937"/>
-            <a:ext cx="9525" cy="1900238"/>
-          </a:xfrm>
-          <a:prstGeom prst="rect">
-            <a:avLst/>
-          </a:prstGeom>
-          <a:solidFill>
-            <a:srgbClr val="FFFFFF">
-              <a:alpha val="7843"/>
-            </a:srgbClr>
-          </a:solidFill>
-        </p:spPr>
-        <p:txBody>
-          <a:bodyPr/>
-          <a:lstStyle/>
-          <a:p>
-            <a:endParaRPr lang="ko-KR" altLang="en-US"/>
-          </a:p>
-        </p:txBody>
-      </p:sp>
-      <p:grpSp>
-        <p:nvGrpSpPr>
-          <p:cNvPr id="22" name="Group 22"/>
-          <p:cNvGrpSpPr/>
-          <p:nvPr/>
-        </p:nvGrpSpPr>
-        <p:grpSpPr>
-          <a:xfrm>
-            <a:off x="1438275" y="6239637"/>
-            <a:ext cx="457200" cy="457200"/>
-            <a:chOff x="0" y="0"/>
-            <a:chExt cx="609600" cy="609600"/>
-          </a:xfrm>
-        </p:grpSpPr>
-        <p:sp>
-          <p:nvSpPr>
-            <p:cNvPr id="23" name="Freeform 23"/>
-            <p:cNvSpPr/>
-            <p:nvPr/>
-          </p:nvSpPr>
-          <p:spPr>
-            <a:xfrm>
-              <a:off x="0" y="0"/>
-              <a:ext cx="609600" cy="609600"/>
-            </a:xfrm>
-            <a:custGeom>
-              <a:avLst/>
-              <a:gdLst/>
-              <a:ahLst/>
-              <a:cxnLst/>
-              <a:rect l="l" t="t" r="r" b="b"/>
-              <a:pathLst>
-                <a:path w="609600" h="609600">
-                  <a:moveTo>
-                    <a:pt x="165100" y="0"/>
-                  </a:moveTo>
-                  <a:lnTo>
-                    <a:pt x="444500" y="0"/>
-                  </a:lnTo>
-                  <a:cubicBezTo>
-                    <a:pt x="535686" y="0"/>
-                    <a:pt x="609600" y="73914"/>
-                    <a:pt x="609600" y="165100"/>
-                  </a:cubicBezTo>
-                  <a:lnTo>
-                    <a:pt x="609600" y="444500"/>
-                  </a:lnTo>
-                  <a:cubicBezTo>
-                    <a:pt x="609600" y="535686"/>
-                    <a:pt x="535686" y="609600"/>
-                    <a:pt x="444500" y="609600"/>
-                  </a:cubicBezTo>
-                  <a:lnTo>
-                    <a:pt x="165100" y="609600"/>
-                  </a:lnTo>
-                  <a:cubicBezTo>
-                    <a:pt x="73914" y="609600"/>
-                    <a:pt x="0" y="535686"/>
-                    <a:pt x="0" y="444500"/>
-                  </a:cubicBezTo>
-                  <a:lnTo>
-                    <a:pt x="0" y="165100"/>
-                  </a:lnTo>
-                  <a:cubicBezTo>
-                    <a:pt x="0" y="73914"/>
-                    <a:pt x="73914" y="0"/>
-                    <a:pt x="165100" y="0"/>
-                  </a:cubicBezTo>
-                  <a:close/>
-                </a:path>
-              </a:pathLst>
-            </a:custGeom>
-            <a:solidFill>
-              <a:srgbClr val="7C83FF">
-                <a:alpha val="1569"/>
+              <a:srgbClr val="FFFFFF">
+                <a:alpha val="7843"/>
               </a:srgbClr>
             </a:solidFill>
           </p:spPr>
@@ -23424,163 +25144,24 @@
             </a:p>
           </p:txBody>
         </p:sp>
-      </p:grpSp>
-      <p:sp>
-        <p:nvSpPr>
-          <p:cNvPr id="24" name="TextBox 24"/>
-          <p:cNvSpPr txBox="1"/>
-          <p:nvPr/>
-        </p:nvSpPr>
-        <p:spPr>
-          <a:xfrm>
-            <a:off x="2028825" y="6268211"/>
-            <a:ext cx="2076450" cy="323165"/>
-          </a:xfrm>
-          <a:prstGeom prst="rect">
-            <a:avLst/>
-          </a:prstGeom>
-        </p:spPr>
-        <p:txBody>
-          <a:bodyPr wrap="square" lIns="0" tIns="0" rIns="0" bIns="0" rtlCol="0" anchor="t">
-            <a:spAutoFit/>
-          </a:bodyPr>
-          <a:lstStyle/>
-          <a:p>
-            <a:pPr algn="l">
-              <a:lnSpc>
-                <a:spcPts val="2729"/>
-              </a:lnSpc>
-            </a:pPr>
-            <a:r>
-              <a:rPr lang="en-US" sz="1950" b="1" spc="-29" dirty="0">
-                <a:solidFill>
-                  <a:srgbClr val="EEF0FF"/>
-                </a:solidFill>
-                <a:latin typeface="IBM Plex Sans Bold"/>
-                <a:ea typeface="IBM Plex Sans Bold"/>
-                <a:cs typeface="IBM Plex Sans Bold"/>
-                <a:sym typeface="IBM Plex Sans Bold"/>
-              </a:rPr>
-              <a:t>Quantization</a:t>
-            </a:r>
-          </a:p>
-        </p:txBody>
-      </p:sp>
-      <p:sp>
-        <p:nvSpPr>
-          <p:cNvPr id="25" name="TextBox 25"/>
-          <p:cNvSpPr txBox="1"/>
-          <p:nvPr/>
-        </p:nvSpPr>
-        <p:spPr>
-          <a:xfrm>
-            <a:off x="1438275" y="6744462"/>
-            <a:ext cx="2838450" cy="862013"/>
-          </a:xfrm>
-          <a:prstGeom prst="rect">
-            <a:avLst/>
-          </a:prstGeom>
-        </p:spPr>
-        <p:txBody>
-          <a:bodyPr lIns="0" tIns="0" rIns="0" bIns="0" rtlCol="0" anchor="t">
-            <a:spAutoFit/>
-          </a:bodyPr>
-          <a:lstStyle/>
-          <a:p>
-            <a:pPr algn="l">
-              <a:lnSpc>
-                <a:spcPts val="2137"/>
-              </a:lnSpc>
-            </a:pPr>
-            <a:r>
-              <a:rPr lang="en-US" sz="1425">
-                <a:solidFill>
-                  <a:srgbClr val="A6ABCE"/>
-                </a:solidFill>
-                <a:latin typeface="IBM Plex Sans"/>
-                <a:ea typeface="IBM Plex Sans"/>
-                <a:cs typeface="IBM Plex Sans"/>
-                <a:sym typeface="IBM Plex Sans"/>
-              </a:rPr>
-              <a:t>Shipped as float16 TFLite (FP32 → FP16, 2× smaller); swap to INT8 figures only if measured.</a:t>
-            </a:r>
-          </a:p>
-        </p:txBody>
-      </p:sp>
-      <p:grpSp>
-        <p:nvGrpSpPr>
-          <p:cNvPr id="26" name="Group 26"/>
-          <p:cNvGrpSpPr/>
-          <p:nvPr/>
-        </p:nvGrpSpPr>
-        <p:grpSpPr>
-          <a:xfrm>
-            <a:off x="5029200" y="3608356"/>
-            <a:ext cx="12115800" cy="4500562"/>
-            <a:chOff x="0" y="0"/>
-            <a:chExt cx="16154400" cy="6000750"/>
-          </a:xfrm>
-        </p:grpSpPr>
         <p:sp>
           <p:nvSpPr>
-            <p:cNvPr id="27" name="Freeform 27"/>
+            <p:cNvPr id="10" name="AutoShape 10"/>
             <p:cNvSpPr/>
             <p:nvPr/>
           </p:nvSpPr>
           <p:spPr>
             <a:xfrm>
-              <a:off x="0" y="0"/>
-              <a:ext cx="16154400" cy="6000750"/>
+              <a:off x="1143000" y="5744337"/>
+              <a:ext cx="3429000" cy="9525"/>
             </a:xfrm>
-            <a:custGeom>
+            <a:prstGeom prst="rect">
               <a:avLst/>
-              <a:gdLst/>
-              <a:ahLst/>
-              <a:cxnLst/>
-              <a:rect l="l" t="t" r="r" b="b"/>
-              <a:pathLst>
-                <a:path w="16154400" h="6000750">
-                  <a:moveTo>
-                    <a:pt x="279400" y="0"/>
-                  </a:moveTo>
-                  <a:lnTo>
-                    <a:pt x="15875000" y="0"/>
-                  </a:lnTo>
-                  <a:cubicBezTo>
-                    <a:pt x="16029305" y="0"/>
-                    <a:pt x="16154400" y="125095"/>
-                    <a:pt x="16154400" y="279400"/>
-                  </a:cubicBezTo>
-                  <a:lnTo>
-                    <a:pt x="16154400" y="5721350"/>
-                  </a:lnTo>
-                  <a:cubicBezTo>
-                    <a:pt x="16154400" y="5875655"/>
-                    <a:pt x="16029305" y="6000750"/>
-                    <a:pt x="15875000" y="6000750"/>
-                  </a:cubicBezTo>
-                  <a:lnTo>
-                    <a:pt x="279400" y="6000750"/>
-                  </a:lnTo>
-                  <a:cubicBezTo>
-                    <a:pt x="125095" y="6000750"/>
-                    <a:pt x="0" y="5875655"/>
-                    <a:pt x="0" y="5721350"/>
-                  </a:cubicBezTo>
-                  <a:lnTo>
-                    <a:pt x="0" y="279400"/>
-                  </a:lnTo>
-                  <a:cubicBezTo>
-                    <a:pt x="0" y="125095"/>
-                    <a:pt x="125095" y="0"/>
-                    <a:pt x="279400" y="0"/>
-                  </a:cubicBezTo>
-                  <a:close/>
-                </a:path>
-              </a:pathLst>
-            </a:custGeom>
+            </a:prstGeom>
             <a:solidFill>
-              <a:srgbClr val="161A32"/>
+              <a:srgbClr val="FFFFFF">
+                <a:alpha val="7843"/>
+              </a:srgbClr>
             </a:solidFill>
           </p:spPr>
           <p:txBody>
@@ -23591,1546 +25172,709 @@
             </a:p>
           </p:txBody>
         </p:sp>
+        <p:sp>
+          <p:nvSpPr>
+            <p:cNvPr id="11" name="AutoShape 11"/>
+            <p:cNvSpPr/>
+            <p:nvPr/>
+          </p:nvSpPr>
+          <p:spPr>
+            <a:xfrm>
+              <a:off x="1143000" y="3844100"/>
+              <a:ext cx="9525" cy="1900238"/>
+            </a:xfrm>
+            <a:prstGeom prst="rect">
+              <a:avLst/>
+            </a:prstGeom>
+            <a:solidFill>
+              <a:srgbClr val="FFFFFF">
+                <a:alpha val="7843"/>
+              </a:srgbClr>
+            </a:solidFill>
+          </p:spPr>
+          <p:txBody>
+            <a:bodyPr/>
+            <a:lstStyle/>
+            <a:p>
+              <a:endParaRPr lang="ko-KR" altLang="en-US"/>
+            </a:p>
+          </p:txBody>
+        </p:sp>
+        <p:grpSp>
+          <p:nvGrpSpPr>
+            <p:cNvPr id="12" name="Group 12"/>
+            <p:cNvGrpSpPr/>
+            <p:nvPr/>
+          </p:nvGrpSpPr>
+          <p:grpSpPr>
+            <a:xfrm>
+              <a:off x="1438275" y="4110800"/>
+              <a:ext cx="457200" cy="457200"/>
+              <a:chOff x="0" y="0"/>
+              <a:chExt cx="609600" cy="609600"/>
+            </a:xfrm>
+          </p:grpSpPr>
+          <p:sp>
+            <p:nvSpPr>
+              <p:cNvPr id="13" name="Freeform 13"/>
+              <p:cNvSpPr/>
+              <p:nvPr/>
+            </p:nvSpPr>
+            <p:spPr>
+              <a:xfrm>
+                <a:off x="0" y="0"/>
+                <a:ext cx="609600" cy="609600"/>
+              </a:xfrm>
+              <a:custGeom>
+                <a:avLst/>
+                <a:gdLst/>
+                <a:ahLst/>
+                <a:cxnLst/>
+                <a:rect l="l" t="t" r="r" b="b"/>
+                <a:pathLst>
+                  <a:path w="609600" h="609600">
+                    <a:moveTo>
+                      <a:pt x="165100" y="0"/>
+                    </a:moveTo>
+                    <a:lnTo>
+                      <a:pt x="444500" y="0"/>
+                    </a:lnTo>
+                    <a:cubicBezTo>
+                      <a:pt x="535686" y="0"/>
+                      <a:pt x="609600" y="73914"/>
+                      <a:pt x="609600" y="165100"/>
+                    </a:cubicBezTo>
+                    <a:lnTo>
+                      <a:pt x="609600" y="444500"/>
+                    </a:lnTo>
+                    <a:cubicBezTo>
+                      <a:pt x="609600" y="535686"/>
+                      <a:pt x="535686" y="609600"/>
+                      <a:pt x="444500" y="609600"/>
+                    </a:cubicBezTo>
+                    <a:lnTo>
+                      <a:pt x="165100" y="609600"/>
+                    </a:lnTo>
+                    <a:cubicBezTo>
+                      <a:pt x="73914" y="609600"/>
+                      <a:pt x="0" y="535686"/>
+                      <a:pt x="0" y="444500"/>
+                    </a:cubicBezTo>
+                    <a:lnTo>
+                      <a:pt x="0" y="165100"/>
+                    </a:lnTo>
+                    <a:cubicBezTo>
+                      <a:pt x="0" y="73914"/>
+                      <a:pt x="73914" y="0"/>
+                      <a:pt x="165100" y="0"/>
+                    </a:cubicBezTo>
+                    <a:close/>
+                  </a:path>
+                </a:pathLst>
+              </a:custGeom>
+              <a:solidFill>
+                <a:srgbClr val="7C83FF">
+                  <a:alpha val="1569"/>
+                </a:srgbClr>
+              </a:solidFill>
+            </p:spPr>
+            <p:txBody>
+              <a:bodyPr/>
+              <a:lstStyle/>
+              <a:p>
+                <a:endParaRPr lang="ko-KR" altLang="en-US"/>
+              </a:p>
+            </p:txBody>
+          </p:sp>
+        </p:grpSp>
+        <p:sp>
+          <p:nvSpPr>
+            <p:cNvPr id="14" name="TextBox 14"/>
+            <p:cNvSpPr txBox="1"/>
+            <p:nvPr/>
+          </p:nvSpPr>
+          <p:spPr>
+            <a:xfrm>
+              <a:off x="2028824" y="4139374"/>
+              <a:ext cx="1142997" cy="323165"/>
+            </a:xfrm>
+            <a:prstGeom prst="rect">
+              <a:avLst/>
+            </a:prstGeom>
+          </p:spPr>
+          <p:txBody>
+            <a:bodyPr wrap="square" lIns="0" tIns="0" rIns="0" bIns="0" rtlCol="0" anchor="t">
+              <a:spAutoFit/>
+            </a:bodyPr>
+            <a:lstStyle/>
+            <a:p>
+              <a:pPr algn="l">
+                <a:lnSpc>
+                  <a:spcPts val="2729"/>
+                </a:lnSpc>
+              </a:pPr>
+              <a:r>
+                <a:rPr lang="en-US" sz="1950" b="1" spc="-29" dirty="0">
+                  <a:solidFill>
+                    <a:srgbClr val="EEF0FF"/>
+                  </a:solidFill>
+                  <a:latin typeface="IBM Plex Sans Bold"/>
+                  <a:ea typeface="IBM Plex Sans Bold"/>
+                  <a:cs typeface="IBM Plex Sans Bold"/>
+                  <a:sym typeface="IBM Plex Sans Bold"/>
+                </a:rPr>
+                <a:t>Pruning</a:t>
+              </a:r>
+            </a:p>
+          </p:txBody>
+        </p:sp>
+        <p:sp>
+          <p:nvSpPr>
+            <p:cNvPr id="15" name="TextBox 15"/>
+            <p:cNvSpPr txBox="1"/>
+            <p:nvPr/>
+          </p:nvSpPr>
+          <p:spPr>
+            <a:xfrm>
+              <a:off x="1438275" y="4615625"/>
+              <a:ext cx="2838450" cy="862013"/>
+            </a:xfrm>
+            <a:prstGeom prst="rect">
+              <a:avLst/>
+            </a:prstGeom>
+          </p:spPr>
+          <p:txBody>
+            <a:bodyPr lIns="0" tIns="0" rIns="0" bIns="0" rtlCol="0" anchor="t">
+              <a:spAutoFit/>
+            </a:bodyPr>
+            <a:lstStyle/>
+            <a:p>
+              <a:pPr algn="l">
+                <a:lnSpc>
+                  <a:spcPts val="2137"/>
+                </a:lnSpc>
+              </a:pPr>
+              <a:r>
+                <a:rPr lang="en-US" sz="1425">
+                  <a:solidFill>
+                    <a:srgbClr val="A6ABCE"/>
+                  </a:solidFill>
+                  <a:latin typeface="IBM Plex Sans"/>
+                  <a:ea typeface="IBM Plex Sans"/>
+                  <a:cs typeface="IBM Plex Sans"/>
+                  <a:sym typeface="IBM Plex Sans"/>
+                </a:rPr>
+                <a:t>Remove low-importance weights / channels to cut compute with minimal accuracy loss.</a:t>
+              </a:r>
+            </a:p>
+          </p:txBody>
+        </p:sp>
+        <p:sp>
+          <p:nvSpPr>
+            <p:cNvPr id="69" name="Freeform 69"/>
+            <p:cNvSpPr/>
+            <p:nvPr/>
+          </p:nvSpPr>
+          <p:spPr>
+            <a:xfrm>
+              <a:off x="1543050" y="4215574"/>
+              <a:ext cx="247650" cy="247650"/>
+            </a:xfrm>
+            <a:custGeom>
+              <a:avLst/>
+              <a:gdLst/>
+              <a:ahLst/>
+              <a:cxnLst/>
+              <a:rect l="l" t="t" r="r" b="b"/>
+              <a:pathLst>
+                <a:path w="247650" h="247650">
+                  <a:moveTo>
+                    <a:pt x="0" y="0"/>
+                  </a:moveTo>
+                  <a:lnTo>
+                    <a:pt x="247650" y="0"/>
+                  </a:lnTo>
+                  <a:lnTo>
+                    <a:pt x="247650" y="247650"/>
+                  </a:lnTo>
+                  <a:lnTo>
+                    <a:pt x="0" y="247650"/>
+                  </a:lnTo>
+                  <a:lnTo>
+                    <a:pt x="0" y="0"/>
+                  </a:lnTo>
+                  <a:close/>
+                </a:path>
+              </a:pathLst>
+            </a:custGeom>
+            <a:blipFill>
+              <a:blip r:embed="rId3">
+                <a:extLst>
+                  <a:ext uri="{96DAC541-7B7A-43D3-8B79-37D633B846F1}">
+                    <asvg:svgBlip xmlns:asvg="http://schemas.microsoft.com/office/drawing/2016/SVG/main" r:embed="rId4"/>
+                  </a:ext>
+                </a:extLst>
+              </a:blip>
+              <a:stretch>
+                <a:fillRect/>
+              </a:stretch>
+            </a:blipFill>
+          </p:spPr>
+          <p:txBody>
+            <a:bodyPr/>
+            <a:lstStyle/>
+            <a:p>
+              <a:endParaRPr lang="ko-KR" altLang="en-US"/>
+            </a:p>
+          </p:txBody>
+        </p:sp>
       </p:grpSp>
-      <p:sp>
-        <p:nvSpPr>
-          <p:cNvPr id="28" name="AutoShape 28"/>
-          <p:cNvSpPr/>
-          <p:nvPr/>
-        </p:nvSpPr>
-        <p:spPr>
-          <a:xfrm>
-            <a:off x="5029200" y="3608356"/>
-            <a:ext cx="12115800" cy="9525"/>
-          </a:xfrm>
-          <a:prstGeom prst="rect">
-            <a:avLst/>
-          </a:prstGeom>
-          <a:solidFill>
-            <a:srgbClr val="FFFFFF">
-              <a:alpha val="7843"/>
-            </a:srgbClr>
-          </a:solidFill>
-        </p:spPr>
-        <p:txBody>
-          <a:bodyPr/>
-          <a:lstStyle/>
-          <a:p>
-            <a:endParaRPr lang="ko-KR" altLang="en-US"/>
-          </a:p>
-        </p:txBody>
-      </p:sp>
-      <p:sp>
-        <p:nvSpPr>
-          <p:cNvPr id="29" name="AutoShape 29"/>
-          <p:cNvSpPr/>
-          <p:nvPr/>
-        </p:nvSpPr>
-        <p:spPr>
-          <a:xfrm>
-            <a:off x="17135475" y="3617881"/>
-            <a:ext cx="9525" cy="4481512"/>
-          </a:xfrm>
-          <a:prstGeom prst="rect">
-            <a:avLst/>
-          </a:prstGeom>
-          <a:solidFill>
-            <a:srgbClr val="FFFFFF">
-              <a:alpha val="7843"/>
-            </a:srgbClr>
-          </a:solidFill>
-        </p:spPr>
-        <p:txBody>
-          <a:bodyPr/>
-          <a:lstStyle/>
-          <a:p>
-            <a:endParaRPr lang="ko-KR" altLang="en-US"/>
-          </a:p>
-        </p:txBody>
-      </p:sp>
-      <p:sp>
-        <p:nvSpPr>
-          <p:cNvPr id="30" name="AutoShape 30"/>
-          <p:cNvSpPr/>
-          <p:nvPr/>
-        </p:nvSpPr>
-        <p:spPr>
-          <a:xfrm>
-            <a:off x="5029200" y="8099393"/>
-            <a:ext cx="12115800" cy="9525"/>
-          </a:xfrm>
-          <a:prstGeom prst="rect">
-            <a:avLst/>
-          </a:prstGeom>
-          <a:solidFill>
-            <a:srgbClr val="FFFFFF">
-              <a:alpha val="7843"/>
-            </a:srgbClr>
-          </a:solidFill>
-        </p:spPr>
-        <p:txBody>
-          <a:bodyPr/>
-          <a:lstStyle/>
-          <a:p>
-            <a:endParaRPr lang="ko-KR" altLang="en-US"/>
-          </a:p>
-        </p:txBody>
-      </p:sp>
-      <p:sp>
-        <p:nvSpPr>
-          <p:cNvPr id="31" name="AutoShape 31"/>
-          <p:cNvSpPr/>
-          <p:nvPr/>
-        </p:nvSpPr>
-        <p:spPr>
-          <a:xfrm>
-            <a:off x="5029200" y="3617881"/>
-            <a:ext cx="9525" cy="4481512"/>
-          </a:xfrm>
-          <a:prstGeom prst="rect">
-            <a:avLst/>
-          </a:prstGeom>
-          <a:solidFill>
-            <a:srgbClr val="FFFFFF">
-              <a:alpha val="7843"/>
-            </a:srgbClr>
-          </a:solidFill>
-        </p:spPr>
-        <p:txBody>
-          <a:bodyPr/>
-          <a:lstStyle/>
-          <a:p>
-            <a:endParaRPr lang="ko-KR" altLang="en-US"/>
-          </a:p>
-        </p:txBody>
-      </p:sp>
-      <p:sp>
-        <p:nvSpPr>
-          <p:cNvPr id="32" name="TextBox 32"/>
-          <p:cNvSpPr txBox="1"/>
-          <p:nvPr/>
-        </p:nvSpPr>
-        <p:spPr>
-          <a:xfrm>
-            <a:off x="5457825" y="3970306"/>
-            <a:ext cx="3827907" cy="500063"/>
-          </a:xfrm>
-          <a:prstGeom prst="rect">
-            <a:avLst/>
-          </a:prstGeom>
-        </p:spPr>
-        <p:txBody>
-          <a:bodyPr lIns="0" tIns="0" rIns="0" bIns="0" rtlCol="0" anchor="t">
-            <a:spAutoFit/>
-          </a:bodyPr>
-          <a:lstStyle/>
-          <a:p>
-            <a:pPr algn="l">
-              <a:lnSpc>
-                <a:spcPts val="1889"/>
-              </a:lnSpc>
-            </a:pPr>
-            <a:r>
-              <a:rPr lang="en-US" sz="1350" b="1" spc="75">
-                <a:solidFill>
-                  <a:srgbClr val="6B7099"/>
-                </a:solidFill>
-                <a:latin typeface="IBM Plex Mono Medium"/>
-                <a:ea typeface="IBM Plex Mono Medium"/>
-                <a:cs typeface="IBM Plex Mono Medium"/>
-                <a:sym typeface="IBM Plex Mono Medium"/>
-              </a:rPr>
-              <a:t>METRIC</a:t>
-            </a:r>
-          </a:p>
-        </p:txBody>
-      </p:sp>
-      <p:sp>
-        <p:nvSpPr>
-          <p:cNvPr id="33" name="TextBox 33"/>
-          <p:cNvSpPr txBox="1"/>
-          <p:nvPr/>
-        </p:nvSpPr>
-        <p:spPr>
-          <a:xfrm>
-            <a:off x="9285732" y="3970306"/>
-            <a:ext cx="2701957" cy="500063"/>
-          </a:xfrm>
-          <a:prstGeom prst="rect">
-            <a:avLst/>
-          </a:prstGeom>
-        </p:spPr>
-        <p:txBody>
-          <a:bodyPr lIns="0" tIns="0" rIns="0" bIns="0" rtlCol="0" anchor="t">
-            <a:spAutoFit/>
-          </a:bodyPr>
-          <a:lstStyle/>
-          <a:p>
-            <a:pPr algn="l">
-              <a:lnSpc>
-                <a:spcPts val="1889"/>
-              </a:lnSpc>
-            </a:pPr>
-            <a:r>
-              <a:rPr lang="en-US" sz="1350" b="1" spc="75">
-                <a:solidFill>
-                  <a:srgbClr val="6B7099"/>
-                </a:solidFill>
-                <a:latin typeface="IBM Plex Mono Medium"/>
-                <a:ea typeface="IBM Plex Mono Medium"/>
-                <a:cs typeface="IBM Plex Mono Medium"/>
-                <a:sym typeface="IBM Plex Mono Medium"/>
-              </a:rPr>
-              <a:t>BEFORE</a:t>
-            </a:r>
-          </a:p>
-        </p:txBody>
-      </p:sp>
-      <p:sp>
-        <p:nvSpPr>
-          <p:cNvPr id="34" name="TextBox 34"/>
-          <p:cNvSpPr txBox="1"/>
-          <p:nvPr/>
-        </p:nvSpPr>
-        <p:spPr>
-          <a:xfrm>
-            <a:off x="11987689" y="3970306"/>
-            <a:ext cx="2701957" cy="500063"/>
-          </a:xfrm>
-          <a:prstGeom prst="rect">
-            <a:avLst/>
-          </a:prstGeom>
-        </p:spPr>
-        <p:txBody>
-          <a:bodyPr lIns="0" tIns="0" rIns="0" bIns="0" rtlCol="0" anchor="t">
-            <a:spAutoFit/>
-          </a:bodyPr>
-          <a:lstStyle/>
-          <a:p>
-            <a:pPr algn="l">
-              <a:lnSpc>
-                <a:spcPts val="1889"/>
-              </a:lnSpc>
-            </a:pPr>
-            <a:r>
-              <a:rPr lang="en-US" sz="1350" b="1" spc="75">
-                <a:solidFill>
-                  <a:srgbClr val="6B7099"/>
-                </a:solidFill>
-                <a:latin typeface="IBM Plex Mono Medium"/>
-                <a:ea typeface="IBM Plex Mono Medium"/>
-                <a:cs typeface="IBM Plex Mono Medium"/>
-                <a:sym typeface="IBM Plex Mono Medium"/>
-              </a:rPr>
-              <a:t>AFTER</a:t>
-            </a:r>
-          </a:p>
-        </p:txBody>
-      </p:sp>
-      <p:sp>
-        <p:nvSpPr>
-          <p:cNvPr id="35" name="TextBox 35"/>
-          <p:cNvSpPr txBox="1"/>
-          <p:nvPr/>
-        </p:nvSpPr>
-        <p:spPr>
-          <a:xfrm>
-            <a:off x="14689646" y="3970306"/>
-            <a:ext cx="2026730" cy="500063"/>
-          </a:xfrm>
-          <a:prstGeom prst="rect">
-            <a:avLst/>
-          </a:prstGeom>
-        </p:spPr>
-        <p:txBody>
-          <a:bodyPr lIns="0" tIns="0" rIns="0" bIns="0" rtlCol="0" anchor="t">
-            <a:spAutoFit/>
-          </a:bodyPr>
-          <a:lstStyle/>
-          <a:p>
-            <a:pPr algn="l">
-              <a:lnSpc>
-                <a:spcPts val="1889"/>
-              </a:lnSpc>
-            </a:pPr>
-            <a:r>
-              <a:rPr lang="en-US" sz="1350" b="1" spc="75">
-                <a:solidFill>
-                  <a:srgbClr val="6B7099"/>
-                </a:solidFill>
-                <a:latin typeface="IBM Plex Mono Medium"/>
-                <a:ea typeface="IBM Plex Mono Medium"/>
-                <a:cs typeface="IBM Plex Mono Medium"/>
-                <a:sym typeface="IBM Plex Mono Medium"/>
-              </a:rPr>
-              <a:t>Δ</a:t>
-            </a:r>
-          </a:p>
-        </p:txBody>
-      </p:sp>
-      <p:sp>
-        <p:nvSpPr>
-          <p:cNvPr id="36" name="AutoShape 36"/>
-          <p:cNvSpPr/>
-          <p:nvPr/>
-        </p:nvSpPr>
-        <p:spPr>
-          <a:xfrm>
-            <a:off x="5457825" y="4470368"/>
-            <a:ext cx="3827907" cy="9525"/>
-          </a:xfrm>
-          <a:prstGeom prst="rect">
-            <a:avLst/>
-          </a:prstGeom>
-          <a:solidFill>
-            <a:srgbClr val="FFFFFF">
-              <a:alpha val="7843"/>
-            </a:srgbClr>
-          </a:solidFill>
-        </p:spPr>
-        <p:txBody>
-          <a:bodyPr/>
-          <a:lstStyle/>
-          <a:p>
-            <a:endParaRPr lang="ko-KR" altLang="en-US"/>
-          </a:p>
-        </p:txBody>
-      </p:sp>
-      <p:sp>
-        <p:nvSpPr>
-          <p:cNvPr id="37" name="TextBox 37"/>
-          <p:cNvSpPr txBox="1"/>
-          <p:nvPr/>
-        </p:nvSpPr>
-        <p:spPr>
-          <a:xfrm>
-            <a:off x="5457825" y="4432268"/>
-            <a:ext cx="3827907" cy="733425"/>
-          </a:xfrm>
-          <a:prstGeom prst="rect">
-            <a:avLst/>
-          </a:prstGeom>
-        </p:spPr>
-        <p:txBody>
-          <a:bodyPr lIns="0" tIns="0" rIns="0" bIns="0" rtlCol="0" anchor="t">
-            <a:spAutoFit/>
-          </a:bodyPr>
-          <a:lstStyle/>
-          <a:p>
-            <a:pPr algn="l">
-              <a:lnSpc>
-                <a:spcPts val="2520"/>
-              </a:lnSpc>
-            </a:pPr>
-            <a:r>
-              <a:rPr lang="en-US" sz="1800">
-                <a:solidFill>
-                  <a:srgbClr val="A6ABCE"/>
-                </a:solidFill>
-                <a:latin typeface="IBM Plex Sans"/>
-                <a:ea typeface="IBM Plex Sans"/>
-                <a:cs typeface="IBM Plex Sans"/>
-                <a:sym typeface="IBM Plex Sans"/>
-              </a:rPr>
-              <a:t>Model size</a:t>
-            </a:r>
-          </a:p>
-        </p:txBody>
-      </p:sp>
-      <p:sp>
-        <p:nvSpPr>
-          <p:cNvPr id="38" name="AutoShape 38"/>
-          <p:cNvSpPr/>
-          <p:nvPr/>
-        </p:nvSpPr>
-        <p:spPr>
-          <a:xfrm>
-            <a:off x="9285732" y="4470368"/>
-            <a:ext cx="2701957" cy="9525"/>
-          </a:xfrm>
-          <a:prstGeom prst="rect">
-            <a:avLst/>
-          </a:prstGeom>
-          <a:solidFill>
-            <a:srgbClr val="FFFFFF">
-              <a:alpha val="7843"/>
-            </a:srgbClr>
-          </a:solidFill>
-        </p:spPr>
-        <p:txBody>
-          <a:bodyPr/>
-          <a:lstStyle/>
-          <a:p>
-            <a:endParaRPr lang="ko-KR" altLang="en-US"/>
-          </a:p>
-        </p:txBody>
-      </p:sp>
-      <p:sp>
-        <p:nvSpPr>
-          <p:cNvPr id="39" name="TextBox 39"/>
-          <p:cNvSpPr txBox="1"/>
-          <p:nvPr/>
-        </p:nvSpPr>
-        <p:spPr>
-          <a:xfrm>
-            <a:off x="9285732" y="4432268"/>
-            <a:ext cx="2701957" cy="733425"/>
-          </a:xfrm>
-          <a:prstGeom prst="rect">
-            <a:avLst/>
-          </a:prstGeom>
-        </p:spPr>
-        <p:txBody>
-          <a:bodyPr lIns="0" tIns="0" rIns="0" bIns="0" rtlCol="0" anchor="t">
-            <a:spAutoFit/>
-          </a:bodyPr>
-          <a:lstStyle/>
-          <a:p>
-            <a:pPr algn="l">
-              <a:lnSpc>
-                <a:spcPts val="2520"/>
-              </a:lnSpc>
-            </a:pPr>
-            <a:r>
-              <a:rPr lang="en-US" sz="1800">
-                <a:solidFill>
-                  <a:srgbClr val="A6ABCE"/>
-                </a:solidFill>
-                <a:latin typeface="IBM Plex Mono"/>
-                <a:ea typeface="IBM Plex Mono"/>
-                <a:cs typeface="IBM Plex Mono"/>
-                <a:sym typeface="IBM Plex Mono"/>
-              </a:rPr>
-              <a:t>XX MB</a:t>
-            </a:r>
-          </a:p>
-        </p:txBody>
-      </p:sp>
-      <p:sp>
-        <p:nvSpPr>
-          <p:cNvPr id="40" name="AutoShape 40"/>
-          <p:cNvSpPr/>
-          <p:nvPr/>
-        </p:nvSpPr>
-        <p:spPr>
-          <a:xfrm>
-            <a:off x="11987689" y="4470368"/>
-            <a:ext cx="2701957" cy="9525"/>
-          </a:xfrm>
-          <a:prstGeom prst="rect">
-            <a:avLst/>
-          </a:prstGeom>
-          <a:solidFill>
-            <a:srgbClr val="FFFFFF">
-              <a:alpha val="7843"/>
-            </a:srgbClr>
-          </a:solidFill>
-        </p:spPr>
-        <p:txBody>
-          <a:bodyPr/>
-          <a:lstStyle/>
-          <a:p>
-            <a:endParaRPr lang="ko-KR" altLang="en-US"/>
-          </a:p>
-        </p:txBody>
-      </p:sp>
-      <p:sp>
-        <p:nvSpPr>
-          <p:cNvPr id="41" name="TextBox 41"/>
-          <p:cNvSpPr txBox="1"/>
-          <p:nvPr/>
-        </p:nvSpPr>
-        <p:spPr>
-          <a:xfrm>
-            <a:off x="11987689" y="4432268"/>
-            <a:ext cx="2701957" cy="733425"/>
-          </a:xfrm>
-          <a:prstGeom prst="rect">
-            <a:avLst/>
-          </a:prstGeom>
-        </p:spPr>
-        <p:txBody>
-          <a:bodyPr lIns="0" tIns="0" rIns="0" bIns="0" rtlCol="0" anchor="t">
-            <a:spAutoFit/>
-          </a:bodyPr>
-          <a:lstStyle/>
-          <a:p>
-            <a:pPr algn="l">
-              <a:lnSpc>
-                <a:spcPts val="2520"/>
-              </a:lnSpc>
-            </a:pPr>
-            <a:r>
-              <a:rPr lang="en-US" sz="1800" b="1">
-                <a:solidFill>
-                  <a:srgbClr val="34D39E"/>
-                </a:solidFill>
-                <a:latin typeface="IBM Plex Mono Medium"/>
-                <a:ea typeface="IBM Plex Mono Medium"/>
-                <a:cs typeface="IBM Plex Mono Medium"/>
-                <a:sym typeface="IBM Plex Mono Medium"/>
-              </a:rPr>
-              <a:t>XX MB</a:t>
-            </a:r>
-          </a:p>
-        </p:txBody>
-      </p:sp>
-      <p:sp>
-        <p:nvSpPr>
-          <p:cNvPr id="42" name="AutoShape 42"/>
-          <p:cNvSpPr/>
-          <p:nvPr/>
-        </p:nvSpPr>
-        <p:spPr>
-          <a:xfrm>
-            <a:off x="14689646" y="4470368"/>
-            <a:ext cx="2026730" cy="9525"/>
-          </a:xfrm>
-          <a:prstGeom prst="rect">
-            <a:avLst/>
-          </a:prstGeom>
-          <a:solidFill>
-            <a:srgbClr val="FFFFFF">
-              <a:alpha val="7843"/>
-            </a:srgbClr>
-          </a:solidFill>
-        </p:spPr>
-        <p:txBody>
-          <a:bodyPr/>
-          <a:lstStyle/>
-          <a:p>
-            <a:endParaRPr lang="ko-KR" altLang="en-US"/>
-          </a:p>
-        </p:txBody>
-      </p:sp>
-      <p:sp>
-        <p:nvSpPr>
-          <p:cNvPr id="43" name="TextBox 43"/>
-          <p:cNvSpPr txBox="1"/>
-          <p:nvPr/>
-        </p:nvSpPr>
-        <p:spPr>
-          <a:xfrm>
-            <a:off x="14689646" y="4441793"/>
-            <a:ext cx="2026730" cy="723900"/>
-          </a:xfrm>
-          <a:prstGeom prst="rect">
-            <a:avLst/>
-          </a:prstGeom>
-        </p:spPr>
-        <p:txBody>
-          <a:bodyPr lIns="0" tIns="0" rIns="0" bIns="0" rtlCol="0" anchor="t">
-            <a:spAutoFit/>
-          </a:bodyPr>
-          <a:lstStyle/>
-          <a:p>
-            <a:pPr algn="l">
-              <a:lnSpc>
-                <a:spcPts val="1995"/>
-              </a:lnSpc>
-            </a:pPr>
-            <a:r>
-              <a:rPr lang="en-US" sz="1425">
-                <a:solidFill>
-                  <a:srgbClr val="9AA0FF"/>
-                </a:solidFill>
-                <a:latin typeface="IBM Plex Mono"/>
-                <a:ea typeface="IBM Plex Mono"/>
-                <a:cs typeface="IBM Plex Mono"/>
-                <a:sym typeface="IBM Plex Mono"/>
-              </a:rPr>
-              <a:t>↓ —%</a:t>
-            </a:r>
-          </a:p>
-        </p:txBody>
-      </p:sp>
-      <p:sp>
-        <p:nvSpPr>
-          <p:cNvPr id="44" name="AutoShape 44"/>
-          <p:cNvSpPr/>
-          <p:nvPr/>
-        </p:nvSpPr>
-        <p:spPr>
-          <a:xfrm>
-            <a:off x="5457825" y="5165693"/>
-            <a:ext cx="3827907" cy="9525"/>
-          </a:xfrm>
-          <a:prstGeom prst="rect">
-            <a:avLst/>
-          </a:prstGeom>
-          <a:solidFill>
-            <a:srgbClr val="FFFFFF">
-              <a:alpha val="7843"/>
-            </a:srgbClr>
-          </a:solidFill>
-        </p:spPr>
-        <p:txBody>
-          <a:bodyPr/>
-          <a:lstStyle/>
-          <a:p>
-            <a:endParaRPr lang="ko-KR" altLang="en-US"/>
-          </a:p>
-        </p:txBody>
-      </p:sp>
-      <p:sp>
-        <p:nvSpPr>
-          <p:cNvPr id="45" name="TextBox 45"/>
-          <p:cNvSpPr txBox="1"/>
-          <p:nvPr/>
-        </p:nvSpPr>
-        <p:spPr>
-          <a:xfrm>
-            <a:off x="5457825" y="5127593"/>
-            <a:ext cx="3827907" cy="733425"/>
-          </a:xfrm>
-          <a:prstGeom prst="rect">
-            <a:avLst/>
-          </a:prstGeom>
-        </p:spPr>
-        <p:txBody>
-          <a:bodyPr lIns="0" tIns="0" rIns="0" bIns="0" rtlCol="0" anchor="t">
-            <a:spAutoFit/>
-          </a:bodyPr>
-          <a:lstStyle/>
-          <a:p>
-            <a:pPr algn="l">
-              <a:lnSpc>
-                <a:spcPts val="2520"/>
-              </a:lnSpc>
-            </a:pPr>
-            <a:r>
-              <a:rPr lang="en-US" sz="1800">
-                <a:solidFill>
-                  <a:srgbClr val="A6ABCE"/>
-                </a:solidFill>
-                <a:latin typeface="IBM Plex Sans"/>
-                <a:ea typeface="IBM Plex Sans"/>
-                <a:cs typeface="IBM Plex Sans"/>
-                <a:sym typeface="IBM Plex Sans"/>
-              </a:rPr>
-              <a:t>Latency / window</a:t>
-            </a:r>
-          </a:p>
-        </p:txBody>
-      </p:sp>
-      <p:sp>
-        <p:nvSpPr>
-          <p:cNvPr id="46" name="AutoShape 46"/>
-          <p:cNvSpPr/>
-          <p:nvPr/>
-        </p:nvSpPr>
-        <p:spPr>
-          <a:xfrm>
-            <a:off x="9285732" y="5165693"/>
-            <a:ext cx="2701957" cy="9525"/>
-          </a:xfrm>
-          <a:prstGeom prst="rect">
-            <a:avLst/>
-          </a:prstGeom>
-          <a:solidFill>
-            <a:srgbClr val="FFFFFF">
-              <a:alpha val="7843"/>
-            </a:srgbClr>
-          </a:solidFill>
-        </p:spPr>
-        <p:txBody>
-          <a:bodyPr/>
-          <a:lstStyle/>
-          <a:p>
-            <a:endParaRPr lang="ko-KR" altLang="en-US"/>
-          </a:p>
-        </p:txBody>
-      </p:sp>
-      <p:sp>
-        <p:nvSpPr>
-          <p:cNvPr id="47" name="TextBox 47"/>
-          <p:cNvSpPr txBox="1"/>
-          <p:nvPr/>
-        </p:nvSpPr>
-        <p:spPr>
-          <a:xfrm>
-            <a:off x="9285732" y="5127593"/>
-            <a:ext cx="2701957" cy="733425"/>
-          </a:xfrm>
-          <a:prstGeom prst="rect">
-            <a:avLst/>
-          </a:prstGeom>
-        </p:spPr>
-        <p:txBody>
-          <a:bodyPr lIns="0" tIns="0" rIns="0" bIns="0" rtlCol="0" anchor="t">
-            <a:spAutoFit/>
-          </a:bodyPr>
-          <a:lstStyle/>
-          <a:p>
-            <a:pPr algn="l">
-              <a:lnSpc>
-                <a:spcPts val="2520"/>
-              </a:lnSpc>
-            </a:pPr>
-            <a:r>
-              <a:rPr lang="en-US" sz="1800">
-                <a:solidFill>
-                  <a:srgbClr val="A6ABCE"/>
-                </a:solidFill>
-                <a:latin typeface="IBM Plex Mono"/>
-                <a:ea typeface="IBM Plex Mono"/>
-                <a:cs typeface="IBM Plex Mono"/>
-                <a:sym typeface="IBM Plex Mono"/>
-              </a:rPr>
-              <a:t>XX ms</a:t>
-            </a:r>
-          </a:p>
-        </p:txBody>
-      </p:sp>
-      <p:sp>
-        <p:nvSpPr>
-          <p:cNvPr id="48" name="AutoShape 48"/>
-          <p:cNvSpPr/>
-          <p:nvPr/>
-        </p:nvSpPr>
-        <p:spPr>
-          <a:xfrm>
-            <a:off x="11987689" y="5165693"/>
-            <a:ext cx="2701957" cy="9525"/>
-          </a:xfrm>
-          <a:prstGeom prst="rect">
-            <a:avLst/>
-          </a:prstGeom>
-          <a:solidFill>
-            <a:srgbClr val="FFFFFF">
-              <a:alpha val="7843"/>
-            </a:srgbClr>
-          </a:solidFill>
-        </p:spPr>
-        <p:txBody>
-          <a:bodyPr/>
-          <a:lstStyle/>
-          <a:p>
-            <a:endParaRPr lang="ko-KR" altLang="en-US"/>
-          </a:p>
-        </p:txBody>
-      </p:sp>
-      <p:sp>
-        <p:nvSpPr>
-          <p:cNvPr id="49" name="TextBox 49"/>
-          <p:cNvSpPr txBox="1"/>
-          <p:nvPr/>
-        </p:nvSpPr>
-        <p:spPr>
-          <a:xfrm>
-            <a:off x="11987689" y="5127593"/>
-            <a:ext cx="2701957" cy="733425"/>
-          </a:xfrm>
-          <a:prstGeom prst="rect">
-            <a:avLst/>
-          </a:prstGeom>
-        </p:spPr>
-        <p:txBody>
-          <a:bodyPr lIns="0" tIns="0" rIns="0" bIns="0" rtlCol="0" anchor="t">
-            <a:spAutoFit/>
-          </a:bodyPr>
-          <a:lstStyle/>
-          <a:p>
-            <a:pPr algn="l">
-              <a:lnSpc>
-                <a:spcPts val="2520"/>
-              </a:lnSpc>
-            </a:pPr>
-            <a:r>
-              <a:rPr lang="en-US" sz="1800" b="1">
-                <a:solidFill>
-                  <a:srgbClr val="34D39E"/>
-                </a:solidFill>
-                <a:latin typeface="IBM Plex Mono Medium"/>
-                <a:ea typeface="IBM Plex Mono Medium"/>
-                <a:cs typeface="IBM Plex Mono Medium"/>
-                <a:sym typeface="IBM Plex Mono Medium"/>
-              </a:rPr>
-              <a:t>XX ms</a:t>
-            </a:r>
-          </a:p>
-        </p:txBody>
-      </p:sp>
-      <p:sp>
-        <p:nvSpPr>
-          <p:cNvPr id="50" name="AutoShape 50"/>
-          <p:cNvSpPr/>
-          <p:nvPr/>
-        </p:nvSpPr>
-        <p:spPr>
-          <a:xfrm>
-            <a:off x="14689646" y="5165693"/>
-            <a:ext cx="2026730" cy="9525"/>
-          </a:xfrm>
-          <a:prstGeom prst="rect">
-            <a:avLst/>
-          </a:prstGeom>
-          <a:solidFill>
-            <a:srgbClr val="FFFFFF">
-              <a:alpha val="7843"/>
-            </a:srgbClr>
-          </a:solidFill>
-        </p:spPr>
-        <p:txBody>
-          <a:bodyPr/>
-          <a:lstStyle/>
-          <a:p>
-            <a:endParaRPr lang="ko-KR" altLang="en-US"/>
-          </a:p>
-        </p:txBody>
-      </p:sp>
-      <p:sp>
-        <p:nvSpPr>
-          <p:cNvPr id="51" name="TextBox 51"/>
-          <p:cNvSpPr txBox="1"/>
-          <p:nvPr/>
-        </p:nvSpPr>
-        <p:spPr>
-          <a:xfrm>
-            <a:off x="14689646" y="5137118"/>
-            <a:ext cx="2026730" cy="723900"/>
-          </a:xfrm>
-          <a:prstGeom prst="rect">
-            <a:avLst/>
-          </a:prstGeom>
-        </p:spPr>
-        <p:txBody>
-          <a:bodyPr lIns="0" tIns="0" rIns="0" bIns="0" rtlCol="0" anchor="t">
-            <a:spAutoFit/>
-          </a:bodyPr>
-          <a:lstStyle/>
-          <a:p>
-            <a:pPr algn="l">
-              <a:lnSpc>
-                <a:spcPts val="1995"/>
-              </a:lnSpc>
-            </a:pPr>
-            <a:r>
-              <a:rPr lang="en-US" sz="1425">
-                <a:solidFill>
-                  <a:srgbClr val="9AA0FF"/>
-                </a:solidFill>
-                <a:latin typeface="IBM Plex Mono"/>
-                <a:ea typeface="IBM Plex Mono"/>
-                <a:cs typeface="IBM Plex Mono"/>
-                <a:sym typeface="IBM Plex Mono"/>
-              </a:rPr>
-              <a:t>↓ —%</a:t>
-            </a:r>
-          </a:p>
-        </p:txBody>
-      </p:sp>
-      <p:sp>
-        <p:nvSpPr>
-          <p:cNvPr id="52" name="AutoShape 52"/>
-          <p:cNvSpPr/>
-          <p:nvPr/>
-        </p:nvSpPr>
-        <p:spPr>
-          <a:xfrm>
-            <a:off x="5457825" y="5861018"/>
-            <a:ext cx="3827907" cy="9525"/>
-          </a:xfrm>
-          <a:prstGeom prst="rect">
-            <a:avLst/>
-          </a:prstGeom>
-          <a:solidFill>
-            <a:srgbClr val="FFFFFF">
-              <a:alpha val="7843"/>
-            </a:srgbClr>
-          </a:solidFill>
-        </p:spPr>
-        <p:txBody>
-          <a:bodyPr/>
-          <a:lstStyle/>
-          <a:p>
-            <a:endParaRPr lang="ko-KR" altLang="en-US"/>
-          </a:p>
-        </p:txBody>
-      </p:sp>
-      <p:sp>
-        <p:nvSpPr>
-          <p:cNvPr id="53" name="TextBox 53"/>
-          <p:cNvSpPr txBox="1"/>
-          <p:nvPr/>
-        </p:nvSpPr>
-        <p:spPr>
-          <a:xfrm>
-            <a:off x="5457825" y="5822918"/>
-            <a:ext cx="3827907" cy="733425"/>
-          </a:xfrm>
-          <a:prstGeom prst="rect">
-            <a:avLst/>
-          </a:prstGeom>
-        </p:spPr>
-        <p:txBody>
-          <a:bodyPr lIns="0" tIns="0" rIns="0" bIns="0" rtlCol="0" anchor="t">
-            <a:spAutoFit/>
-          </a:bodyPr>
-          <a:lstStyle/>
-          <a:p>
-            <a:pPr algn="l">
-              <a:lnSpc>
-                <a:spcPts val="2520"/>
-              </a:lnSpc>
-            </a:pPr>
-            <a:r>
-              <a:rPr lang="en-US" sz="1800">
-                <a:solidFill>
-                  <a:srgbClr val="A6ABCE"/>
-                </a:solidFill>
-                <a:latin typeface="IBM Plex Sans"/>
-                <a:ea typeface="IBM Plex Sans"/>
-                <a:cs typeface="IBM Plex Sans"/>
-                <a:sym typeface="IBM Plex Sans"/>
-              </a:rPr>
-              <a:t>Peak memory</a:t>
-            </a:r>
-          </a:p>
-        </p:txBody>
-      </p:sp>
-      <p:sp>
-        <p:nvSpPr>
-          <p:cNvPr id="54" name="AutoShape 54"/>
-          <p:cNvSpPr/>
-          <p:nvPr/>
-        </p:nvSpPr>
-        <p:spPr>
-          <a:xfrm>
-            <a:off x="9285732" y="5861018"/>
-            <a:ext cx="2701957" cy="9525"/>
-          </a:xfrm>
-          <a:prstGeom prst="rect">
-            <a:avLst/>
-          </a:prstGeom>
-          <a:solidFill>
-            <a:srgbClr val="FFFFFF">
-              <a:alpha val="7843"/>
-            </a:srgbClr>
-          </a:solidFill>
-        </p:spPr>
-        <p:txBody>
-          <a:bodyPr/>
-          <a:lstStyle/>
-          <a:p>
-            <a:endParaRPr lang="ko-KR" altLang="en-US"/>
-          </a:p>
-        </p:txBody>
-      </p:sp>
-      <p:sp>
-        <p:nvSpPr>
-          <p:cNvPr id="55" name="TextBox 55"/>
-          <p:cNvSpPr txBox="1"/>
-          <p:nvPr/>
-        </p:nvSpPr>
-        <p:spPr>
-          <a:xfrm>
-            <a:off x="9285732" y="5822918"/>
-            <a:ext cx="2701957" cy="733425"/>
-          </a:xfrm>
-          <a:prstGeom prst="rect">
-            <a:avLst/>
-          </a:prstGeom>
-        </p:spPr>
-        <p:txBody>
-          <a:bodyPr lIns="0" tIns="0" rIns="0" bIns="0" rtlCol="0" anchor="t">
-            <a:spAutoFit/>
-          </a:bodyPr>
-          <a:lstStyle/>
-          <a:p>
-            <a:pPr algn="l">
-              <a:lnSpc>
-                <a:spcPts val="2520"/>
-              </a:lnSpc>
-            </a:pPr>
-            <a:r>
-              <a:rPr lang="en-US" sz="1800">
-                <a:solidFill>
-                  <a:srgbClr val="A6ABCE"/>
-                </a:solidFill>
-                <a:latin typeface="IBM Plex Mono"/>
-                <a:ea typeface="IBM Plex Mono"/>
-                <a:cs typeface="IBM Plex Mono"/>
-                <a:sym typeface="IBM Plex Mono"/>
-              </a:rPr>
-              <a:t>XX MB</a:t>
-            </a:r>
-          </a:p>
-        </p:txBody>
-      </p:sp>
-      <p:sp>
-        <p:nvSpPr>
-          <p:cNvPr id="56" name="AutoShape 56"/>
-          <p:cNvSpPr/>
-          <p:nvPr/>
-        </p:nvSpPr>
-        <p:spPr>
-          <a:xfrm>
-            <a:off x="11987689" y="5861018"/>
-            <a:ext cx="2701957" cy="9525"/>
-          </a:xfrm>
-          <a:prstGeom prst="rect">
-            <a:avLst/>
-          </a:prstGeom>
-          <a:solidFill>
-            <a:srgbClr val="FFFFFF">
-              <a:alpha val="7843"/>
-            </a:srgbClr>
-          </a:solidFill>
-        </p:spPr>
-        <p:txBody>
-          <a:bodyPr/>
-          <a:lstStyle/>
-          <a:p>
-            <a:endParaRPr lang="ko-KR" altLang="en-US"/>
-          </a:p>
-        </p:txBody>
-      </p:sp>
-      <p:sp>
-        <p:nvSpPr>
-          <p:cNvPr id="57" name="TextBox 57"/>
-          <p:cNvSpPr txBox="1"/>
-          <p:nvPr/>
-        </p:nvSpPr>
-        <p:spPr>
-          <a:xfrm>
-            <a:off x="11987689" y="5822918"/>
-            <a:ext cx="2701957" cy="733425"/>
-          </a:xfrm>
-          <a:prstGeom prst="rect">
-            <a:avLst/>
-          </a:prstGeom>
-        </p:spPr>
-        <p:txBody>
-          <a:bodyPr lIns="0" tIns="0" rIns="0" bIns="0" rtlCol="0" anchor="t">
-            <a:spAutoFit/>
-          </a:bodyPr>
-          <a:lstStyle/>
-          <a:p>
-            <a:pPr algn="l">
-              <a:lnSpc>
-                <a:spcPts val="2520"/>
-              </a:lnSpc>
-            </a:pPr>
-            <a:r>
-              <a:rPr lang="en-US" sz="1800" b="1">
-                <a:solidFill>
-                  <a:srgbClr val="34D39E"/>
-                </a:solidFill>
-                <a:latin typeface="IBM Plex Mono Medium"/>
-                <a:ea typeface="IBM Plex Mono Medium"/>
-                <a:cs typeface="IBM Plex Mono Medium"/>
-                <a:sym typeface="IBM Plex Mono Medium"/>
-              </a:rPr>
-              <a:t>XX MB</a:t>
-            </a:r>
-          </a:p>
-        </p:txBody>
-      </p:sp>
-      <p:sp>
-        <p:nvSpPr>
-          <p:cNvPr id="58" name="AutoShape 58"/>
-          <p:cNvSpPr/>
-          <p:nvPr/>
-        </p:nvSpPr>
-        <p:spPr>
-          <a:xfrm>
-            <a:off x="14689646" y="5861018"/>
-            <a:ext cx="2026730" cy="9525"/>
-          </a:xfrm>
-          <a:prstGeom prst="rect">
-            <a:avLst/>
-          </a:prstGeom>
-          <a:solidFill>
-            <a:srgbClr val="FFFFFF">
-              <a:alpha val="7843"/>
-            </a:srgbClr>
-          </a:solidFill>
-        </p:spPr>
-        <p:txBody>
-          <a:bodyPr/>
-          <a:lstStyle/>
-          <a:p>
-            <a:endParaRPr lang="ko-KR" altLang="en-US"/>
-          </a:p>
-        </p:txBody>
-      </p:sp>
-      <p:sp>
-        <p:nvSpPr>
-          <p:cNvPr id="59" name="TextBox 59"/>
-          <p:cNvSpPr txBox="1"/>
-          <p:nvPr/>
-        </p:nvSpPr>
-        <p:spPr>
-          <a:xfrm>
-            <a:off x="14689646" y="5832443"/>
-            <a:ext cx="2026730" cy="723900"/>
-          </a:xfrm>
-          <a:prstGeom prst="rect">
-            <a:avLst/>
-          </a:prstGeom>
-        </p:spPr>
-        <p:txBody>
-          <a:bodyPr lIns="0" tIns="0" rIns="0" bIns="0" rtlCol="0" anchor="t">
-            <a:spAutoFit/>
-          </a:bodyPr>
-          <a:lstStyle/>
-          <a:p>
-            <a:pPr algn="l">
-              <a:lnSpc>
-                <a:spcPts val="1995"/>
-              </a:lnSpc>
-            </a:pPr>
-            <a:r>
-              <a:rPr lang="en-US" sz="1425">
-                <a:solidFill>
-                  <a:srgbClr val="9AA0FF"/>
-                </a:solidFill>
-                <a:latin typeface="IBM Plex Mono"/>
-                <a:ea typeface="IBM Plex Mono"/>
-                <a:cs typeface="IBM Plex Mono"/>
-                <a:sym typeface="IBM Plex Mono"/>
-              </a:rPr>
-              <a:t>↓ —%</a:t>
-            </a:r>
-          </a:p>
-        </p:txBody>
-      </p:sp>
-      <p:sp>
-        <p:nvSpPr>
-          <p:cNvPr id="60" name="AutoShape 60"/>
-          <p:cNvSpPr/>
-          <p:nvPr/>
-        </p:nvSpPr>
-        <p:spPr>
-          <a:xfrm>
-            <a:off x="5457825" y="6556343"/>
-            <a:ext cx="3827907" cy="9525"/>
-          </a:xfrm>
-          <a:prstGeom prst="rect">
-            <a:avLst/>
-          </a:prstGeom>
-          <a:solidFill>
-            <a:srgbClr val="FFFFFF">
-              <a:alpha val="7843"/>
-            </a:srgbClr>
-          </a:solidFill>
-        </p:spPr>
-        <p:txBody>
-          <a:bodyPr/>
-          <a:lstStyle/>
-          <a:p>
-            <a:endParaRPr lang="ko-KR" altLang="en-US"/>
-          </a:p>
-        </p:txBody>
-      </p:sp>
-      <p:sp>
-        <p:nvSpPr>
-          <p:cNvPr id="61" name="TextBox 61"/>
-          <p:cNvSpPr txBox="1"/>
-          <p:nvPr/>
-        </p:nvSpPr>
-        <p:spPr>
-          <a:xfrm>
-            <a:off x="5457825" y="6518243"/>
-            <a:ext cx="3827907" cy="728662"/>
-          </a:xfrm>
-          <a:prstGeom prst="rect">
-            <a:avLst/>
-          </a:prstGeom>
-        </p:spPr>
-        <p:txBody>
-          <a:bodyPr lIns="0" tIns="0" rIns="0" bIns="0" rtlCol="0" anchor="t">
-            <a:spAutoFit/>
-          </a:bodyPr>
-          <a:lstStyle/>
-          <a:p>
-            <a:pPr algn="l">
-              <a:lnSpc>
-                <a:spcPts val="2520"/>
-              </a:lnSpc>
-            </a:pPr>
-            <a:r>
-              <a:rPr lang="en-US" sz="1800">
-                <a:solidFill>
-                  <a:srgbClr val="A6ABCE"/>
-                </a:solidFill>
-                <a:latin typeface="IBM Plex Sans"/>
-                <a:ea typeface="IBM Plex Sans"/>
-                <a:cs typeface="IBM Plex Sans"/>
-                <a:sym typeface="IBM Plex Sans"/>
-              </a:rPr>
-              <a:t>Accuracy</a:t>
-            </a:r>
-          </a:p>
-        </p:txBody>
-      </p:sp>
-      <p:sp>
-        <p:nvSpPr>
-          <p:cNvPr id="62" name="AutoShape 62"/>
-          <p:cNvSpPr/>
-          <p:nvPr/>
-        </p:nvSpPr>
-        <p:spPr>
-          <a:xfrm>
-            <a:off x="9285732" y="6556343"/>
-            <a:ext cx="2701957" cy="9525"/>
-          </a:xfrm>
-          <a:prstGeom prst="rect">
-            <a:avLst/>
-          </a:prstGeom>
-          <a:solidFill>
-            <a:srgbClr val="FFFFFF">
-              <a:alpha val="7843"/>
-            </a:srgbClr>
-          </a:solidFill>
-        </p:spPr>
-        <p:txBody>
-          <a:bodyPr/>
-          <a:lstStyle/>
-          <a:p>
-            <a:endParaRPr lang="ko-KR" altLang="en-US"/>
-          </a:p>
-        </p:txBody>
-      </p:sp>
-      <p:sp>
-        <p:nvSpPr>
-          <p:cNvPr id="63" name="TextBox 63"/>
-          <p:cNvSpPr txBox="1"/>
-          <p:nvPr/>
-        </p:nvSpPr>
-        <p:spPr>
-          <a:xfrm>
-            <a:off x="9285732" y="6518243"/>
-            <a:ext cx="2701957" cy="728662"/>
-          </a:xfrm>
-          <a:prstGeom prst="rect">
-            <a:avLst/>
-          </a:prstGeom>
-        </p:spPr>
-        <p:txBody>
-          <a:bodyPr lIns="0" tIns="0" rIns="0" bIns="0" rtlCol="0" anchor="t">
-            <a:spAutoFit/>
-          </a:bodyPr>
-          <a:lstStyle/>
-          <a:p>
-            <a:pPr algn="l">
-              <a:lnSpc>
-                <a:spcPts val="2520"/>
-              </a:lnSpc>
-            </a:pPr>
-            <a:r>
-              <a:rPr lang="en-US" sz="1800">
-                <a:solidFill>
-                  <a:srgbClr val="A6ABCE"/>
-                </a:solidFill>
-                <a:latin typeface="IBM Plex Mono"/>
-                <a:ea typeface="IBM Plex Mono"/>
-                <a:cs typeface="IBM Plex Mono"/>
-                <a:sym typeface="IBM Plex Mono"/>
-              </a:rPr>
-              <a:t>XX.X%</a:t>
-            </a:r>
-          </a:p>
-        </p:txBody>
-      </p:sp>
-      <p:sp>
-        <p:nvSpPr>
-          <p:cNvPr id="64" name="AutoShape 64"/>
-          <p:cNvSpPr/>
-          <p:nvPr/>
-        </p:nvSpPr>
-        <p:spPr>
-          <a:xfrm>
-            <a:off x="11987689" y="6556343"/>
-            <a:ext cx="2701957" cy="9525"/>
-          </a:xfrm>
-          <a:prstGeom prst="rect">
-            <a:avLst/>
-          </a:prstGeom>
-          <a:solidFill>
-            <a:srgbClr val="FFFFFF">
-              <a:alpha val="7843"/>
-            </a:srgbClr>
-          </a:solidFill>
-        </p:spPr>
-        <p:txBody>
-          <a:bodyPr/>
-          <a:lstStyle/>
-          <a:p>
-            <a:endParaRPr lang="ko-KR" altLang="en-US"/>
-          </a:p>
-        </p:txBody>
-      </p:sp>
-      <p:sp>
-        <p:nvSpPr>
-          <p:cNvPr id="65" name="TextBox 65"/>
-          <p:cNvSpPr txBox="1"/>
-          <p:nvPr/>
-        </p:nvSpPr>
-        <p:spPr>
-          <a:xfrm>
-            <a:off x="11987689" y="6518243"/>
-            <a:ext cx="2701957" cy="728662"/>
-          </a:xfrm>
-          <a:prstGeom prst="rect">
-            <a:avLst/>
-          </a:prstGeom>
-        </p:spPr>
-        <p:txBody>
-          <a:bodyPr lIns="0" tIns="0" rIns="0" bIns="0" rtlCol="0" anchor="t">
-            <a:spAutoFit/>
-          </a:bodyPr>
-          <a:lstStyle/>
-          <a:p>
-            <a:pPr algn="l">
-              <a:lnSpc>
-                <a:spcPts val="2520"/>
-              </a:lnSpc>
-            </a:pPr>
-            <a:r>
-              <a:rPr lang="en-US" sz="1800" b="1">
-                <a:solidFill>
-                  <a:srgbClr val="34D39E"/>
-                </a:solidFill>
-                <a:latin typeface="IBM Plex Mono Medium"/>
-                <a:ea typeface="IBM Plex Mono Medium"/>
-                <a:cs typeface="IBM Plex Mono Medium"/>
-                <a:sym typeface="IBM Plex Mono Medium"/>
-              </a:rPr>
-              <a:t>XX.X%</a:t>
-            </a:r>
-          </a:p>
-        </p:txBody>
-      </p:sp>
-      <p:sp>
-        <p:nvSpPr>
-          <p:cNvPr id="66" name="AutoShape 66"/>
-          <p:cNvSpPr/>
-          <p:nvPr/>
-        </p:nvSpPr>
-        <p:spPr>
-          <a:xfrm>
-            <a:off x="14689646" y="6556343"/>
-            <a:ext cx="2026730" cy="9525"/>
-          </a:xfrm>
-          <a:prstGeom prst="rect">
-            <a:avLst/>
-          </a:prstGeom>
-          <a:solidFill>
-            <a:srgbClr val="FFFFFF">
-              <a:alpha val="7843"/>
-            </a:srgbClr>
-          </a:solidFill>
-        </p:spPr>
-        <p:txBody>
-          <a:bodyPr/>
-          <a:lstStyle/>
-          <a:p>
-            <a:endParaRPr lang="ko-KR" altLang="en-US"/>
-          </a:p>
-        </p:txBody>
-      </p:sp>
-      <p:sp>
-        <p:nvSpPr>
-          <p:cNvPr id="67" name="TextBox 67"/>
-          <p:cNvSpPr txBox="1"/>
-          <p:nvPr/>
-        </p:nvSpPr>
-        <p:spPr>
-          <a:xfrm>
-            <a:off x="14689646" y="6527768"/>
-            <a:ext cx="2026730" cy="719137"/>
-          </a:xfrm>
-          <a:prstGeom prst="rect">
-            <a:avLst/>
-          </a:prstGeom>
-        </p:spPr>
-        <p:txBody>
-          <a:bodyPr lIns="0" tIns="0" rIns="0" bIns="0" rtlCol="0" anchor="t">
-            <a:spAutoFit/>
-          </a:bodyPr>
-          <a:lstStyle/>
-          <a:p>
-            <a:pPr algn="l">
-              <a:lnSpc>
-                <a:spcPts val="1995"/>
-              </a:lnSpc>
-            </a:pPr>
-            <a:r>
-              <a:rPr lang="en-US" sz="1425">
-                <a:solidFill>
-                  <a:srgbClr val="9AA0FF"/>
-                </a:solidFill>
-                <a:latin typeface="IBM Plex Mono"/>
-                <a:ea typeface="IBM Plex Mono"/>
-                <a:cs typeface="IBM Plex Mono"/>
-                <a:sym typeface="IBM Plex Mono"/>
-              </a:rPr>
-              <a:t>−0.X pt</a:t>
-            </a:r>
-          </a:p>
-        </p:txBody>
-      </p:sp>
-      <p:sp>
-        <p:nvSpPr>
-          <p:cNvPr id="68" name="TextBox 68"/>
-          <p:cNvSpPr txBox="1"/>
-          <p:nvPr/>
-        </p:nvSpPr>
-        <p:spPr>
-          <a:xfrm>
-            <a:off x="5457825" y="7437406"/>
-            <a:ext cx="11258550" cy="280988"/>
-          </a:xfrm>
-          <a:prstGeom prst="rect">
-            <a:avLst/>
-          </a:prstGeom>
-        </p:spPr>
-        <p:txBody>
-          <a:bodyPr lIns="0" tIns="0" rIns="0" bIns="0" rtlCol="0" anchor="t">
-            <a:spAutoFit/>
-          </a:bodyPr>
-          <a:lstStyle/>
-          <a:p>
-            <a:pPr algn="l">
-              <a:lnSpc>
-                <a:spcPts val="1912"/>
-              </a:lnSpc>
-            </a:pPr>
-            <a:r>
-              <a:rPr lang="en-US" sz="1275">
-                <a:solidFill>
-                  <a:srgbClr val="6B7099"/>
-                </a:solidFill>
-                <a:latin typeface="IBM Plex Mono"/>
-                <a:ea typeface="IBM Plex Mono"/>
-                <a:cs typeface="IBM Plex Mono"/>
-                <a:sym typeface="IBM Plex Mono"/>
-              </a:rPr>
-              <a:t>Drop in your measured numbers — the layout scales to whatever you report.</a:t>
-            </a:r>
-          </a:p>
-        </p:txBody>
-      </p:sp>
-      <p:sp>
-        <p:nvSpPr>
-          <p:cNvPr id="69" name="Freeform 69"/>
-          <p:cNvSpPr/>
-          <p:nvPr/>
-        </p:nvSpPr>
-        <p:spPr>
-          <a:xfrm>
-            <a:off x="1543050" y="4215574"/>
-            <a:ext cx="247650" cy="247650"/>
-          </a:xfrm>
-          <a:custGeom>
-            <a:avLst/>
-            <a:gdLst/>
-            <a:ahLst/>
-            <a:cxnLst/>
-            <a:rect l="l" t="t" r="r" b="b"/>
-            <a:pathLst>
-              <a:path w="247650" h="247650">
-                <a:moveTo>
-                  <a:pt x="0" y="0"/>
-                </a:moveTo>
-                <a:lnTo>
-                  <a:pt x="247650" y="0"/>
-                </a:lnTo>
-                <a:lnTo>
-                  <a:pt x="247650" y="247650"/>
-                </a:lnTo>
-                <a:lnTo>
-                  <a:pt x="0" y="247650"/>
-                </a:lnTo>
-                <a:lnTo>
-                  <a:pt x="0" y="0"/>
-                </a:lnTo>
-                <a:close/>
-              </a:path>
-            </a:pathLst>
-          </a:custGeom>
-          <a:blipFill>
-            <a:blip r:embed="rId3">
-              <a:extLst>
-                <a:ext uri="{96DAC541-7B7A-43D3-8B79-37D633B846F1}">
-                  <asvg:svgBlip xmlns:asvg="http://schemas.microsoft.com/office/drawing/2016/SVG/main" r:embed="rId4"/>
-                </a:ext>
-              </a:extLst>
-            </a:blip>
-            <a:stretch>
-              <a:fillRect/>
-            </a:stretch>
-          </a:blipFill>
-        </p:spPr>
-        <p:txBody>
-          <a:bodyPr/>
-          <a:lstStyle/>
-          <a:p>
-            <a:endParaRPr lang="ko-KR" altLang="en-US"/>
-          </a:p>
-        </p:txBody>
-      </p:sp>
-      <p:sp>
-        <p:nvSpPr>
-          <p:cNvPr id="70" name="Freeform 70"/>
-          <p:cNvSpPr/>
-          <p:nvPr/>
-        </p:nvSpPr>
-        <p:spPr>
-          <a:xfrm>
-            <a:off x="1543050" y="6344412"/>
-            <a:ext cx="247650" cy="247650"/>
-          </a:xfrm>
-          <a:custGeom>
-            <a:avLst/>
-            <a:gdLst/>
-            <a:ahLst/>
-            <a:cxnLst/>
-            <a:rect l="l" t="t" r="r" b="b"/>
-            <a:pathLst>
-              <a:path w="247650" h="247650">
-                <a:moveTo>
-                  <a:pt x="0" y="0"/>
-                </a:moveTo>
-                <a:lnTo>
-                  <a:pt x="247650" y="0"/>
-                </a:lnTo>
-                <a:lnTo>
-                  <a:pt x="247650" y="247650"/>
-                </a:lnTo>
-                <a:lnTo>
-                  <a:pt x="0" y="247650"/>
-                </a:lnTo>
-                <a:lnTo>
-                  <a:pt x="0" y="0"/>
-                </a:lnTo>
-                <a:close/>
-              </a:path>
-            </a:pathLst>
-          </a:custGeom>
-          <a:blipFill>
-            <a:blip r:embed="rId5">
-              <a:extLst>
-                <a:ext uri="{96DAC541-7B7A-43D3-8B79-37D633B846F1}">
-                  <asvg:svgBlip xmlns:asvg="http://schemas.microsoft.com/office/drawing/2016/SVG/main" r:embed="rId6"/>
-                </a:ext>
-              </a:extLst>
-            </a:blip>
-            <a:stretch>
-              <a:fillRect/>
-            </a:stretch>
-          </a:blipFill>
-        </p:spPr>
-        <p:txBody>
-          <a:bodyPr/>
-          <a:lstStyle/>
-          <a:p>
-            <a:endParaRPr lang="ko-KR" altLang="en-US"/>
-          </a:p>
-        </p:txBody>
-      </p:sp>
+      <p:grpSp>
+        <p:nvGrpSpPr>
+          <p:cNvPr id="77" name="Group 76">
+            <a:extLst>
+              <a:ext uri="{FF2B5EF4-FFF2-40B4-BE49-F238E27FC236}">
+                <a16:creationId xmlns:a16="http://schemas.microsoft.com/office/drawing/2014/main" id="{EC71A372-FCD8-C3E1-0FEC-8130C247E861}"/>
+              </a:ext>
+            </a:extLst>
+          </p:cNvPr>
+          <p:cNvGrpSpPr/>
+          <p:nvPr/>
+        </p:nvGrpSpPr>
+        <p:grpSpPr>
+          <a:xfrm>
+            <a:off x="13510165" y="597646"/>
+            <a:ext cx="3429000" cy="1919288"/>
+            <a:chOff x="1143000" y="5963412"/>
+            <a:chExt cx="3429000" cy="1919288"/>
+          </a:xfrm>
+        </p:grpSpPr>
+        <p:grpSp>
+          <p:nvGrpSpPr>
+            <p:cNvPr id="16" name="Group 16"/>
+            <p:cNvGrpSpPr/>
+            <p:nvPr/>
+          </p:nvGrpSpPr>
+          <p:grpSpPr>
+            <a:xfrm>
+              <a:off x="1143000" y="5963412"/>
+              <a:ext cx="3429000" cy="1919288"/>
+              <a:chOff x="0" y="0"/>
+              <a:chExt cx="4572000" cy="2559050"/>
+            </a:xfrm>
+          </p:grpSpPr>
+          <p:sp>
+            <p:nvSpPr>
+              <p:cNvPr id="17" name="Freeform 17"/>
+              <p:cNvSpPr/>
+              <p:nvPr/>
+            </p:nvSpPr>
+            <p:spPr>
+              <a:xfrm>
+                <a:off x="0" y="0"/>
+                <a:ext cx="4572000" cy="2559050"/>
+              </a:xfrm>
+              <a:custGeom>
+                <a:avLst/>
+                <a:gdLst/>
+                <a:ahLst/>
+                <a:cxnLst/>
+                <a:rect l="l" t="t" r="r" b="b"/>
+                <a:pathLst>
+                  <a:path w="4572000" h="2559050">
+                    <a:moveTo>
+                      <a:pt x="279400" y="0"/>
+                    </a:moveTo>
+                    <a:lnTo>
+                      <a:pt x="4292600" y="0"/>
+                    </a:lnTo>
+                    <a:cubicBezTo>
+                      <a:pt x="4446905" y="0"/>
+                      <a:pt x="4572000" y="125095"/>
+                      <a:pt x="4572000" y="279400"/>
+                    </a:cubicBezTo>
+                    <a:lnTo>
+                      <a:pt x="4572000" y="2279650"/>
+                    </a:lnTo>
+                    <a:cubicBezTo>
+                      <a:pt x="4572000" y="2433955"/>
+                      <a:pt x="4446905" y="2559050"/>
+                      <a:pt x="4292600" y="2559050"/>
+                    </a:cubicBezTo>
+                    <a:lnTo>
+                      <a:pt x="279400" y="2559050"/>
+                    </a:lnTo>
+                    <a:cubicBezTo>
+                      <a:pt x="125095" y="2559050"/>
+                      <a:pt x="0" y="2433955"/>
+                      <a:pt x="0" y="2279650"/>
+                    </a:cubicBezTo>
+                    <a:lnTo>
+                      <a:pt x="0" y="279400"/>
+                    </a:lnTo>
+                    <a:cubicBezTo>
+                      <a:pt x="0" y="125095"/>
+                      <a:pt x="125095" y="0"/>
+                      <a:pt x="279400" y="0"/>
+                    </a:cubicBezTo>
+                    <a:close/>
+                  </a:path>
+                </a:pathLst>
+              </a:custGeom>
+              <a:solidFill>
+                <a:srgbClr val="161A32"/>
+              </a:solidFill>
+            </p:spPr>
+            <p:txBody>
+              <a:bodyPr/>
+              <a:lstStyle/>
+              <a:p>
+                <a:endParaRPr lang="ko-KR" altLang="en-US"/>
+              </a:p>
+            </p:txBody>
+          </p:sp>
+        </p:grpSp>
+        <p:sp>
+          <p:nvSpPr>
+            <p:cNvPr id="18" name="AutoShape 18"/>
+            <p:cNvSpPr/>
+            <p:nvPr/>
+          </p:nvSpPr>
+          <p:spPr>
+            <a:xfrm>
+              <a:off x="1143000" y="5963412"/>
+              <a:ext cx="3429000" cy="9525"/>
+            </a:xfrm>
+            <a:prstGeom prst="rect">
+              <a:avLst/>
+            </a:prstGeom>
+            <a:solidFill>
+              <a:srgbClr val="FFFFFF">
+                <a:alpha val="7843"/>
+              </a:srgbClr>
+            </a:solidFill>
+          </p:spPr>
+          <p:txBody>
+            <a:bodyPr/>
+            <a:lstStyle/>
+            <a:p>
+              <a:endParaRPr lang="ko-KR" altLang="en-US"/>
+            </a:p>
+          </p:txBody>
+        </p:sp>
+        <p:sp>
+          <p:nvSpPr>
+            <p:cNvPr id="19" name="AutoShape 19"/>
+            <p:cNvSpPr/>
+            <p:nvPr/>
+          </p:nvSpPr>
+          <p:spPr>
+            <a:xfrm>
+              <a:off x="4562475" y="5972937"/>
+              <a:ext cx="9525" cy="1900238"/>
+            </a:xfrm>
+            <a:prstGeom prst="rect">
+              <a:avLst/>
+            </a:prstGeom>
+            <a:solidFill>
+              <a:srgbClr val="FFFFFF">
+                <a:alpha val="7843"/>
+              </a:srgbClr>
+            </a:solidFill>
+          </p:spPr>
+          <p:txBody>
+            <a:bodyPr/>
+            <a:lstStyle/>
+            <a:p>
+              <a:endParaRPr lang="ko-KR" altLang="en-US"/>
+            </a:p>
+          </p:txBody>
+        </p:sp>
+        <p:sp>
+          <p:nvSpPr>
+            <p:cNvPr id="20" name="AutoShape 20"/>
+            <p:cNvSpPr/>
+            <p:nvPr/>
+          </p:nvSpPr>
+          <p:spPr>
+            <a:xfrm>
+              <a:off x="1143000" y="7873175"/>
+              <a:ext cx="3429000" cy="9525"/>
+            </a:xfrm>
+            <a:prstGeom prst="rect">
+              <a:avLst/>
+            </a:prstGeom>
+            <a:solidFill>
+              <a:srgbClr val="FFFFFF">
+                <a:alpha val="7843"/>
+              </a:srgbClr>
+            </a:solidFill>
+          </p:spPr>
+          <p:txBody>
+            <a:bodyPr/>
+            <a:lstStyle/>
+            <a:p>
+              <a:endParaRPr lang="ko-KR" altLang="en-US"/>
+            </a:p>
+          </p:txBody>
+        </p:sp>
+        <p:sp>
+          <p:nvSpPr>
+            <p:cNvPr id="21" name="AutoShape 21"/>
+            <p:cNvSpPr/>
+            <p:nvPr/>
+          </p:nvSpPr>
+          <p:spPr>
+            <a:xfrm>
+              <a:off x="1143000" y="5972937"/>
+              <a:ext cx="9525" cy="1900238"/>
+            </a:xfrm>
+            <a:prstGeom prst="rect">
+              <a:avLst/>
+            </a:prstGeom>
+            <a:solidFill>
+              <a:srgbClr val="FFFFFF">
+                <a:alpha val="7843"/>
+              </a:srgbClr>
+            </a:solidFill>
+          </p:spPr>
+          <p:txBody>
+            <a:bodyPr/>
+            <a:lstStyle/>
+            <a:p>
+              <a:endParaRPr lang="ko-KR" altLang="en-US"/>
+            </a:p>
+          </p:txBody>
+        </p:sp>
+        <p:grpSp>
+          <p:nvGrpSpPr>
+            <p:cNvPr id="22" name="Group 22"/>
+            <p:cNvGrpSpPr/>
+            <p:nvPr/>
+          </p:nvGrpSpPr>
+          <p:grpSpPr>
+            <a:xfrm>
+              <a:off x="1438275" y="6239637"/>
+              <a:ext cx="457200" cy="457200"/>
+              <a:chOff x="0" y="0"/>
+              <a:chExt cx="609600" cy="609600"/>
+            </a:xfrm>
+          </p:grpSpPr>
+          <p:sp>
+            <p:nvSpPr>
+              <p:cNvPr id="23" name="Freeform 23"/>
+              <p:cNvSpPr/>
+              <p:nvPr/>
+            </p:nvSpPr>
+            <p:spPr>
+              <a:xfrm>
+                <a:off x="0" y="0"/>
+                <a:ext cx="609600" cy="609600"/>
+              </a:xfrm>
+              <a:custGeom>
+                <a:avLst/>
+                <a:gdLst/>
+                <a:ahLst/>
+                <a:cxnLst/>
+                <a:rect l="l" t="t" r="r" b="b"/>
+                <a:pathLst>
+                  <a:path w="609600" h="609600">
+                    <a:moveTo>
+                      <a:pt x="165100" y="0"/>
+                    </a:moveTo>
+                    <a:lnTo>
+                      <a:pt x="444500" y="0"/>
+                    </a:lnTo>
+                    <a:cubicBezTo>
+                      <a:pt x="535686" y="0"/>
+                      <a:pt x="609600" y="73914"/>
+                      <a:pt x="609600" y="165100"/>
+                    </a:cubicBezTo>
+                    <a:lnTo>
+                      <a:pt x="609600" y="444500"/>
+                    </a:lnTo>
+                    <a:cubicBezTo>
+                      <a:pt x="609600" y="535686"/>
+                      <a:pt x="535686" y="609600"/>
+                      <a:pt x="444500" y="609600"/>
+                    </a:cubicBezTo>
+                    <a:lnTo>
+                      <a:pt x="165100" y="609600"/>
+                    </a:lnTo>
+                    <a:cubicBezTo>
+                      <a:pt x="73914" y="609600"/>
+                      <a:pt x="0" y="535686"/>
+                      <a:pt x="0" y="444500"/>
+                    </a:cubicBezTo>
+                    <a:lnTo>
+                      <a:pt x="0" y="165100"/>
+                    </a:lnTo>
+                    <a:cubicBezTo>
+                      <a:pt x="0" y="73914"/>
+                      <a:pt x="73914" y="0"/>
+                      <a:pt x="165100" y="0"/>
+                    </a:cubicBezTo>
+                    <a:close/>
+                  </a:path>
+                </a:pathLst>
+              </a:custGeom>
+              <a:solidFill>
+                <a:srgbClr val="7C83FF">
+                  <a:alpha val="1569"/>
+                </a:srgbClr>
+              </a:solidFill>
+            </p:spPr>
+            <p:txBody>
+              <a:bodyPr/>
+              <a:lstStyle/>
+              <a:p>
+                <a:endParaRPr lang="ko-KR" altLang="en-US"/>
+              </a:p>
+            </p:txBody>
+          </p:sp>
+        </p:grpSp>
+        <p:sp>
+          <p:nvSpPr>
+            <p:cNvPr id="24" name="TextBox 24"/>
+            <p:cNvSpPr txBox="1"/>
+            <p:nvPr/>
+          </p:nvSpPr>
+          <p:spPr>
+            <a:xfrm>
+              <a:off x="2028825" y="6268211"/>
+              <a:ext cx="2076450" cy="323165"/>
+            </a:xfrm>
+            <a:prstGeom prst="rect">
+              <a:avLst/>
+            </a:prstGeom>
+          </p:spPr>
+          <p:txBody>
+            <a:bodyPr wrap="square" lIns="0" tIns="0" rIns="0" bIns="0" rtlCol="0" anchor="t">
+              <a:spAutoFit/>
+            </a:bodyPr>
+            <a:lstStyle/>
+            <a:p>
+              <a:pPr algn="l">
+                <a:lnSpc>
+                  <a:spcPts val="2729"/>
+                </a:lnSpc>
+              </a:pPr>
+              <a:r>
+                <a:rPr lang="en-US" sz="1950" b="1" spc="-29" dirty="0">
+                  <a:solidFill>
+                    <a:srgbClr val="EEF0FF"/>
+                  </a:solidFill>
+                  <a:latin typeface="IBM Plex Sans Bold"/>
+                  <a:ea typeface="IBM Plex Sans Bold"/>
+                  <a:cs typeface="IBM Plex Sans Bold"/>
+                  <a:sym typeface="IBM Plex Sans Bold"/>
+                </a:rPr>
+                <a:t>Quantization</a:t>
+              </a:r>
+            </a:p>
+          </p:txBody>
+        </p:sp>
+        <p:sp>
+          <p:nvSpPr>
+            <p:cNvPr id="25" name="TextBox 25"/>
+            <p:cNvSpPr txBox="1"/>
+            <p:nvPr/>
+          </p:nvSpPr>
+          <p:spPr>
+            <a:xfrm>
+              <a:off x="1438275" y="6744462"/>
+              <a:ext cx="2838450" cy="862013"/>
+            </a:xfrm>
+            <a:prstGeom prst="rect">
+              <a:avLst/>
+            </a:prstGeom>
+          </p:spPr>
+          <p:txBody>
+            <a:bodyPr lIns="0" tIns="0" rIns="0" bIns="0" rtlCol="0" anchor="t">
+              <a:spAutoFit/>
+            </a:bodyPr>
+            <a:lstStyle/>
+            <a:p>
+              <a:pPr algn="l">
+                <a:lnSpc>
+                  <a:spcPts val="2137"/>
+                </a:lnSpc>
+              </a:pPr>
+              <a:r>
+                <a:rPr lang="en-US" sz="1425">
+                  <a:solidFill>
+                    <a:srgbClr val="A6ABCE"/>
+                  </a:solidFill>
+                  <a:latin typeface="IBM Plex Sans"/>
+                  <a:ea typeface="IBM Plex Sans"/>
+                  <a:cs typeface="IBM Plex Sans"/>
+                  <a:sym typeface="IBM Plex Sans"/>
+                </a:rPr>
+                <a:t>Shipped as float16 TFLite (FP32 → FP16, 2× smaller); swap to INT8 figures only if measured.</a:t>
+              </a:r>
+            </a:p>
+          </p:txBody>
+        </p:sp>
+        <p:sp>
+          <p:nvSpPr>
+            <p:cNvPr id="70" name="Freeform 70"/>
+            <p:cNvSpPr/>
+            <p:nvPr/>
+          </p:nvSpPr>
+          <p:spPr>
+            <a:xfrm>
+              <a:off x="1543050" y="6344412"/>
+              <a:ext cx="247650" cy="247650"/>
+            </a:xfrm>
+            <a:custGeom>
+              <a:avLst/>
+              <a:gdLst/>
+              <a:ahLst/>
+              <a:cxnLst/>
+              <a:rect l="l" t="t" r="r" b="b"/>
+              <a:pathLst>
+                <a:path w="247650" h="247650">
+                  <a:moveTo>
+                    <a:pt x="0" y="0"/>
+                  </a:moveTo>
+                  <a:lnTo>
+                    <a:pt x="247650" y="0"/>
+                  </a:lnTo>
+                  <a:lnTo>
+                    <a:pt x="247650" y="247650"/>
+                  </a:lnTo>
+                  <a:lnTo>
+                    <a:pt x="0" y="247650"/>
+                  </a:lnTo>
+                  <a:lnTo>
+                    <a:pt x="0" y="0"/>
+                  </a:lnTo>
+                  <a:close/>
+                </a:path>
+              </a:pathLst>
+            </a:custGeom>
+            <a:blipFill>
+              <a:blip r:embed="rId5">
+                <a:extLst>
+                  <a:ext uri="{96DAC541-7B7A-43D3-8B79-37D633B846F1}">
+                    <asvg:svgBlip xmlns:asvg="http://schemas.microsoft.com/office/drawing/2016/SVG/main" r:embed="rId6"/>
+                  </a:ext>
+                </a:extLst>
+              </a:blip>
+              <a:stretch>
+                <a:fillRect/>
+              </a:stretch>
+            </a:blipFill>
+          </p:spPr>
+          <p:txBody>
+            <a:bodyPr/>
+            <a:lstStyle/>
+            <a:p>
+              <a:endParaRPr lang="ko-KR" altLang="en-US"/>
+            </a:p>
+          </p:txBody>
+        </p:sp>
+      </p:grpSp>
       <p:sp>
         <p:nvSpPr>
           <p:cNvPr id="71" name="AutoShape 71"/>
@@ -25196,6 +25940,128 @@
                 <a:sym typeface="IBM Plex Mono"/>
               </a:rPr>
               <a:t>08</a:t>
+            </a:r>
+          </a:p>
+        </p:txBody>
+      </p:sp>
+      <p:graphicFrame>
+        <p:nvGraphicFramePr>
+          <p:cNvPr id="75" name="Chart 74">
+            <a:extLst>
+              <a:ext uri="{FF2B5EF4-FFF2-40B4-BE49-F238E27FC236}">
+                <a16:creationId xmlns:a16="http://schemas.microsoft.com/office/drawing/2014/main" id="{57A2A629-01C7-8AEB-C8F7-DD00F02339C1}"/>
+              </a:ext>
+            </a:extLst>
+          </p:cNvPr>
+          <p:cNvGraphicFramePr/>
+          <p:nvPr>
+            <p:extLst>
+              <p:ext uri="{D42A27DB-BD31-4B8C-83A1-F6EECF244321}">
+                <p14:modId xmlns:p14="http://schemas.microsoft.com/office/powerpoint/2010/main" val="3697938512"/>
+              </p:ext>
+            </p:extLst>
+          </p:nvPr>
+        </p:nvGraphicFramePr>
+        <p:xfrm>
+          <a:off x="882015" y="3543300"/>
+          <a:ext cx="7920000" cy="4320000"/>
+        </p:xfrm>
+        <a:graphic>
+          <a:graphicData uri="http://schemas.openxmlformats.org/drawingml/2006/chart">
+            <c:chart xmlns:c="http://schemas.openxmlformats.org/drawingml/2006/chart" xmlns:r="http://schemas.openxmlformats.org/officeDocument/2006/relationships" r:id="rId7"/>
+          </a:graphicData>
+        </a:graphic>
+      </p:graphicFrame>
+      <p:graphicFrame>
+        <p:nvGraphicFramePr>
+          <p:cNvPr id="78" name="Chart 77">
+            <a:extLst>
+              <a:ext uri="{FF2B5EF4-FFF2-40B4-BE49-F238E27FC236}">
+                <a16:creationId xmlns:a16="http://schemas.microsoft.com/office/drawing/2014/main" id="{AF34D5B8-E77E-1DA2-A47C-9C3A671C912F}"/>
+              </a:ext>
+            </a:extLst>
+          </p:cNvPr>
+          <p:cNvGraphicFramePr/>
+          <p:nvPr>
+            <p:extLst>
+              <p:ext uri="{D42A27DB-BD31-4B8C-83A1-F6EECF244321}">
+                <p14:modId xmlns:p14="http://schemas.microsoft.com/office/powerpoint/2010/main" val="20971597"/>
+              </p:ext>
+            </p:extLst>
+          </p:nvPr>
+        </p:nvGraphicFramePr>
+        <p:xfrm>
+          <a:off x="9360000" y="3543300"/>
+          <a:ext cx="7920000" cy="4320000"/>
+        </p:xfrm>
+        <a:graphic>
+          <a:graphicData uri="http://schemas.openxmlformats.org/drawingml/2006/chart">
+            <c:chart xmlns:c="http://schemas.openxmlformats.org/drawingml/2006/chart" xmlns:r="http://schemas.openxmlformats.org/officeDocument/2006/relationships" r:id="rId8"/>
+          </a:graphicData>
+        </a:graphic>
+      </p:graphicFrame>
+      <p:sp>
+        <p:nvSpPr>
+          <p:cNvPr id="79" name="TextBox 13">
+            <a:extLst>
+              <a:ext uri="{FF2B5EF4-FFF2-40B4-BE49-F238E27FC236}">
+                <a16:creationId xmlns:a16="http://schemas.microsoft.com/office/drawing/2014/main" id="{4F8B1F4D-C9E2-F002-7FA9-927429D898E5}"/>
+              </a:ext>
+            </a:extLst>
+          </p:cNvPr>
+          <p:cNvSpPr txBox="1"/>
+          <p:nvPr/>
+        </p:nvSpPr>
+        <p:spPr>
+          <a:xfrm>
+            <a:off x="3819525" y="8154257"/>
+            <a:ext cx="10338340" cy="615553"/>
+          </a:xfrm>
+          <a:prstGeom prst="rect">
+            <a:avLst/>
+          </a:prstGeom>
+        </p:spPr>
+        <p:txBody>
+          <a:bodyPr wrap="square" lIns="0" tIns="0" rIns="0" bIns="0" rtlCol="0" anchor="t">
+            <a:spAutoFit/>
+          </a:bodyPr>
+          <a:lstStyle/>
+          <a:p>
+            <a:pPr algn="l">
+              <a:lnSpc>
+                <a:spcPts val="2362"/>
+              </a:lnSpc>
+            </a:pPr>
+            <a:r>
+              <a:rPr lang="en-US" sz="2000">
+                <a:solidFill>
+                  <a:srgbClr val="A6ABCE"/>
+                </a:solidFill>
+                <a:latin typeface="IBM Plex Sans"/>
+                <a:ea typeface="IBM Plex Sans"/>
+                <a:cs typeface="IBM Plex Sans"/>
+                <a:sym typeface="IBM Plex Sans"/>
+              </a:rPr>
+              <a:t>Quantization and pruning applied to 3 models.</a:t>
+            </a:r>
+          </a:p>
+          <a:p>
+            <a:pPr algn="l">
+              <a:lnSpc>
+                <a:spcPts val="2362"/>
+              </a:lnSpc>
+            </a:pPr>
+            <a:r>
+              <a:rPr lang="en-US" sz="2000">
+                <a:solidFill>
+                  <a:srgbClr val="A6ABCE"/>
+                </a:solidFill>
+                <a:latin typeface="IBM Plex Sans"/>
+                <a:ea typeface="IBM Plex Sans"/>
+                <a:cs typeface="IBM Plex Sans"/>
+                <a:sym typeface="IBM Plex Sans"/>
+              </a:rPr>
+              <a:t>Original TFLite models retained for 2 models to preserve accuracy.</a:t>
             </a:r>
           </a:p>
         </p:txBody>
